--- a/Low-Code-No-Code/no-code-low-code-2.pptx
+++ b/Low-Code-No-Code/no-code-low-code-2.pptx
@@ -4,6 +4,9 @@
   <p:sldMasterIdLst>
     <p:sldMasterId id="2147483648" r:id="rId1"/>
   </p:sldMasterIdLst>
+  <p:notesMasterIdLst>
+    <p:notesMasterId r:id="rId22"/>
+  </p:notesMasterIdLst>
   <p:sldIdLst>
     <p:sldId id="256" r:id="rId2"/>
     <p:sldId id="257" r:id="rId3"/>
@@ -26,10 +29,7 @@
     <p:sldId id="274" r:id="rId20"/>
     <p:sldId id="275" r:id="rId21"/>
   </p:sldIdLst>
-  <p:notesMasterIdLst>
-    <p:notesMasterId r:id="rId22"/>
-  </p:notesMasterIdLst>
-  <p:sldSz cx="9144000" cy="5143500"/>
+  <p:sldSz cx="9144000" cy="5143500" type="screen16x9"/>
   <p:notesSz cx="5143500" cy="9144000"/>
   <p:defaultTextStyle>
     <a:lvl1pPr marL="0" algn="l" defTabSz="914400" rtl="0" eaLnBrk="1" latinLnBrk="0" hangingPunct="1">
@@ -123,6 +123,11 @@
       </a:defRPr>
     </a:lvl9pPr>
   </p:defaultTextStyle>
+  <p:extLst>
+    <p:ext uri="{EFAFB233-063F-42B5-8137-9DF3F51BA10A}">
+      <p15:sldGuideLst xmlns:p15="http://schemas.microsoft.com/office/powerpoint/2012/main"/>
+    </p:ext>
+  </p:extLst>
 </p:presentation>
 </file>
 
@@ -148,234 +153,10 @@
           <a:chExt cx="0" cy="0"/>
         </a:xfrm>
       </p:grpSpPr>
-      <p:sp>
-        <p:nvSpPr>
-          <p:cNvPr id="2" name="Header Placeholder 1"/>
-          <p:cNvSpPr>
-            <a:spLocks noGrp="1"/>
-          </p:cNvSpPr>
-          <p:nvPr>
-            <p:ph type="hdr" sz="quarter"/>
-          </p:nvPr>
-        </p:nvSpPr>
-        <p:spPr>
-          <a:xfrm>
-            <a:off x="0" y="0"/>
-            <a:ext cx="2971800" cy="458788"/>
-          </a:xfrm>
-          <a:prstGeom prst="rect">
-            <a:avLst/>
-          </a:prstGeom>
-        </p:spPr>
-        <p:txBody>
-          <a:bodyPr vert="horz" lIns="91440" tIns="45720" rIns="91440" bIns="45720" rtlCol="0"/>
-          <a:lstStyle>
-            <a:lvl1pPr algn="l">
-              <a:defRPr sz="1200"/>
-            </a:lvl1pPr>
-          </a:lstStyle>
-          <a:p>
-            <a:endParaRPr lang="en-US"/>
-          </a:p>
-        </p:txBody>
-      </p:sp>
-      <p:sp>
-        <p:nvSpPr>
-          <p:cNvPr id="3" name="Date Placeholder 2"/>
-          <p:cNvSpPr>
-            <a:spLocks noGrp="1"/>
-          </p:cNvSpPr>
-          <p:nvPr>
-            <p:ph type="dt" idx="1"/>
-          </p:nvPr>
-        </p:nvSpPr>
-        <p:spPr>
-          <a:xfrm>
-            <a:off x="3884613" y="0"/>
-            <a:ext cx="2971800" cy="458788"/>
-          </a:xfrm>
-          <a:prstGeom prst="rect">
-            <a:avLst/>
-          </a:prstGeom>
-        </p:spPr>
-        <p:txBody>
-          <a:bodyPr vert="horz" lIns="91440" tIns="45720" rIns="91440" bIns="45720" rtlCol="0"/>
-          <a:lstStyle>
-            <a:lvl1pPr algn="r">
-              <a:defRPr sz="1200"/>
-            </a:lvl1pPr>
-          </a:lstStyle>
-          <a:p>
-            <a:fld id="{5282F153-3F37-0F45-9E97-73ACFA13230C}" type="datetimeFigureOut">
-              <a:rPr lang="en-US"/>
-              <a:t>7/23/19</a:t>
-            </a:fld>
-            <a:endParaRPr lang="en-US"/>
-          </a:p>
-        </p:txBody>
-      </p:sp>
-      <p:sp>
-        <p:nvSpPr>
-          <p:cNvPr id="4" name="Slide Image Placeholder 3"/>
-          <p:cNvSpPr>
-            <a:spLocks noGrp="1" noRot="1" noChangeAspect="1"/>
-          </p:cNvSpPr>
-          <p:nvPr>
-            <p:ph type="sldImg" idx="2"/>
-          </p:nvPr>
-        </p:nvSpPr>
-        <p:spPr>
-          <a:xfrm>
-            <a:off x="685800" y="1143000"/>
-            <a:ext cx="5486400" cy="3086100"/>
-          </a:xfrm>
-          <a:prstGeom prst="rect">
-            <a:avLst/>
-          </a:prstGeom>
-          <a:noFill/>
-          <a:ln w="12700">
-            <a:solidFill>
-              <a:prstClr val="black"/>
-            </a:solidFill>
-          </a:ln>
-        </p:spPr>
-        <p:txBody>
-          <a:bodyPr vert="horz" lIns="91440" tIns="45720" rIns="91440" bIns="45720" rtlCol="0" anchor="ctr"/>
-          <a:lstStyle/>
-          <a:p>
-            <a:endParaRPr lang="en-US"/>
-          </a:p>
-        </p:txBody>
-      </p:sp>
-      <p:sp>
-        <p:nvSpPr>
-          <p:cNvPr id="5" name="Notes Placeholder 4"/>
-          <p:cNvSpPr>
-            <a:spLocks noGrp="1"/>
-          </p:cNvSpPr>
-          <p:nvPr>
-            <p:ph type="body" sz="quarter" idx="3"/>
-          </p:nvPr>
-        </p:nvSpPr>
-        <p:spPr>
-          <a:xfrm>
-            <a:off x="685800" y="4400550"/>
-            <a:ext cx="5486400" cy="3600450"/>
-          </a:xfrm>
-          <a:prstGeom prst="rect">
-            <a:avLst/>
-          </a:prstGeom>
-        </p:spPr>
-        <p:txBody>
-          <a:bodyPr vert="horz" lIns="91440" tIns="45720" rIns="91440" bIns="45720" rtlCol="0"/>
-          <a:lstStyle/>
-          <a:p>
-            <a:pPr lvl="0"/>
-            <a:r>
-              <a:rPr lang="en-US"/>
-              <a:t>Click to edit Master text styles</a:t>
-            </a:r>
-          </a:p>
-          <a:p>
-            <a:pPr lvl="1"/>
-            <a:r>
-              <a:rPr lang="en-US"/>
-              <a:t>Second level</a:t>
-            </a:r>
-          </a:p>
-          <a:p>
-            <a:pPr lvl="2"/>
-            <a:r>
-              <a:rPr lang="en-US"/>
-              <a:t>Third level</a:t>
-            </a:r>
-          </a:p>
-          <a:p>
-            <a:pPr lvl="3"/>
-            <a:r>
-              <a:rPr lang="en-US"/>
-              <a:t>Fourth level</a:t>
-            </a:r>
-          </a:p>
-          <a:p>
-            <a:pPr lvl="4"/>
-            <a:r>
-              <a:rPr lang="en-US"/>
-              <a:t>Fifth level</a:t>
-            </a:r>
-          </a:p>
-        </p:txBody>
-      </p:sp>
-      <p:sp>
-        <p:nvSpPr>
-          <p:cNvPr id="6" name="Footer Placeholder 5"/>
-          <p:cNvSpPr>
-            <a:spLocks noGrp="1"/>
-          </p:cNvSpPr>
-          <p:nvPr>
-            <p:ph type="ftr" sz="quarter" idx="4"/>
-          </p:nvPr>
-        </p:nvSpPr>
-        <p:spPr>
-          <a:xfrm>
-            <a:off x="0" y="8685213"/>
-            <a:ext cx="2971800" cy="458787"/>
-          </a:xfrm>
-          <a:prstGeom prst="rect">
-            <a:avLst/>
-          </a:prstGeom>
-        </p:spPr>
-        <p:txBody>
-          <a:bodyPr vert="horz" lIns="91440" tIns="45720" rIns="91440" bIns="45720" rtlCol="0" anchor="b"/>
-          <a:lstStyle>
-            <a:lvl1pPr algn="l">
-              <a:defRPr sz="1200"/>
-            </a:lvl1pPr>
-          </a:lstStyle>
-          <a:p>
-            <a:endParaRPr lang="en-US"/>
-          </a:p>
-        </p:txBody>
-      </p:sp>
-      <p:sp>
-        <p:nvSpPr>
-          <p:cNvPr id="7" name="Slide Number Placeholder 6"/>
-          <p:cNvSpPr>
-            <a:spLocks noGrp="1"/>
-          </p:cNvSpPr>
-          <p:nvPr>
-            <p:ph type="sldNum" sz="quarter" idx="5"/>
-          </p:nvPr>
-        </p:nvSpPr>
-        <p:spPr>
-          <a:xfrm>
-            <a:off x="3884613" y="8685213"/>
-            <a:ext cx="2971800" cy="458787"/>
-          </a:xfrm>
-          <a:prstGeom prst="rect">
-            <a:avLst/>
-          </a:prstGeom>
-        </p:spPr>
-        <p:txBody>
-          <a:bodyPr vert="horz" lIns="91440" tIns="45720" rIns="91440" bIns="45720" rtlCol="0" anchor="b"/>
-          <a:lstStyle>
-            <a:lvl1pPr algn="r">
-              <a:defRPr sz="1200"/>
-            </a:lvl1pPr>
-          </a:lstStyle>
-          <a:p>
-            <a:fld id="{CE5E9CC1-C706-0F49-92D6-E571CC5EEA8F}" type="slidenum">
-              <a:rPr lang="en-US"/>
-              <a:t>‹#›</a:t>
-            </a:fld>
-            <a:endParaRPr lang="en-US"/>
-          </a:p>
-        </p:txBody>
-      </p:sp>
     </p:spTree>
     <p:extLst>
       <p:ext uri="{BB962C8B-B14F-4D97-AF65-F5344CB8AC3E}">
-        <p14:creationId xmlns:p14="http://schemas.microsoft.com/office/powerpoint/2010/main" val="1024086991"/>
+        <p14:creationId xmlns:p14="http://schemas.microsoft.com/office/powerpoint/2010/main" val="2331178917"/>
       </p:ext>
     </p:extLst>
   </p:cSld>
@@ -523,7 +304,6 @@
               <a:rPr lang="en-US" dirty="0"/>
               <a:t>Module 1 used Google Sheets as the database. Today we move to MySQL, running in its own Docker container, and build three classic business automations: lead handling, approvals and reporting.</a:t>
             </a:r>
-            <a:endParaRPr lang="en-US" dirty="0"/>
           </a:p>
         </p:txBody>
       </p:sp>
@@ -607,10 +387,6 @@
           <a:bodyPr/>
           <a:lstStyle/>
           <a:p>
-            <a:r>
-              <a:rPr lang="en-US" dirty="0"/>
-              <a:t/>
-            </a:r>
             <a:endParaRPr lang="en-US" dirty="0"/>
           </a:p>
         </p:txBody>
@@ -695,10 +471,6 @@
           <a:bodyPr/>
           <a:lstStyle/>
           <a:p>
-            <a:r>
-              <a:rPr lang="en-US" dirty="0"/>
-              <a:t/>
-            </a:r>
             <a:endParaRPr lang="en-US" dirty="0"/>
           </a:p>
         </p:txBody>
@@ -783,10 +555,6 @@
           <a:bodyPr/>
           <a:lstStyle/>
           <a:p>
-            <a:r>
-              <a:rPr lang="en-US" dirty="0"/>
-              <a:t/>
-            </a:r>
             <a:endParaRPr lang="en-US" dirty="0"/>
           </a:p>
         </p:txBody>
@@ -871,10 +639,6 @@
           <a:bodyPr/>
           <a:lstStyle/>
           <a:p>
-            <a:r>
-              <a:rPr lang="en-US" dirty="0"/>
-              <a:t/>
-            </a:r>
             <a:endParaRPr lang="en-US" dirty="0"/>
           </a:p>
         </p:txBody>
@@ -959,10 +723,6 @@
           <a:bodyPr/>
           <a:lstStyle/>
           <a:p>
-            <a:r>
-              <a:rPr lang="en-US" dirty="0"/>
-              <a:t/>
-            </a:r>
             <a:endParaRPr lang="en-US" dirty="0"/>
           </a:p>
         </p:txBody>
@@ -1047,10 +807,6 @@
           <a:bodyPr/>
           <a:lstStyle/>
           <a:p>
-            <a:r>
-              <a:rPr lang="en-US" dirty="0"/>
-              <a:t/>
-            </a:r>
             <a:endParaRPr lang="en-US" dirty="0"/>
           </a:p>
         </p:txBody>
@@ -1135,10 +891,6 @@
           <a:bodyPr/>
           <a:lstStyle/>
           <a:p>
-            <a:r>
-              <a:rPr lang="en-US" dirty="0"/>
-              <a:t/>
-            </a:r>
             <a:endParaRPr lang="en-US" dirty="0"/>
           </a:p>
         </p:txBody>
@@ -1223,10 +975,6 @@
           <a:bodyPr/>
           <a:lstStyle/>
           <a:p>
-            <a:r>
-              <a:rPr lang="en-US" dirty="0"/>
-              <a:t/>
-            </a:r>
             <a:endParaRPr lang="en-US" dirty="0"/>
           </a:p>
         </p:txBody>
@@ -1311,10 +1059,6 @@
           <a:bodyPr/>
           <a:lstStyle/>
           <a:p>
-            <a:r>
-              <a:rPr lang="en-US" dirty="0"/>
-              <a:t/>
-            </a:r>
             <a:endParaRPr lang="en-US" dirty="0"/>
           </a:p>
         </p:txBody>
@@ -1399,10 +1143,6 @@
           <a:bodyPr/>
           <a:lstStyle/>
           <a:p>
-            <a:r>
-              <a:rPr lang="en-US" dirty="0"/>
-              <a:t/>
-            </a:r>
             <a:endParaRPr lang="en-US" dirty="0"/>
           </a:p>
         </p:txBody>
@@ -1487,10 +1227,6 @@
           <a:bodyPr/>
           <a:lstStyle/>
           <a:p>
-            <a:r>
-              <a:rPr lang="en-US" dirty="0"/>
-              <a:t/>
-            </a:r>
             <a:endParaRPr lang="en-US" dirty="0"/>
           </a:p>
         </p:txBody>
@@ -1575,10 +1311,6 @@
           <a:bodyPr/>
           <a:lstStyle/>
           <a:p>
-            <a:r>
-              <a:rPr lang="en-US" dirty="0"/>
-              <a:t/>
-            </a:r>
             <a:endParaRPr lang="en-US" dirty="0"/>
           </a:p>
         </p:txBody>
@@ -1667,7 +1399,6 @@
               <a:rPr lang="en-US" dirty="0"/>
               <a:t>Ask students to name one repetitive task from their own job. Most will fit one of these three columns.</a:t>
             </a:r>
-            <a:endParaRPr lang="en-US" dirty="0"/>
           </a:p>
         </p:txBody>
       </p:sp>
@@ -1755,7 +1486,6 @@
               <a:rPr lang="en-US" dirty="0"/>
               <a:t>Show the expression editor: the right-hand preview evaluates the expression on the current item as you type.</a:t>
             </a:r>
-            <a:endParaRPr lang="en-US" dirty="0"/>
           </a:p>
         </p:txBody>
       </p:sp>
@@ -1839,10 +1569,6 @@
           <a:bodyPr/>
           <a:lstStyle/>
           <a:p>
-            <a:r>
-              <a:rPr lang="en-US" dirty="0"/>
-              <a:t/>
-            </a:r>
             <a:endParaRPr lang="en-US" dirty="0"/>
           </a:p>
         </p:txBody>
@@ -1927,10 +1653,6 @@
           <a:bodyPr/>
           <a:lstStyle/>
           <a:p>
-            <a:r>
-              <a:rPr lang="en-US" dirty="0"/>
-              <a:t/>
-            </a:r>
             <a:endParaRPr lang="en-US" dirty="0"/>
           </a:p>
         </p:txBody>
@@ -2015,10 +1737,6 @@
           <a:bodyPr/>
           <a:lstStyle/>
           <a:p>
-            <a:r>
-              <a:rPr lang="en-US" dirty="0"/>
-              <a:t/>
-            </a:r>
             <a:endParaRPr lang="en-US" dirty="0"/>
           </a:p>
         </p:txBody>
@@ -2107,7 +1825,6 @@
               <a:rPr lang="en-US" dirty="0"/>
               <a:t>PowerShell has no &lt; redirection, hence Get-Content piped into docker exec -i. host.docker.internal is Docker Desktop's name for the host machine, where port 3306 is published.</a:t>
             </a:r>
-            <a:endParaRPr lang="en-US" dirty="0"/>
           </a:p>
         </p:txBody>
       </p:sp>
@@ -2191,10 +1908,6 @@
           <a:bodyPr/>
           <a:lstStyle/>
           <a:p>
-            <a:r>
-              <a:rPr lang="en-US" dirty="0"/>
-              <a:t/>
-            </a:r>
             <a:endParaRPr lang="en-US" dirty="0"/>
           </a:p>
         </p:txBody>
@@ -2268,6 +1981,11 @@
 <file path=ppt/slideMasters/slideMaster1.xml><?xml version="1.0" encoding="utf-8"?>
 <p:sldMaster xmlns:a="http://schemas.openxmlformats.org/drawingml/2006/main" xmlns:r="http://schemas.openxmlformats.org/officeDocument/2006/relationships" xmlns:p="http://schemas.openxmlformats.org/presentationml/2006/main">
   <p:cSld>
+    <p:bg>
+      <p:bgRef idx="1001">
+        <a:schemeClr val="bg1"/>
+      </p:bgRef>
+    </p:bg>
     <p:spTree>
       <p:nvGrpSpPr>
         <p:cNvPr id="1" name=""/>
@@ -2550,6 +2268,7 @@
         <a:solidFill>
           <a:srgbClr val="FFFFFF"/>
         </a:solidFill>
+        <a:effectLst/>
       </p:bgPr>
     </p:bg>
     <p:spTree>
@@ -2587,11 +2306,11 @@
           <a:bodyPr wrap="square" lIns="0" tIns="0" rIns="0" bIns="0" rtlCol="0" anchor="t"/>
           <a:lstStyle/>
           <a:p>
-            <a:pPr indent="0" marL="0">
-              <a:buNone/>
-            </a:pPr>
-            <a:r>
-              <a:rPr lang="en-US" sz="1400" b="1" spc="400" kern="0" dirty="0">
+            <a:pPr marL="0" indent="0">
+              <a:buNone/>
+            </a:pPr>
+            <a:r>
+              <a:rPr lang="en-US" sz="1400" b="1" kern="0" spc="400" dirty="0">
                 <a:solidFill>
                   <a:srgbClr val="EA4B71"/>
                 </a:solidFill>
@@ -2626,7 +2345,7 @@
           <a:bodyPr wrap="square" lIns="0" tIns="0" rIns="0" bIns="0" rtlCol="0" anchor="t"/>
           <a:lstStyle/>
           <a:p>
-            <a:pPr indent="0" marL="0">
+            <a:pPr marL="0" indent="0">
               <a:buNone/>
             </a:pPr>
             <a:r>
@@ -2665,7 +2384,7 @@
           <a:bodyPr wrap="square" lIns="0" tIns="0" rIns="0" bIns="0" rtlCol="0" anchor="t"/>
           <a:lstStyle/>
           <a:p>
-            <a:pPr indent="0" marL="0">
+            <a:pPr marL="0" indent="0">
               <a:buNone/>
             </a:pPr>
             <a:r>
@@ -2704,11 +2423,11 @@
           <a:bodyPr wrap="square" lIns="0" tIns="0" rIns="0" bIns="0" rtlCol="0" anchor="t"/>
           <a:lstStyle/>
           <a:p>
-            <a:pPr indent="0" marL="0">
-              <a:buNone/>
-            </a:pPr>
-            <a:r>
-              <a:rPr lang="en-US" sz="1000" b="1" spc="300" kern="0" dirty="0">
+            <a:pPr marL="0" indent="0">
+              <a:buNone/>
+            </a:pPr>
+            <a:r>
+              <a:rPr lang="en-US" sz="1000" b="1" kern="0" spc="300" dirty="0">
                 <a:solidFill>
                   <a:srgbClr val="EA4B71"/>
                 </a:solidFill>
@@ -2743,7 +2462,7 @@
           <a:bodyPr wrap="square" lIns="0" tIns="0" rIns="0" bIns="0" rtlCol="0" anchor="t"/>
           <a:lstStyle/>
           <a:p>
-            <a:pPr indent="0" marL="0">
+            <a:pPr marL="0" indent="0">
               <a:buNone/>
             </a:pPr>
             <a:r>
@@ -2782,7 +2501,7 @@
           <a:bodyPr wrap="square" lIns="0" tIns="0" rIns="0" bIns="0" rtlCol="0" anchor="t"/>
           <a:lstStyle/>
           <a:p>
-            <a:pPr indent="0" marL="0">
+            <a:pPr marL="0" indent="0">
               <a:buNone/>
             </a:pPr>
             <a:r>
@@ -2827,14 +2546,14 @@
       </p:sp>
       <p:pic>
         <p:nvPicPr>
-          <p:cNvPr id="10" name="Image 0" descr="preencoded.png">    </p:cNvPr>
+          <p:cNvPr id="10" name="Image 0" descr="preencoded.png"/>
           <p:cNvPicPr>
             <a:picLocks noChangeAspect="1"/>
           </p:cNvPicPr>
           <p:nvPr/>
         </p:nvPicPr>
         <p:blipFill>
-          <a:blip r:embed="rId1"/>
+          <a:blip r:embed="rId3"/>
           <a:stretch>
             <a:fillRect/>
           </a:stretch>
@@ -2870,7 +2589,7 @@
           <a:bodyPr wrap="square" lIns="0" tIns="0" rIns="0" bIns="0" rtlCol="0" anchor="ctr"/>
           <a:lstStyle/>
           <a:p>
-            <a:pPr indent="0" marL="0">
+            <a:pPr marL="0" indent="0">
               <a:buNone/>
             </a:pPr>
             <a:r>
@@ -2887,7 +2606,7 @@
             <a:endParaRPr lang="en-US" sz="1400" dirty="0"/>
           </a:p>
           <a:p>
-            <a:pPr indent="0" marL="0">
+            <a:pPr marL="0" indent="0">
               <a:buNone/>
             </a:pPr>
             <a:r>
@@ -2956,14 +2675,14 @@
       </p:sp>
       <p:pic>
         <p:nvPicPr>
-          <p:cNvPr id="14" name="Image 1" descr="preencoded.png">    </p:cNvPr>
+          <p:cNvPr id="14" name="Image 1" descr="preencoded.png"/>
           <p:cNvPicPr>
             <a:picLocks noChangeAspect="1"/>
           </p:cNvPicPr>
           <p:nvPr/>
         </p:nvPicPr>
         <p:blipFill>
-          <a:blip r:embed="rId2"/>
+          <a:blip r:embed="rId4"/>
           <a:stretch>
             <a:fillRect/>
           </a:stretch>
@@ -2999,7 +2718,7 @@
           <a:bodyPr wrap="square" lIns="0" tIns="0" rIns="0" bIns="0" rtlCol="0" anchor="ctr"/>
           <a:lstStyle/>
           <a:p>
-            <a:pPr indent="0" marL="0">
+            <a:pPr marL="0" indent="0">
               <a:buNone/>
             </a:pPr>
             <a:r>
@@ -3016,7 +2735,7 @@
             <a:endParaRPr lang="en-US" sz="1400" dirty="0"/>
           </a:p>
           <a:p>
-            <a:pPr indent="0" marL="0">
+            <a:pPr marL="0" indent="0">
               <a:buNone/>
             </a:pPr>
             <a:r>
@@ -3085,14 +2804,14 @@
       </p:sp>
       <p:pic>
         <p:nvPicPr>
-          <p:cNvPr id="18" name="Image 2" descr="preencoded.png">    </p:cNvPr>
+          <p:cNvPr id="18" name="Image 2" descr="preencoded.png"/>
           <p:cNvPicPr>
             <a:picLocks noChangeAspect="1"/>
           </p:cNvPicPr>
           <p:nvPr/>
         </p:nvPicPr>
         <p:blipFill>
-          <a:blip r:embed="rId3"/>
+          <a:blip r:embed="rId5"/>
           <a:stretch>
             <a:fillRect/>
           </a:stretch>
@@ -3128,7 +2847,7 @@
           <a:bodyPr wrap="square" lIns="0" tIns="0" rIns="0" bIns="0" rtlCol="0" anchor="ctr"/>
           <a:lstStyle/>
           <a:p>
-            <a:pPr indent="0" marL="0">
+            <a:pPr marL="0" indent="0">
               <a:buNone/>
             </a:pPr>
             <a:r>
@@ -3145,7 +2864,7 @@
             <a:endParaRPr lang="en-US" sz="1400" dirty="0"/>
           </a:p>
           <a:p>
-            <a:pPr indent="0" marL="0">
+            <a:pPr marL="0" indent="0">
               <a:buNone/>
             </a:pPr>
             <a:r>
@@ -3214,14 +2933,14 @@
       </p:sp>
       <p:pic>
         <p:nvPicPr>
-          <p:cNvPr id="22" name="Image 3" descr="preencoded.png">    </p:cNvPr>
+          <p:cNvPr id="22" name="Image 3" descr="preencoded.png"/>
           <p:cNvPicPr>
             <a:picLocks noChangeAspect="1"/>
           </p:cNvPicPr>
           <p:nvPr/>
         </p:nvPicPr>
         <p:blipFill>
-          <a:blip r:embed="rId4"/>
+          <a:blip r:embed="rId6"/>
           <a:stretch>
             <a:fillRect/>
           </a:stretch>
@@ -3257,7 +2976,7 @@
           <a:bodyPr wrap="square" lIns="0" tIns="0" rIns="0" bIns="0" rtlCol="0" anchor="ctr"/>
           <a:lstStyle/>
           <a:p>
-            <a:pPr indent="0" marL="0">
+            <a:pPr marL="0" indent="0">
               <a:buNone/>
             </a:pPr>
             <a:r>
@@ -3274,7 +2993,7 @@
             <a:endParaRPr lang="en-US" sz="1400" dirty="0"/>
           </a:p>
           <a:p>
-            <a:pPr indent="0" marL="0">
+            <a:pPr marL="0" indent="0">
               <a:buNone/>
             </a:pPr>
             <a:r>
@@ -3308,6 +3027,7 @@
         <a:solidFill>
           <a:srgbClr val="FFFFFF"/>
         </a:solidFill>
+        <a:effectLst/>
       </p:bgPr>
     </p:bg>
     <p:spTree>
@@ -3345,7 +3065,7 @@
           <a:bodyPr wrap="square" lIns="0" tIns="0" rIns="0" bIns="0" rtlCol="0" anchor="t"/>
           <a:lstStyle/>
           <a:p>
-            <a:pPr algn="r" indent="0" marL="0">
+            <a:pPr marL="0" indent="0" algn="r">
               <a:buNone/>
             </a:pPr>
             <a:r>
@@ -3411,7 +3131,7 @@
           <a:bodyPr wrap="square" lIns="0" tIns="0" rIns="0" bIns="0" rtlCol="0" anchor="ctr"/>
           <a:lstStyle/>
           <a:p>
-            <a:pPr algn="ctr" indent="0" marL="0">
+            <a:pPr marL="0" indent="0" algn="ctr">
               <a:buNone/>
             </a:pPr>
             <a:r>
@@ -3450,7 +3170,7 @@
           <a:bodyPr wrap="square" lIns="0" tIns="0" rIns="0" bIns="0" rtlCol="0" anchor="ctr"/>
           <a:lstStyle/>
           <a:p>
-            <a:pPr indent="0" marL="0">
+            <a:pPr marL="0" indent="0">
               <a:buNone/>
             </a:pPr>
             <a:r>
@@ -3464,9 +3184,6 @@
               </a:rPr>
               <a:t>Lead Capture &amp; Qualification</a:t>
             </a:r>
-            <a:pPr indent="0" marL="0">
-              <a:buNone/>
-            </a:pPr>
             <a:r>
               <a:rPr lang="en-US" sz="2400" dirty="0">
                 <a:solidFill>
@@ -3498,15 +3215,27 @@
         </p:nvGraphicFramePr>
         <p:xfrm>
           <a:off x="457200" y="1005840"/>
-          <a:ext cx="8229600" cy="914400"/>
+          <a:ext cx="8229600" cy="2453640"/>
         </p:xfrm>
         <a:graphic>
           <a:graphicData uri="http://schemas.openxmlformats.org/drawingml/2006/table">
             <a:tbl>
               <a:tblPr/>
               <a:tblGrid>
-                <a:gridCol w="1920240"/>
-                <a:gridCol w="6309360"/>
+                <a:gridCol w="1920240">
+                  <a:extLst>
+                    <a:ext uri="{9D8B030D-6E8A-4147-A177-3AD203B41FA5}">
+                      <a16:colId xmlns:a16="http://schemas.microsoft.com/office/drawing/2014/main" val="20000"/>
+                    </a:ext>
+                  </a:extLst>
+                </a:gridCol>
+                <a:gridCol w="6309360">
+                  <a:extLst>
+                    <a:ext uri="{9D8B030D-6E8A-4147-A177-3AD203B41FA5}">
+                      <a16:colId xmlns:a16="http://schemas.microsoft.com/office/drawing/2014/main" val="20001"/>
+                    </a:ext>
+                  </a:extLst>
+                </a:gridCol>
               </a:tblGrid>
               <a:tr h="0">
                 <a:tc>
@@ -3514,7 +3243,7 @@
                     <a:bodyPr/>
                     <a:lstStyle/>
                     <a:p>
-                      <a:pPr indent="0" marL="0">
+                      <a:pPr marL="0" indent="0">
                         <a:buNone/>
                       </a:pPr>
                       <a:r>
@@ -3582,7 +3311,7 @@
                     <a:bodyPr/>
                     <a:lstStyle/>
                     <a:p>
-                      <a:pPr indent="0" marL="0">
+                      <a:pPr marL="0" indent="0">
                         <a:buNone/>
                       </a:pPr>
                       <a:r>
@@ -3645,6 +3374,11 @@
                     </a:solidFill>
                   </a:tcPr>
                 </a:tc>
+                <a:extLst>
+                  <a:ext uri="{0D108BD9-81ED-4DB2-BD59-A6C34878D82A}">
+                    <a16:rowId xmlns:a16="http://schemas.microsoft.com/office/drawing/2014/main" val="10000"/>
+                  </a:ext>
+                </a:extLst>
               </a:tr>
               <a:tr h="0">
                 <a:tc>
@@ -3652,7 +3386,7 @@
                     <a:bodyPr/>
                     <a:lstStyle/>
                     <a:p>
-                      <a:pPr indent="0" marL="0">
+                      <a:pPr marL="0" indent="0">
                         <a:buNone/>
                       </a:pPr>
                       <a:r>
@@ -3720,7 +3454,7 @@
                     <a:bodyPr/>
                     <a:lstStyle/>
                     <a:p>
-                      <a:pPr indent="0" marL="0">
+                      <a:pPr marL="0" indent="0">
                         <a:buNone/>
                       </a:pPr>
                       <a:r>
@@ -3734,9 +3468,6 @@
                         </a:rPr>
                         <a:t>Fields: Name, Email, Company, Budget (dropdown: </a:t>
                       </a:r>
-                      <a:pPr indent="0" marL="0">
-                        <a:buNone/>
-                      </a:pPr>
                       <a:r>
                         <a:rPr lang="en-US" sz="1100" b="1" dirty="0">
                           <a:solidFill>
@@ -3748,9 +3479,6 @@
                         </a:rPr>
                         <a:t>Under 1 lakh</a:t>
                       </a:r>
-                      <a:pPr indent="0" marL="0">
-                        <a:buNone/>
-                      </a:pPr>
                       <a:r>
                         <a:rPr lang="en-US" sz="1100" dirty="0">
                           <a:solidFill>
@@ -3762,9 +3490,6 @@
                         </a:rPr>
                         <a:t>, </a:t>
                       </a:r>
-                      <a:pPr indent="0" marL="0">
-                        <a:buNone/>
-                      </a:pPr>
                       <a:r>
                         <a:rPr lang="en-US" sz="1100" b="1" dirty="0">
                           <a:solidFill>
@@ -3776,9 +3501,6 @@
                         </a:rPr>
                         <a:t>1-5 lakh</a:t>
                       </a:r>
-                      <a:pPr indent="0" marL="0">
-                        <a:buNone/>
-                      </a:pPr>
                       <a:r>
                         <a:rPr lang="en-US" sz="1100" dirty="0">
                           <a:solidFill>
@@ -3790,9 +3512,6 @@
                         </a:rPr>
                         <a:t>, </a:t>
                       </a:r>
-                      <a:pPr indent="0" marL="0">
-                        <a:buNone/>
-                      </a:pPr>
                       <a:r>
                         <a:rPr lang="en-US" sz="1100" b="1" dirty="0">
                           <a:solidFill>
@@ -3804,9 +3523,6 @@
                         </a:rPr>
                         <a:t>Above 5 lakh</a:t>
                       </a:r>
-                      <a:pPr indent="0" marL="0">
-                        <a:buNone/>
-                      </a:pPr>
                       <a:r>
                         <a:rPr lang="en-US" sz="1100" dirty="0">
                           <a:solidFill>
@@ -3867,6 +3583,11 @@
                     </a:solidFill>
                   </a:tcPr>
                 </a:tc>
+                <a:extLst>
+                  <a:ext uri="{0D108BD9-81ED-4DB2-BD59-A6C34878D82A}">
+                    <a16:rowId xmlns:a16="http://schemas.microsoft.com/office/drawing/2014/main" val="10001"/>
+                  </a:ext>
+                </a:extLst>
               </a:tr>
               <a:tr h="0">
                 <a:tc>
@@ -3874,7 +3595,7 @@
                     <a:bodyPr/>
                     <a:lstStyle/>
                     <a:p>
-                      <a:pPr indent="0" marL="0">
+                      <a:pPr marL="0" indent="0">
                         <a:buNone/>
                       </a:pPr>
                       <a:r>
@@ -3942,7 +3663,7 @@
                     <a:bodyPr/>
                     <a:lstStyle/>
                     <a:p>
-                      <a:pPr indent="0" marL="0">
+                      <a:pPr marL="0" indent="0">
                         <a:buNone/>
                       </a:pPr>
                       <a:r>
@@ -3956,9 +3677,6 @@
                         </a:rPr>
                         <a:t>email</a:t>
                       </a:r>
-                      <a:pPr indent="0" marL="0">
-                        <a:buNone/>
-                      </a:pPr>
                       <a:r>
                         <a:rPr lang="en-US" sz="1100" dirty="0">
                           <a:solidFill>
@@ -3970,9 +3688,6 @@
                         </a:rPr>
                         <a:t> = </a:t>
                       </a:r>
-                      <a:pPr indent="0" marL="0">
-                        <a:buNone/>
-                      </a:pPr>
                       <a:r>
                         <a:rPr lang="en-US" sz="1100" b="1" dirty="0">
                           <a:solidFill>
@@ -3984,9 +3699,6 @@
                         </a:rPr>
                         <a:t>{{ $json.Email.trim().toLowerCase() }}</a:t>
                       </a:r>
-                      <a:pPr indent="0" marL="0">
-                        <a:buNone/>
-                      </a:pPr>
                       <a:r>
                         <a:rPr lang="en-US" sz="1100" dirty="0">
                           <a:solidFill>
@@ -3998,9 +3710,6 @@
                         </a:rPr>
                         <a:t>, plus name, company, budget, source. </a:t>
                       </a:r>
-                      <a:pPr indent="0" marL="0">
-                        <a:buNone/>
-                      </a:pPr>
                       <a:r>
                         <a:rPr lang="en-US" sz="1100" b="1" dirty="0">
                           <a:solidFill>
@@ -4012,9 +3721,6 @@
                         </a:rPr>
                         <a:t>segment</a:t>
                       </a:r>
-                      <a:pPr indent="0" marL="0">
-                        <a:buNone/>
-                      </a:pPr>
                       <a:r>
                         <a:rPr lang="en-US" sz="1100" dirty="0">
                           <a:solidFill>
@@ -4026,9 +3732,6 @@
                         </a:rPr>
                         <a:t> = </a:t>
                       </a:r>
-                      <a:pPr indent="0" marL="0">
-                        <a:buNone/>
-                      </a:pPr>
                       <a:r>
                         <a:rPr lang="en-US" sz="1100" b="1" dirty="0">
                           <a:solidFill>
@@ -4089,6 +3792,11 @@
                     </a:solidFill>
                   </a:tcPr>
                 </a:tc>
+                <a:extLst>
+                  <a:ext uri="{0D108BD9-81ED-4DB2-BD59-A6C34878D82A}">
+                    <a16:rowId xmlns:a16="http://schemas.microsoft.com/office/drawing/2014/main" val="10002"/>
+                  </a:ext>
+                </a:extLst>
               </a:tr>
               <a:tr h="0">
                 <a:tc>
@@ -4096,7 +3804,7 @@
                     <a:bodyPr/>
                     <a:lstStyle/>
                     <a:p>
-                      <a:pPr indent="0" marL="0">
+                      <a:pPr marL="0" indent="0">
                         <a:buNone/>
                       </a:pPr>
                       <a:r>
@@ -4164,7 +3872,7 @@
                     <a:bodyPr/>
                     <a:lstStyle/>
                     <a:p>
-                      <a:pPr indent="0" marL="0">
+                      <a:pPr marL="0" indent="0">
                         <a:buNone/>
                       </a:pPr>
                       <a:r>
@@ -4178,9 +3886,6 @@
                         </a:rPr>
                         <a:t>Operation </a:t>
                       </a:r>
-                      <a:pPr indent="0" marL="0">
-                        <a:buNone/>
-                      </a:pPr>
                       <a:r>
                         <a:rPr lang="en-US" sz="1100" b="1" dirty="0">
                           <a:solidFill>
@@ -4192,9 +3897,6 @@
                         </a:rPr>
                         <a:t>Insert</a:t>
                       </a:r>
-                      <a:pPr indent="0" marL="0">
-                        <a:buNone/>
-                      </a:pPr>
                       <a:r>
                         <a:rPr lang="en-US" sz="1100" dirty="0">
                           <a:solidFill>
@@ -4206,9 +3908,6 @@
                         </a:rPr>
                         <a:t>, table </a:t>
                       </a:r>
-                      <a:pPr indent="0" marL="0">
-                        <a:buNone/>
-                      </a:pPr>
                       <a:r>
                         <a:rPr lang="en-US" sz="1100" b="1" dirty="0">
                           <a:solidFill>
@@ -4220,9 +3919,6 @@
                         </a:rPr>
                         <a:t>leads</a:t>
                       </a:r>
-                      <a:pPr indent="0" marL="0">
-                        <a:buNone/>
-                      </a:pPr>
                       <a:r>
                         <a:rPr lang="en-US" sz="1100" dirty="0">
                           <a:solidFill>
@@ -4234,9 +3930,6 @@
                         </a:rPr>
                         <a:t>, </a:t>
                       </a:r>
-                      <a:pPr indent="0" marL="0">
-                        <a:buNone/>
-                      </a:pPr>
                       <a:r>
                         <a:rPr lang="en-US" sz="1100" b="1" dirty="0">
                           <a:solidFill>
@@ -4248,9 +3941,6 @@
                         </a:rPr>
                         <a:t>Map Automatically</a:t>
                       </a:r>
-                      <a:pPr indent="0" marL="0">
-                        <a:buNone/>
-                      </a:pPr>
                       <a:r>
                         <a:rPr lang="en-US" sz="1100" dirty="0">
                           <a:solidFill>
@@ -4311,6 +4001,11 @@
                     </a:solidFill>
                   </a:tcPr>
                 </a:tc>
+                <a:extLst>
+                  <a:ext uri="{0D108BD9-81ED-4DB2-BD59-A6C34878D82A}">
+                    <a16:rowId xmlns:a16="http://schemas.microsoft.com/office/drawing/2014/main" val="10003"/>
+                  </a:ext>
+                </a:extLst>
               </a:tr>
               <a:tr h="0">
                 <a:tc>
@@ -4318,7 +4013,7 @@
                     <a:bodyPr/>
                     <a:lstStyle/>
                     <a:p>
-                      <a:pPr indent="0" marL="0">
+                      <a:pPr marL="0" indent="0">
                         <a:buNone/>
                       </a:pPr>
                       <a:r>
@@ -4386,7 +4081,7 @@
                     <a:bodyPr/>
                     <a:lstStyle/>
                     <a:p>
-                      <a:pPr indent="0" marL="0">
+                      <a:pPr marL="0" indent="0">
                         <a:buNone/>
                       </a:pPr>
                       <a:r>
@@ -4400,9 +4095,6 @@
                         </a:rPr>
                         <a:t>Mode </a:t>
                       </a:r>
-                      <a:pPr indent="0" marL="0">
-                        <a:buNone/>
-                      </a:pPr>
                       <a:r>
                         <a:rPr lang="en-US" sz="1100" b="1" dirty="0">
                           <a:solidFill>
@@ -4414,9 +4106,6 @@
                         </a:rPr>
                         <a:t>Rules</a:t>
                       </a:r>
-                      <a:pPr indent="0" marL="0">
-                        <a:buNone/>
-                      </a:pPr>
                       <a:r>
                         <a:rPr lang="en-US" sz="1100" dirty="0">
                           <a:solidFill>
@@ -4428,9 +4117,6 @@
                         </a:rPr>
                         <a:t> on </a:t>
                       </a:r>
-                      <a:pPr indent="0" marL="0">
-                        <a:buNone/>
-                      </a:pPr>
                       <a:r>
                         <a:rPr lang="en-US" sz="1100" b="1" dirty="0">
                           <a:solidFill>
@@ -4442,9 +4128,6 @@
                         </a:rPr>
                         <a:t>{{ $('Edit Fields').item.json.segment }}</a:t>
                       </a:r>
-                      <a:pPr indent="0" marL="0">
-                        <a:buNone/>
-                      </a:pPr>
                       <a:r>
                         <a:rPr lang="en-US" sz="1100" dirty="0">
                           <a:solidFill>
@@ -4456,9 +4139,6 @@
                         </a:rPr>
                         <a:t>: </a:t>
                       </a:r>
-                      <a:pPr indent="0" marL="0">
-                        <a:buNone/>
-                      </a:pPr>
                       <a:r>
                         <a:rPr lang="en-US" sz="1100" b="1" dirty="0">
                           <a:solidFill>
@@ -4470,9 +4150,6 @@
                         </a:rPr>
                         <a:t>hot</a:t>
                       </a:r>
-                      <a:pPr indent="0" marL="0">
-                        <a:buNone/>
-                      </a:pPr>
                       <a:r>
                         <a:rPr lang="en-US" sz="1100" dirty="0">
                           <a:solidFill>
@@ -4484,9 +4161,6 @@
                         </a:rPr>
                         <a:t>, </a:t>
                       </a:r>
-                      <a:pPr indent="0" marL="0">
-                        <a:buNone/>
-                      </a:pPr>
                       <a:r>
                         <a:rPr lang="en-US" sz="1100" b="1" dirty="0">
                           <a:solidFill>
@@ -4498,9 +4172,6 @@
                         </a:rPr>
                         <a:t>warm</a:t>
                       </a:r>
-                      <a:pPr indent="0" marL="0">
-                        <a:buNone/>
-                      </a:pPr>
                       <a:r>
                         <a:rPr lang="en-US" sz="1100" dirty="0">
                           <a:solidFill>
@@ -4512,9 +4183,6 @@
                         </a:rPr>
                         <a:t>, </a:t>
                       </a:r>
-                      <a:pPr indent="0" marL="0">
-                        <a:buNone/>
-                      </a:pPr>
                       <a:r>
                         <a:rPr lang="en-US" sz="1100" b="1" dirty="0">
                           <a:solidFill>
@@ -4526,9 +4194,6 @@
                         </a:rPr>
                         <a:t>cold</a:t>
                       </a:r>
-                      <a:pPr indent="0" marL="0">
-                        <a:buNone/>
-                      </a:pPr>
                       <a:r>
                         <a:rPr lang="en-US" sz="1100" dirty="0">
                           <a:solidFill>
@@ -4589,6 +4254,11 @@
                     </a:solidFill>
                   </a:tcPr>
                 </a:tc>
+                <a:extLst>
+                  <a:ext uri="{0D108BD9-81ED-4DB2-BD59-A6C34878D82A}">
+                    <a16:rowId xmlns:a16="http://schemas.microsoft.com/office/drawing/2014/main" val="10004"/>
+                  </a:ext>
+                </a:extLst>
               </a:tr>
               <a:tr h="0">
                 <a:tc>
@@ -4596,7 +4266,7 @@
                     <a:bodyPr/>
                     <a:lstStyle/>
                     <a:p>
-                      <a:pPr indent="0" marL="0">
+                      <a:pPr marL="0" indent="0">
                         <a:buNone/>
                       </a:pPr>
                       <a:r>
@@ -4664,7 +4334,7 @@
                     <a:bodyPr/>
                     <a:lstStyle/>
                     <a:p>
-                      <a:pPr indent="0" marL="0">
+                      <a:pPr marL="0" indent="0">
                         <a:buNone/>
                       </a:pPr>
                       <a:r>
@@ -4678,9 +4348,6 @@
                         </a:rPr>
                         <a:t>To </a:t>
                       </a:r>
-                      <a:pPr indent="0" marL="0">
-                        <a:buNone/>
-                      </a:pPr>
                       <a:r>
                         <a:rPr lang="en-US" sz="1100" b="1" dirty="0">
                           <a:solidFill>
@@ -4692,9 +4359,6 @@
                         </a:rPr>
                         <a:t>{{ $('Edit Fields').item.json.email }}</a:t>
                       </a:r>
-                      <a:pPr indent="0" marL="0">
-                        <a:buNone/>
-                      </a:pPr>
                       <a:r>
                         <a:rPr lang="en-US" sz="1100" dirty="0">
                           <a:solidFill>
@@ -4755,6 +4419,11 @@
                     </a:solidFill>
                   </a:tcPr>
                 </a:tc>
+                <a:extLst>
+                  <a:ext uri="{0D108BD9-81ED-4DB2-BD59-A6C34878D82A}">
+                    <a16:rowId xmlns:a16="http://schemas.microsoft.com/office/drawing/2014/main" val="10005"/>
+                  </a:ext>
+                </a:extLst>
               </a:tr>
             </a:tbl>
           </a:graphicData>
@@ -4808,7 +4477,7 @@
           <a:bodyPr wrap="square" lIns="0" tIns="0" rIns="0" bIns="0" rtlCol="0" anchor="ctr"/>
           <a:lstStyle/>
           <a:p>
-            <a:pPr indent="0" marL="0">
+            <a:pPr marL="0" indent="0">
               <a:buNone/>
             </a:pPr>
             <a:r>
@@ -4822,9 +4491,6 @@
               </a:rPr>
               <a:t>Tip  </a:t>
             </a:r>
-            <a:pPr indent="0" marL="0">
-              <a:buNone/>
-            </a:pPr>
             <a:r>
               <a:rPr lang="en-US" sz="1200" dirty="0">
                 <a:solidFill>
@@ -4836,9 +4502,6 @@
               </a:rPr>
               <a:t>After the MySQL node, </a:t>
             </a:r>
-            <a:pPr indent="0" marL="0">
-              <a:buNone/>
-            </a:pPr>
             <a:r>
               <a:rPr lang="en-US" sz="1200" b="1" dirty="0">
                 <a:solidFill>
@@ -4850,9 +4513,6 @@
               </a:rPr>
               <a:t>$json</a:t>
             </a:r>
-            <a:pPr indent="0" marL="0">
-              <a:buNone/>
-            </a:pPr>
             <a:r>
               <a:rPr lang="en-US" sz="1200" dirty="0">
                 <a:solidFill>
@@ -4864,9 +4524,6 @@
               </a:rPr>
               <a:t> holds the database result, not the lead — so later nodes read the lead from </a:t>
             </a:r>
-            <a:pPr indent="0" marL="0">
-              <a:buNone/>
-            </a:pPr>
             <a:r>
               <a:rPr lang="en-US" sz="1200" b="1" dirty="0">
                 <a:solidFill>
@@ -4878,9 +4535,6 @@
               </a:rPr>
               <a:t>$('Edit Fields')</a:t>
             </a:r>
-            <a:pPr indent="0" marL="0">
-              <a:buNone/>
-            </a:pPr>
             <a:r>
               <a:rPr lang="en-US" sz="1200" dirty="0">
                 <a:solidFill>
@@ -4912,6 +4566,7 @@
         <a:solidFill>
           <a:srgbClr val="FFFFFF"/>
         </a:solidFill>
+        <a:effectLst/>
       </p:bgPr>
     </p:bg>
     <p:spTree>
@@ -4949,7 +4604,7 @@
           <a:bodyPr wrap="square" lIns="0" tIns="0" rIns="0" bIns="0" rtlCol="0" anchor="t"/>
           <a:lstStyle/>
           <a:p>
-            <a:pPr algn="r" indent="0" marL="0">
+            <a:pPr marL="0" indent="0" algn="r">
               <a:buNone/>
             </a:pPr>
             <a:r>
@@ -5015,7 +4670,7 @@
           <a:bodyPr wrap="square" lIns="0" tIns="0" rIns="0" bIns="0" rtlCol="0" anchor="ctr"/>
           <a:lstStyle/>
           <a:p>
-            <a:pPr algn="ctr" indent="0" marL="0">
+            <a:pPr marL="0" indent="0" algn="ctr">
               <a:buNone/>
             </a:pPr>
             <a:r>
@@ -5054,7 +4709,7 @@
           <a:bodyPr wrap="square" lIns="0" tIns="0" rIns="0" bIns="0" rtlCol="0" anchor="ctr"/>
           <a:lstStyle/>
           <a:p>
-            <a:pPr indent="0" marL="0">
+            <a:pPr marL="0" indent="0">
               <a:buNone/>
             </a:pPr>
             <a:r>
@@ -5068,9 +4723,6 @@
               </a:rPr>
               <a:t>Lead Capture &amp; Qualification</a:t>
             </a:r>
-            <a:pPr indent="0" marL="0">
-              <a:buNone/>
-            </a:pPr>
             <a:r>
               <a:rPr lang="en-US" sz="2400" dirty="0">
                 <a:solidFill>
@@ -5132,7 +4784,7 @@
           <a:bodyPr wrap="square" lIns="0" tIns="0" rIns="0" bIns="0" rtlCol="0" anchor="ctr"/>
           <a:lstStyle/>
           <a:p>
-            <a:pPr algn="ctr" indent="0" marL="0">
+            <a:pPr marL="0" indent="0" algn="ctr">
               <a:buNone/>
             </a:pPr>
             <a:r>
@@ -5171,7 +4823,7 @@
           <a:bodyPr wrap="square" lIns="0" tIns="0" rIns="0" bIns="0" rtlCol="0" anchor="ctr"/>
           <a:lstStyle/>
           <a:p>
-            <a:pPr indent="0" marL="0">
+            <a:pPr marL="0" indent="0">
               <a:buNone/>
             </a:pPr>
             <a:r>
@@ -5235,7 +4887,7 @@
           <a:bodyPr wrap="square" lIns="0" tIns="0" rIns="0" bIns="0" rtlCol="0" anchor="ctr"/>
           <a:lstStyle/>
           <a:p>
-            <a:pPr algn="ctr" indent="0" marL="0">
+            <a:pPr marL="0" indent="0" algn="ctr">
               <a:buNone/>
             </a:pPr>
             <a:r>
@@ -5274,7 +4926,7 @@
           <a:bodyPr wrap="square" lIns="0" tIns="0" rIns="0" bIns="0" rtlCol="0" anchor="ctr"/>
           <a:lstStyle/>
           <a:p>
-            <a:pPr indent="0" marL="0">
+            <a:pPr marL="0" indent="0">
               <a:buNone/>
             </a:pPr>
             <a:r>
@@ -5338,7 +4990,7 @@
           <a:bodyPr wrap="square" lIns="0" tIns="0" rIns="0" bIns="0" rtlCol="0" anchor="ctr"/>
           <a:lstStyle/>
           <a:p>
-            <a:pPr algn="ctr" indent="0" marL="0">
+            <a:pPr marL="0" indent="0" algn="ctr">
               <a:buNone/>
             </a:pPr>
             <a:r>
@@ -5377,7 +5029,7 @@
           <a:bodyPr wrap="square" lIns="0" tIns="0" rIns="0" bIns="0" rtlCol="0" anchor="ctr"/>
           <a:lstStyle/>
           <a:p>
-            <a:pPr indent="0" marL="0">
+            <a:pPr marL="0" indent="0">
               <a:buNone/>
             </a:pPr>
             <a:r>
@@ -5441,7 +5093,7 @@
           <a:bodyPr wrap="square" lIns="0" tIns="0" rIns="0" bIns="0" rtlCol="0" anchor="ctr"/>
           <a:lstStyle/>
           <a:p>
-            <a:pPr algn="ctr" indent="0" marL="0">
+            <a:pPr marL="0" indent="0" algn="ctr">
               <a:buNone/>
             </a:pPr>
             <a:r>
@@ -5480,7 +5132,7 @@
           <a:bodyPr wrap="square" lIns="0" tIns="0" rIns="0" bIns="0" rtlCol="0" anchor="ctr"/>
           <a:lstStyle/>
           <a:p>
-            <a:pPr indent="0" marL="0">
+            <a:pPr marL="0" indent="0">
               <a:buNone/>
             </a:pPr>
             <a:r>
@@ -5519,7 +5171,7 @@
           <a:bodyPr wrap="square" lIns="0" tIns="0" rIns="0" bIns="0" rtlCol="0" anchor="t"/>
           <a:lstStyle/>
           <a:p>
-            <a:pPr indent="0" marL="0">
+            <a:pPr marL="0" indent="0">
               <a:buNone/>
             </a:pPr>
             <a:r>
@@ -5585,7 +5237,7 @@
           <a:bodyPr wrap="square" lIns="0" tIns="0" rIns="0" bIns="0" rtlCol="0" anchor="t"/>
           <a:lstStyle/>
           <a:p>
-            <a:pPr indent="0" marL="0">
+            <a:pPr marL="0" indent="0">
               <a:buNone/>
             </a:pPr>
             <a:r>
@@ -5602,7 +5254,7 @@
             <a:endParaRPr lang="en-US" sz="950" dirty="0"/>
           </a:p>
           <a:p>
-            <a:pPr indent="0" marL="0">
+            <a:pPr marL="0" indent="0">
               <a:buNone/>
             </a:pPr>
             <a:r>
@@ -5619,7 +5271,7 @@
             <a:endParaRPr lang="en-US" sz="950" dirty="0"/>
           </a:p>
           <a:p>
-            <a:pPr indent="0" marL="0">
+            <a:pPr marL="0" indent="0">
               <a:buNone/>
             </a:pPr>
             <a:r>
@@ -5636,7 +5288,7 @@
             <a:endParaRPr lang="en-US" sz="950" dirty="0"/>
           </a:p>
           <a:p>
-            <a:pPr indent="0" marL="0">
+            <a:pPr marL="0" indent="0">
               <a:buNone/>
             </a:pPr>
             <a:r>
@@ -5653,7 +5305,7 @@
             <a:endParaRPr lang="en-US" sz="950" dirty="0"/>
           </a:p>
           <a:p>
-            <a:pPr indent="0" marL="0">
+            <a:pPr marL="0" indent="0">
               <a:buNone/>
             </a:pPr>
             <a:r>
@@ -5670,7 +5322,7 @@
             <a:endParaRPr lang="en-US" sz="950" dirty="0"/>
           </a:p>
           <a:p>
-            <a:pPr indent="0" marL="0">
+            <a:pPr marL="0" indent="0">
               <a:buNone/>
             </a:pPr>
             <a:r>
@@ -5687,7 +5339,7 @@
             <a:endParaRPr lang="en-US" sz="950" dirty="0"/>
           </a:p>
           <a:p>
-            <a:pPr indent="0" marL="0">
+            <a:pPr marL="0" indent="0">
               <a:buNone/>
             </a:pPr>
             <a:r>
@@ -5704,7 +5356,7 @@
             <a:endParaRPr lang="en-US" sz="950" dirty="0"/>
           </a:p>
           <a:p>
-            <a:pPr indent="0" marL="0">
+            <a:pPr marL="0" indent="0">
               <a:buNone/>
             </a:pPr>
             <a:r>
@@ -5721,7 +5373,7 @@
             <a:endParaRPr lang="en-US" sz="950" dirty="0"/>
           </a:p>
           <a:p>
-            <a:pPr indent="0" marL="0">
+            <a:pPr marL="0" indent="0">
               <a:buNone/>
             </a:pPr>
             <a:r>
@@ -5738,7 +5390,7 @@
             <a:endParaRPr lang="en-US" sz="950" dirty="0"/>
           </a:p>
           <a:p>
-            <a:pPr indent="0" marL="0">
+            <a:pPr marL="0" indent="0">
               <a:buNone/>
             </a:pPr>
             <a:r>
@@ -5755,7 +5407,7 @@
             <a:endParaRPr lang="en-US" sz="950" dirty="0"/>
           </a:p>
           <a:p>
-            <a:pPr indent="0" marL="0">
+            <a:pPr marL="0" indent="0">
               <a:buNone/>
             </a:pPr>
             <a:r>
@@ -5802,14 +5454,14 @@
       </p:sp>
       <p:pic>
         <p:nvPicPr>
-          <p:cNvPr id="22" name="Image 0" descr="preencoded.png">    </p:cNvPr>
+          <p:cNvPr id="22" name="Image 0" descr="preencoded.png"/>
           <p:cNvPicPr>
             <a:picLocks noChangeAspect="1"/>
           </p:cNvPicPr>
           <p:nvPr/>
         </p:nvPicPr>
         <p:blipFill>
-          <a:blip r:embed="rId1"/>
+          <a:blip r:embed="rId3"/>
           <a:stretch>
             <a:fillRect/>
           </a:stretch>
@@ -5845,7 +5497,7 @@
           <a:bodyPr wrap="square" lIns="0" tIns="0" rIns="0" bIns="0" rtlCol="0" anchor="ctr"/>
           <a:lstStyle/>
           <a:p>
-            <a:pPr indent="0" marL="0">
+            <a:pPr marL="0" indent="0">
               <a:buNone/>
             </a:pPr>
             <a:r>
@@ -5859,9 +5511,6 @@
               </a:rPr>
               <a:t>Each lead is stored once with the right </a:t>
             </a:r>
-            <a:pPr indent="0" marL="0">
-              <a:buNone/>
-            </a:pPr>
             <a:r>
               <a:rPr lang="en-US" sz="1200" b="1" dirty="0">
                 <a:solidFill>
@@ -5873,9 +5522,6 @@
               </a:rPr>
               <a:t>segment</a:t>
             </a:r>
-            <a:pPr indent="0" marL="0">
-              <a:buNone/>
-            </a:pPr>
             <a:r>
               <a:rPr lang="en-US" sz="1200" dirty="0">
                 <a:solidFill>
@@ -5907,6 +5553,7 @@
         <a:solidFill>
           <a:srgbClr val="FFFFFF"/>
         </a:solidFill>
+        <a:effectLst/>
       </p:bgPr>
     </p:bg>
     <p:spTree>
@@ -5944,7 +5591,7 @@
           <a:bodyPr wrap="square" lIns="0" tIns="0" rIns="0" bIns="0" rtlCol="0" anchor="t"/>
           <a:lstStyle/>
           <a:p>
-            <a:pPr algn="r" indent="0" marL="0">
+            <a:pPr marL="0" indent="0" algn="r">
               <a:buNone/>
             </a:pPr>
             <a:r>
@@ -6010,7 +5657,7 @@
           <a:bodyPr wrap="square" lIns="0" tIns="0" rIns="0" bIns="0" rtlCol="0" anchor="ctr"/>
           <a:lstStyle/>
           <a:p>
-            <a:pPr algn="ctr" indent="0" marL="0">
+            <a:pPr marL="0" indent="0" algn="ctr">
               <a:buNone/>
             </a:pPr>
             <a:r>
@@ -6049,7 +5696,7 @@
           <a:bodyPr wrap="square" lIns="0" tIns="0" rIns="0" bIns="0" rtlCol="0" anchor="ctr"/>
           <a:lstStyle/>
           <a:p>
-            <a:pPr indent="0" marL="0">
+            <a:pPr marL="0" indent="0">
               <a:buNone/>
             </a:pPr>
             <a:r>
@@ -6063,9 +5710,6 @@
               </a:rPr>
               <a:t>Expense Approval</a:t>
             </a:r>
-            <a:pPr indent="0" marL="0">
-              <a:buNone/>
-            </a:pPr>
             <a:r>
               <a:rPr lang="en-US" sz="2400" dirty="0">
                 <a:solidFill>
@@ -6137,14 +5781,14 @@
       </p:sp>
       <p:pic>
         <p:nvPicPr>
-          <p:cNvPr id="8" name="Image 0" descr="preencoded.png">    </p:cNvPr>
+          <p:cNvPr id="8" name="Image 0" descr="preencoded.png"/>
           <p:cNvPicPr>
             <a:picLocks noChangeAspect="1"/>
           </p:cNvPicPr>
           <p:nvPr/>
         </p:nvPicPr>
         <p:blipFill>
-          <a:blip r:embed="rId1"/>
+          <a:blip r:embed="rId3"/>
           <a:stretch>
             <a:fillRect/>
           </a:stretch>
@@ -6180,7 +5824,7 @@
           <a:bodyPr wrap="square" lIns="0" tIns="0" rIns="0" bIns="0" rtlCol="0" anchor="t"/>
           <a:lstStyle/>
           <a:p>
-            <a:pPr algn="ctr" indent="0" marL="0">
+            <a:pPr marL="0" indent="0" algn="ctr">
               <a:buNone/>
             </a:pPr>
             <a:r>
@@ -6197,7 +5841,7 @@
             <a:endParaRPr lang="en-US" sz="1050" dirty="0"/>
           </a:p>
           <a:p>
-            <a:pPr algn="ctr" indent="0" marL="0">
+            <a:pPr marL="0" indent="0" algn="ctr">
               <a:buNone/>
             </a:pPr>
             <a:r>
@@ -6268,14 +5912,14 @@
       </p:sp>
       <p:pic>
         <p:nvPicPr>
-          <p:cNvPr id="12" name="Image 1" descr="preencoded.png">    </p:cNvPr>
+          <p:cNvPr id="12" name="Image 1" descr="preencoded.png"/>
           <p:cNvPicPr>
             <a:picLocks noChangeAspect="1"/>
           </p:cNvPicPr>
           <p:nvPr/>
         </p:nvPicPr>
         <p:blipFill>
-          <a:blip r:embed="rId2"/>
+          <a:blip r:embed="rId4"/>
           <a:stretch>
             <a:fillRect/>
           </a:stretch>
@@ -6311,7 +5955,7 @@
           <a:bodyPr wrap="square" lIns="0" tIns="0" rIns="0" bIns="0" rtlCol="0" anchor="t"/>
           <a:lstStyle/>
           <a:p>
-            <a:pPr algn="ctr" indent="0" marL="0">
+            <a:pPr marL="0" indent="0" algn="ctr">
               <a:buNone/>
             </a:pPr>
             <a:r>
@@ -6328,7 +5972,7 @@
             <a:endParaRPr lang="en-US" sz="1050" dirty="0"/>
           </a:p>
           <a:p>
-            <a:pPr algn="ctr" indent="0" marL="0">
+            <a:pPr marL="0" indent="0" algn="ctr">
               <a:buNone/>
             </a:pPr>
             <a:r>
@@ -6399,14 +6043,14 @@
       </p:sp>
       <p:pic>
         <p:nvPicPr>
-          <p:cNvPr id="16" name="Image 2" descr="preencoded.png">    </p:cNvPr>
+          <p:cNvPr id="16" name="Image 2" descr="preencoded.png"/>
           <p:cNvPicPr>
             <a:picLocks noChangeAspect="1"/>
           </p:cNvPicPr>
           <p:nvPr/>
         </p:nvPicPr>
         <p:blipFill>
-          <a:blip r:embed="rId3"/>
+          <a:blip r:embed="rId5"/>
           <a:stretch>
             <a:fillRect/>
           </a:stretch>
@@ -6442,7 +6086,7 @@
           <a:bodyPr wrap="square" lIns="0" tIns="0" rIns="0" bIns="0" rtlCol="0" anchor="t"/>
           <a:lstStyle/>
           <a:p>
-            <a:pPr algn="ctr" indent="0" marL="0">
+            <a:pPr marL="0" indent="0" algn="ctr">
               <a:buNone/>
             </a:pPr>
             <a:r>
@@ -6459,7 +6103,7 @@
             <a:endParaRPr lang="en-US" sz="1050" dirty="0"/>
           </a:p>
           <a:p>
-            <a:pPr algn="ctr" indent="0" marL="0">
+            <a:pPr marL="0" indent="0" algn="ctr">
               <a:buNone/>
             </a:pPr>
             <a:r>
@@ -6530,14 +6174,14 @@
       </p:sp>
       <p:pic>
         <p:nvPicPr>
-          <p:cNvPr id="20" name="Image 3" descr="preencoded.png">    </p:cNvPr>
+          <p:cNvPr id="20" name="Image 3" descr="preencoded.png"/>
           <p:cNvPicPr>
             <a:picLocks noChangeAspect="1"/>
           </p:cNvPicPr>
           <p:nvPr/>
         </p:nvPicPr>
         <p:blipFill>
-          <a:blip r:embed="rId4"/>
+          <a:blip r:embed="rId6"/>
           <a:stretch>
             <a:fillRect/>
           </a:stretch>
@@ -6573,7 +6217,7 @@
           <a:bodyPr wrap="square" lIns="0" tIns="0" rIns="0" bIns="0" rtlCol="0" anchor="t"/>
           <a:lstStyle/>
           <a:p>
-            <a:pPr algn="ctr" indent="0" marL="0">
+            <a:pPr marL="0" indent="0" algn="ctr">
               <a:buNone/>
             </a:pPr>
             <a:r>
@@ -6590,7 +6234,7 @@
             <a:endParaRPr lang="en-US" sz="1050" dirty="0"/>
           </a:p>
           <a:p>
-            <a:pPr algn="ctr" indent="0" marL="0">
+            <a:pPr marL="0" indent="0" algn="ctr">
               <a:buNone/>
             </a:pPr>
             <a:r>
@@ -6661,14 +6305,14 @@
       </p:sp>
       <p:pic>
         <p:nvPicPr>
-          <p:cNvPr id="24" name="Image 4" descr="preencoded.png">    </p:cNvPr>
+          <p:cNvPr id="24" name="Image 4" descr="preencoded.png"/>
           <p:cNvPicPr>
             <a:picLocks noChangeAspect="1"/>
           </p:cNvPicPr>
           <p:nvPr/>
         </p:nvPicPr>
         <p:blipFill>
-          <a:blip r:embed="rId5"/>
+          <a:blip r:embed="rId7"/>
           <a:stretch>
             <a:fillRect/>
           </a:stretch>
@@ -6704,7 +6348,7 @@
           <a:bodyPr wrap="square" lIns="0" tIns="0" rIns="0" bIns="0" rtlCol="0" anchor="t"/>
           <a:lstStyle/>
           <a:p>
-            <a:pPr algn="ctr" indent="0" marL="0">
+            <a:pPr marL="0" indent="0" algn="ctr">
               <a:buNone/>
             </a:pPr>
             <a:r>
@@ -6721,7 +6365,7 @@
             <a:endParaRPr lang="en-US" sz="1050" dirty="0"/>
           </a:p>
           <a:p>
-            <a:pPr algn="ctr" indent="0" marL="0">
+            <a:pPr marL="0" indent="0" algn="ctr">
               <a:buNone/>
             </a:pPr>
             <a:r>
@@ -6792,14 +6436,14 @@
       </p:sp>
       <p:pic>
         <p:nvPicPr>
-          <p:cNvPr id="28" name="Image 5" descr="preencoded.png">    </p:cNvPr>
+          <p:cNvPr id="28" name="Image 5" descr="preencoded.png"/>
           <p:cNvPicPr>
             <a:picLocks noChangeAspect="1"/>
           </p:cNvPicPr>
           <p:nvPr/>
         </p:nvPicPr>
         <p:blipFill>
-          <a:blip r:embed="rId6"/>
+          <a:blip r:embed="rId5"/>
           <a:stretch>
             <a:fillRect/>
           </a:stretch>
@@ -6835,7 +6479,7 @@
           <a:bodyPr wrap="square" lIns="0" tIns="0" rIns="0" bIns="0" rtlCol="0" anchor="t"/>
           <a:lstStyle/>
           <a:p>
-            <a:pPr algn="ctr" indent="0" marL="0">
+            <a:pPr marL="0" indent="0" algn="ctr">
               <a:buNone/>
             </a:pPr>
             <a:r>
@@ -6852,7 +6496,7 @@
             <a:endParaRPr lang="en-US" sz="1050" dirty="0"/>
           </a:p>
           <a:p>
-            <a:pPr algn="ctr" indent="0" marL="0">
+            <a:pPr marL="0" indent="0" algn="ctr">
               <a:buNone/>
             </a:pPr>
             <a:r>
@@ -6923,7 +6567,7 @@
       </p:sp>
       <p:pic>
         <p:nvPicPr>
-          <p:cNvPr id="32" name="Image 6" descr="preencoded.png">    </p:cNvPr>
+          <p:cNvPr id="32" name="Image 6" descr="preencoded.png"/>
           <p:cNvPicPr>
             <a:picLocks noChangeAspect="1"/>
           </p:cNvPicPr>
@@ -6966,7 +6610,7 @@
           <a:bodyPr wrap="square" lIns="0" tIns="0" rIns="0" bIns="0" rtlCol="0" anchor="t"/>
           <a:lstStyle/>
           <a:p>
-            <a:pPr algn="ctr" indent="0" marL="0">
+            <a:pPr marL="0" indent="0" algn="ctr">
               <a:buNone/>
             </a:pPr>
             <a:r>
@@ -6983,7 +6627,7 @@
             <a:endParaRPr lang="en-US" sz="1050" dirty="0"/>
           </a:p>
           <a:p>
-            <a:pPr algn="ctr" indent="0" marL="0">
+            <a:pPr marL="0" indent="0" algn="ctr">
               <a:buNone/>
             </a:pPr>
             <a:r>
@@ -7022,11 +6666,11 @@
           <a:bodyPr wrap="square" lIns="0" tIns="0" rIns="0" bIns="0" rtlCol="0" anchor="t"/>
           <a:lstStyle/>
           <a:p>
-            <a:pPr indent="0" marL="0">
-              <a:buNone/>
-            </a:pPr>
-            <a:r>
-              <a:rPr lang="en-US" sz="1000" b="1" spc="300" kern="0" dirty="0">
+            <a:pPr marL="0" indent="0">
+              <a:buNone/>
+            </a:pPr>
+            <a:r>
+              <a:rPr lang="en-US" sz="1000" b="1" kern="0" spc="300" dirty="0">
                 <a:solidFill>
                   <a:srgbClr val="EA4B71"/>
                 </a:solidFill>
@@ -7061,7 +6705,7 @@
           <a:bodyPr wrap="square" lIns="0" tIns="0" rIns="0" bIns="0" rtlCol="0" anchor="t"/>
           <a:lstStyle/>
           <a:p>
-            <a:pPr indent="0" marL="0">
+            <a:pPr marL="0" indent="0">
               <a:buNone/>
             </a:pPr>
             <a:r>
@@ -7075,9 +6719,6 @@
               </a:rPr>
               <a:t>Employees submit expense claims. Small claims are approved automatically; claims above Rs 5,000 wait until the manager clicks </a:t>
             </a:r>
-            <a:pPr indent="0" marL="0">
-              <a:buNone/>
-            </a:pPr>
             <a:r>
               <a:rPr lang="en-US" sz="1300" b="1" dirty="0">
                 <a:solidFill>
@@ -7089,9 +6730,6 @@
               </a:rPr>
               <a:t>Approve</a:t>
             </a:r>
-            <a:pPr indent="0" marL="0">
-              <a:buNone/>
-            </a:pPr>
             <a:r>
               <a:rPr lang="en-US" sz="1300" dirty="0">
                 <a:solidFill>
@@ -7103,9 +6741,6 @@
               </a:rPr>
               <a:t> or </a:t>
             </a:r>
-            <a:pPr indent="0" marL="0">
-              <a:buNone/>
-            </a:pPr>
             <a:r>
               <a:rPr lang="en-US" sz="1300" b="1" dirty="0">
                 <a:solidFill>
@@ -7117,9 +6752,6 @@
               </a:rPr>
               <a:t>Decline</a:t>
             </a:r>
-            <a:pPr indent="0" marL="0">
-              <a:buNone/>
-            </a:pPr>
             <a:r>
               <a:rPr lang="en-US" sz="1300" dirty="0">
                 <a:solidFill>
@@ -7156,11 +6788,11 @@
           <a:bodyPr wrap="square" lIns="0" tIns="0" rIns="0" bIns="0" rtlCol="0" anchor="t"/>
           <a:lstStyle/>
           <a:p>
-            <a:pPr indent="0" marL="0">
-              <a:buNone/>
-            </a:pPr>
-            <a:r>
-              <a:rPr lang="en-US" sz="1000" b="1" spc="300" kern="0" dirty="0">
+            <a:pPr marL="0" indent="0">
+              <a:buNone/>
+            </a:pPr>
+            <a:r>
+              <a:rPr lang="en-US" sz="1000" b="1" kern="0" spc="300" dirty="0">
                 <a:solidFill>
                   <a:srgbClr val="1A7F8E"/>
                 </a:solidFill>
@@ -7213,12 +6845,6 @@
               </a:rPr>
               <a:t>Human-in-the-loop with </a:t>
             </a:r>
-            <a:pPr indent="0" marL="0">
-              <a:spcAft>
-                <a:spcPts val="400"/>
-              </a:spcAft>
-              <a:buNone/>
-            </a:pPr>
             <a:r>
               <a:rPr lang="en-US" sz="1250" b="1" dirty="0">
                 <a:solidFill>
@@ -7272,12 +6898,6 @@
               </a:rPr>
               <a:t>MySQL </a:t>
             </a:r>
-            <a:pPr indent="0" marL="0">
-              <a:spcAft>
-                <a:spcPts val="400"/>
-              </a:spcAft>
-              <a:buNone/>
-            </a:pPr>
             <a:r>
               <a:rPr lang="en-US" sz="1250" b="1" dirty="0">
                 <a:solidFill>
@@ -7289,12 +6909,6 @@
               </a:rPr>
               <a:t>Update</a:t>
             </a:r>
-            <a:pPr indent="0" marL="0">
-              <a:spcAft>
-                <a:spcPts val="400"/>
-              </a:spcAft>
-              <a:buNone/>
-            </a:pPr>
             <a:r>
               <a:rPr lang="en-US" sz="1250" dirty="0">
                 <a:solidFill>
@@ -7347,6 +6961,7 @@
         <a:solidFill>
           <a:srgbClr val="FFFFFF"/>
         </a:solidFill>
+        <a:effectLst/>
       </p:bgPr>
     </p:bg>
     <p:spTree>
@@ -7384,7 +6999,7 @@
           <a:bodyPr wrap="square" lIns="0" tIns="0" rIns="0" bIns="0" rtlCol="0" anchor="t"/>
           <a:lstStyle/>
           <a:p>
-            <a:pPr algn="r" indent="0" marL="0">
+            <a:pPr marL="0" indent="0" algn="r">
               <a:buNone/>
             </a:pPr>
             <a:r>
@@ -7450,7 +7065,7 @@
           <a:bodyPr wrap="square" lIns="0" tIns="0" rIns="0" bIns="0" rtlCol="0" anchor="ctr"/>
           <a:lstStyle/>
           <a:p>
-            <a:pPr algn="ctr" indent="0" marL="0">
+            <a:pPr marL="0" indent="0" algn="ctr">
               <a:buNone/>
             </a:pPr>
             <a:r>
@@ -7489,7 +7104,7 @@
           <a:bodyPr wrap="square" lIns="0" tIns="0" rIns="0" bIns="0" rtlCol="0" anchor="ctr"/>
           <a:lstStyle/>
           <a:p>
-            <a:pPr indent="0" marL="0">
+            <a:pPr marL="0" indent="0">
               <a:buNone/>
             </a:pPr>
             <a:r>
@@ -7503,9 +7118,6 @@
               </a:rPr>
               <a:t>Expense Approval</a:t>
             </a:r>
-            <a:pPr indent="0" marL="0">
-              <a:buNone/>
-            </a:pPr>
             <a:r>
               <a:rPr lang="en-US" sz="2400" dirty="0">
                 <a:solidFill>
@@ -7537,15 +7149,27 @@
         </p:nvGraphicFramePr>
         <p:xfrm>
           <a:off x="457200" y="1005840"/>
-          <a:ext cx="8229600" cy="914400"/>
+          <a:ext cx="8229600" cy="2573020"/>
         </p:xfrm>
         <a:graphic>
           <a:graphicData uri="http://schemas.openxmlformats.org/drawingml/2006/table">
             <a:tbl>
               <a:tblPr/>
               <a:tblGrid>
-                <a:gridCol w="1920240"/>
-                <a:gridCol w="6309360"/>
+                <a:gridCol w="1920240">
+                  <a:extLst>
+                    <a:ext uri="{9D8B030D-6E8A-4147-A177-3AD203B41FA5}">
+                      <a16:colId xmlns:a16="http://schemas.microsoft.com/office/drawing/2014/main" val="20000"/>
+                    </a:ext>
+                  </a:extLst>
+                </a:gridCol>
+                <a:gridCol w="6309360">
+                  <a:extLst>
+                    <a:ext uri="{9D8B030D-6E8A-4147-A177-3AD203B41FA5}">
+                      <a16:colId xmlns:a16="http://schemas.microsoft.com/office/drawing/2014/main" val="20001"/>
+                    </a:ext>
+                  </a:extLst>
+                </a:gridCol>
               </a:tblGrid>
               <a:tr h="0">
                 <a:tc>
@@ -7553,7 +7177,7 @@
                     <a:bodyPr/>
                     <a:lstStyle/>
                     <a:p>
-                      <a:pPr indent="0" marL="0">
+                      <a:pPr marL="0" indent="0">
                         <a:buNone/>
                       </a:pPr>
                       <a:r>
@@ -7621,7 +7245,7 @@
                     <a:bodyPr/>
                     <a:lstStyle/>
                     <a:p>
-                      <a:pPr indent="0" marL="0">
+                      <a:pPr marL="0" indent="0">
                         <a:buNone/>
                       </a:pPr>
                       <a:r>
@@ -7684,6 +7308,11 @@
                     </a:solidFill>
                   </a:tcPr>
                 </a:tc>
+                <a:extLst>
+                  <a:ext uri="{0D108BD9-81ED-4DB2-BD59-A6C34878D82A}">
+                    <a16:rowId xmlns:a16="http://schemas.microsoft.com/office/drawing/2014/main" val="10000"/>
+                  </a:ext>
+                </a:extLst>
               </a:tr>
               <a:tr h="0">
                 <a:tc>
@@ -7691,7 +7320,7 @@
                     <a:bodyPr/>
                     <a:lstStyle/>
                     <a:p>
-                      <a:pPr indent="0" marL="0">
+                      <a:pPr marL="0" indent="0">
                         <a:buNone/>
                       </a:pPr>
                       <a:r>
@@ -7759,7 +7388,7 @@
                     <a:bodyPr/>
                     <a:lstStyle/>
                     <a:p>
-                      <a:pPr indent="0" marL="0">
+                      <a:pPr marL="0" indent="0">
                         <a:buNone/>
                       </a:pPr>
                       <a:r>
@@ -7822,6 +7451,11 @@
                     </a:solidFill>
                   </a:tcPr>
                 </a:tc>
+                <a:extLst>
+                  <a:ext uri="{0D108BD9-81ED-4DB2-BD59-A6C34878D82A}">
+                    <a16:rowId xmlns:a16="http://schemas.microsoft.com/office/drawing/2014/main" val="10001"/>
+                  </a:ext>
+                </a:extLst>
               </a:tr>
               <a:tr h="0">
                 <a:tc>
@@ -7829,7 +7463,7 @@
                     <a:bodyPr/>
                     <a:lstStyle/>
                     <a:p>
-                      <a:pPr indent="0" marL="0">
+                      <a:pPr marL="0" indent="0">
                         <a:buNone/>
                       </a:pPr>
                       <a:r>
@@ -7897,7 +7531,7 @@
                     <a:bodyPr/>
                     <a:lstStyle/>
                     <a:p>
-                      <a:pPr indent="0" marL="0">
+                      <a:pPr marL="0" indent="0">
                         <a:buNone/>
                       </a:pPr>
                       <a:r>
@@ -7911,9 +7545,6 @@
                         </a:rPr>
                         <a:t>expense_id</a:t>
                       </a:r>
-                      <a:pPr indent="0" marL="0">
-                        <a:buNone/>
-                      </a:pPr>
                       <a:r>
                         <a:rPr lang="en-US" sz="1050" dirty="0">
                           <a:solidFill>
@@ -7925,9 +7556,6 @@
                         </a:rPr>
                         <a:t> = </a:t>
                       </a:r>
-                      <a:pPr indent="0" marL="0">
-                        <a:buNone/>
-                      </a:pPr>
                       <a:r>
                         <a:rPr lang="en-US" sz="1050" b="1" dirty="0">
                           <a:solidFill>
@@ -7939,9 +7567,6 @@
                         </a:rPr>
                         <a:t>EXP-{{ $now.toFormat('yyMMdd') }}-{{ $execution.id }}</a:t>
                       </a:r>
-                      <a:pPr indent="0" marL="0">
-                        <a:buNone/>
-                      </a:pPr>
                       <a:r>
                         <a:rPr lang="en-US" sz="1050" dirty="0">
                           <a:solidFill>
@@ -7953,9 +7578,6 @@
                         </a:rPr>
                         <a:t>, </a:t>
                       </a:r>
-                      <a:pPr indent="0" marL="0">
-                        <a:buNone/>
-                      </a:pPr>
                       <a:r>
                         <a:rPr lang="en-US" sz="1050" b="1" dirty="0">
                           <a:solidFill>
@@ -7967,9 +7589,6 @@
                         </a:rPr>
                         <a:t>status</a:t>
                       </a:r>
-                      <a:pPr indent="0" marL="0">
-                        <a:buNone/>
-                      </a:pPr>
                       <a:r>
                         <a:rPr lang="en-US" sz="1050" dirty="0">
                           <a:solidFill>
@@ -7981,9 +7600,6 @@
                         </a:rPr>
                         <a:t> = </a:t>
                       </a:r>
-                      <a:pPr indent="0" marL="0">
-                        <a:buNone/>
-                      </a:pPr>
                       <a:r>
                         <a:rPr lang="en-US" sz="1050" b="1" dirty="0">
                           <a:solidFill>
@@ -7995,9 +7611,6 @@
                         </a:rPr>
                         <a:t>Pending</a:t>
                       </a:r>
-                      <a:pPr indent="0" marL="0">
-                        <a:buNone/>
-                      </a:pPr>
                       <a:r>
                         <a:rPr lang="en-US" sz="1050" dirty="0">
                           <a:solidFill>
@@ -8058,6 +7671,11 @@
                     </a:solidFill>
                   </a:tcPr>
                 </a:tc>
+                <a:extLst>
+                  <a:ext uri="{0D108BD9-81ED-4DB2-BD59-A6C34878D82A}">
+                    <a16:rowId xmlns:a16="http://schemas.microsoft.com/office/drawing/2014/main" val="10002"/>
+                  </a:ext>
+                </a:extLst>
               </a:tr>
               <a:tr h="0">
                 <a:tc>
@@ -8065,7 +7683,7 @@
                     <a:bodyPr/>
                     <a:lstStyle/>
                     <a:p>
-                      <a:pPr indent="0" marL="0">
+                      <a:pPr marL="0" indent="0">
                         <a:buNone/>
                       </a:pPr>
                       <a:r>
@@ -8133,7 +7751,7 @@
                     <a:bodyPr/>
                     <a:lstStyle/>
                     <a:p>
-                      <a:pPr indent="0" marL="0">
+                      <a:pPr marL="0" indent="0">
                         <a:buNone/>
                       </a:pPr>
                       <a:r>
@@ -8147,9 +7765,6 @@
                         </a:rPr>
                         <a:t>Table </a:t>
                       </a:r>
-                      <a:pPr indent="0" marL="0">
-                        <a:buNone/>
-                      </a:pPr>
                       <a:r>
                         <a:rPr lang="en-US" sz="1050" b="1" dirty="0">
                           <a:solidFill>
@@ -8161,9 +7776,6 @@
                         </a:rPr>
                         <a:t>expenses</a:t>
                       </a:r>
-                      <a:pPr indent="0" marL="0">
-                        <a:buNone/>
-                      </a:pPr>
                       <a:r>
                         <a:rPr lang="en-US" sz="1050" dirty="0">
                           <a:solidFill>
@@ -8224,6 +7836,11 @@
                     </a:solidFill>
                   </a:tcPr>
                 </a:tc>
+                <a:extLst>
+                  <a:ext uri="{0D108BD9-81ED-4DB2-BD59-A6C34878D82A}">
+                    <a16:rowId xmlns:a16="http://schemas.microsoft.com/office/drawing/2014/main" val="10003"/>
+                  </a:ext>
+                </a:extLst>
               </a:tr>
               <a:tr h="0">
                 <a:tc>
@@ -8231,7 +7848,7 @@
                     <a:bodyPr/>
                     <a:lstStyle/>
                     <a:p>
-                      <a:pPr indent="0" marL="0">
+                      <a:pPr marL="0" indent="0">
                         <a:buNone/>
                       </a:pPr>
                       <a:r>
@@ -8299,7 +7916,7 @@
                     <a:bodyPr/>
                     <a:lstStyle/>
                     <a:p>
-                      <a:pPr indent="0" marL="0">
+                      <a:pPr marL="0" indent="0">
                         <a:buNone/>
                       </a:pPr>
                       <a:r>
@@ -8313,9 +7930,6 @@
                         </a:rPr>
                         <a:t>{{ $('Edit Fields').item.json.amount }}</a:t>
                       </a:r>
-                      <a:pPr indent="0" marL="0">
-                        <a:buNone/>
-                      </a:pPr>
                       <a:r>
                         <a:rPr lang="en-US" sz="1050" dirty="0">
                           <a:solidFill>
@@ -8327,9 +7941,6 @@
                         </a:rPr>
                         <a:t> </a:t>
                       </a:r>
-                      <a:pPr indent="0" marL="0">
-                        <a:buNone/>
-                      </a:pPr>
                       <a:r>
                         <a:rPr lang="en-US" sz="1050" b="1" dirty="0">
                           <a:solidFill>
@@ -8341,9 +7952,6 @@
                         </a:rPr>
                         <a:t>is greater than</a:t>
                       </a:r>
-                      <a:pPr indent="0" marL="0">
-                        <a:buNone/>
-                      </a:pPr>
                       <a:r>
                         <a:rPr lang="en-US" sz="1050" dirty="0">
                           <a:solidFill>
@@ -8355,9 +7963,6 @@
                         </a:rPr>
                         <a:t> </a:t>
                       </a:r>
-                      <a:pPr indent="0" marL="0">
-                        <a:buNone/>
-                      </a:pPr>
                       <a:r>
                         <a:rPr lang="en-US" sz="1050" b="1" dirty="0">
                           <a:solidFill>
@@ -8369,9 +7974,6 @@
                         </a:rPr>
                         <a:t>5000</a:t>
                       </a:r>
-                      <a:pPr indent="0" marL="0">
-                        <a:buNone/>
-                      </a:pPr>
                       <a:r>
                         <a:rPr lang="en-US" sz="1050" dirty="0">
                           <a:solidFill>
@@ -8432,6 +8034,11 @@
                     </a:solidFill>
                   </a:tcPr>
                 </a:tc>
+                <a:extLst>
+                  <a:ext uri="{0D108BD9-81ED-4DB2-BD59-A6C34878D82A}">
+                    <a16:rowId xmlns:a16="http://schemas.microsoft.com/office/drawing/2014/main" val="10004"/>
+                  </a:ext>
+                </a:extLst>
               </a:tr>
               <a:tr h="0">
                 <a:tc>
@@ -8439,7 +8046,7 @@
                     <a:bodyPr/>
                     <a:lstStyle/>
                     <a:p>
-                      <a:pPr indent="0" marL="0">
+                      <a:pPr marL="0" indent="0">
                         <a:buNone/>
                       </a:pPr>
                       <a:r>
@@ -8507,7 +8114,7 @@
                     <a:bodyPr/>
                     <a:lstStyle/>
                     <a:p>
-                      <a:pPr indent="0" marL="0">
+                      <a:pPr marL="0" indent="0">
                         <a:buNone/>
                       </a:pPr>
                       <a:r>
@@ -8521,9 +8128,6 @@
                         </a:rPr>
                         <a:t>Operation </a:t>
                       </a:r>
-                      <a:pPr indent="0" marL="0">
-                        <a:buNone/>
-                      </a:pPr>
                       <a:r>
                         <a:rPr lang="en-US" sz="1050" b="1" dirty="0">
                           <a:solidFill>
@@ -8535,9 +8139,6 @@
                         </a:rPr>
                         <a:t>Send and Wait for Response</a:t>
                       </a:r>
-                      <a:pPr indent="0" marL="0">
-                        <a:buNone/>
-                      </a:pPr>
                       <a:r>
                         <a:rPr lang="en-US" sz="1050" dirty="0">
                           <a:solidFill>
@@ -8549,9 +8150,6 @@
                         </a:rPr>
                         <a:t>, response type </a:t>
                       </a:r>
-                      <a:pPr indent="0" marL="0">
-                        <a:buNone/>
-                      </a:pPr>
                       <a:r>
                         <a:rPr lang="en-US" sz="1050" b="1" dirty="0">
                           <a:solidFill>
@@ -8563,9 +8161,6 @@
                         </a:rPr>
                         <a:t>Approval</a:t>
                       </a:r>
-                      <a:pPr indent="0" marL="0">
-                        <a:buNone/>
-                      </a:pPr>
                       <a:r>
                         <a:rPr lang="en-US" sz="1050" dirty="0">
                           <a:solidFill>
@@ -8626,6 +8221,11 @@
                     </a:solidFill>
                   </a:tcPr>
                 </a:tc>
+                <a:extLst>
+                  <a:ext uri="{0D108BD9-81ED-4DB2-BD59-A6C34878D82A}">
+                    <a16:rowId xmlns:a16="http://schemas.microsoft.com/office/drawing/2014/main" val="10005"/>
+                  </a:ext>
+                </a:extLst>
               </a:tr>
               <a:tr h="0">
                 <a:tc>
@@ -8633,7 +8233,7 @@
                     <a:bodyPr/>
                     <a:lstStyle/>
                     <a:p>
-                      <a:pPr indent="0" marL="0">
+                      <a:pPr marL="0" indent="0">
                         <a:buNone/>
                       </a:pPr>
                       <a:r>
@@ -8701,7 +8301,7 @@
                     <a:bodyPr/>
                     <a:lstStyle/>
                     <a:p>
-                      <a:pPr indent="0" marL="0">
+                      <a:pPr marL="0" indent="0">
                         <a:buNone/>
                       </a:pPr>
                       <a:r>
@@ -8715,9 +8315,6 @@
                         </a:rPr>
                         <a:t>Table </a:t>
                       </a:r>
-                      <a:pPr indent="0" marL="0">
-                        <a:buNone/>
-                      </a:pPr>
                       <a:r>
                         <a:rPr lang="en-US" sz="1050" b="1" dirty="0">
                           <a:solidFill>
@@ -8729,9 +8326,6 @@
                         </a:rPr>
                         <a:t>expenses</a:t>
                       </a:r>
-                      <a:pPr indent="0" marL="0">
-                        <a:buNone/>
-                      </a:pPr>
                       <a:r>
                         <a:rPr lang="en-US" sz="1050" dirty="0">
                           <a:solidFill>
@@ -8743,9 +8337,6 @@
                         </a:rPr>
                         <a:t>, match on </a:t>
                       </a:r>
-                      <a:pPr indent="0" marL="0">
-                        <a:buNone/>
-                      </a:pPr>
                       <a:r>
                         <a:rPr lang="en-US" sz="1050" b="1" dirty="0">
                           <a:solidFill>
@@ -8757,9 +8348,6 @@
                         </a:rPr>
                         <a:t>expense_id</a:t>
                       </a:r>
-                      <a:pPr indent="0" marL="0">
-                        <a:buNone/>
-                      </a:pPr>
                       <a:r>
                         <a:rPr lang="en-US" sz="1050" dirty="0">
                           <a:solidFill>
@@ -8771,9 +8359,6 @@
                         </a:rPr>
                         <a:t>; </a:t>
                       </a:r>
-                      <a:pPr indent="0" marL="0">
-                        <a:buNone/>
-                      </a:pPr>
                       <a:r>
                         <a:rPr lang="en-US" sz="1050" b="1" dirty="0">
                           <a:solidFill>
@@ -8785,9 +8370,6 @@
                         </a:rPr>
                         <a:t>status</a:t>
                       </a:r>
-                      <a:pPr indent="0" marL="0">
-                        <a:buNone/>
-                      </a:pPr>
                       <a:r>
                         <a:rPr lang="en-US" sz="1050" dirty="0">
                           <a:solidFill>
@@ -8799,9 +8381,6 @@
                         </a:rPr>
                         <a:t> = </a:t>
                       </a:r>
-                      <a:pPr indent="0" marL="0">
-                        <a:buNone/>
-                      </a:pPr>
                       <a:r>
                         <a:rPr lang="en-US" sz="1050" b="1" dirty="0">
                           <a:solidFill>
@@ -8813,9 +8392,6 @@
                         </a:rPr>
                         <a:t>{{ $json.data.approved ? 'Approved' : 'Rejected' }}</a:t>
                       </a:r>
-                      <a:pPr indent="0" marL="0">
-                        <a:buNone/>
-                      </a:pPr>
                       <a:r>
                         <a:rPr lang="en-US" sz="1050" dirty="0">
                           <a:solidFill>
@@ -8827,9 +8403,6 @@
                         </a:rPr>
                         <a:t>. The false branch updates to </a:t>
                       </a:r>
-                      <a:pPr indent="0" marL="0">
-                        <a:buNone/>
-                      </a:pPr>
                       <a:r>
                         <a:rPr lang="en-US" sz="1050" b="1" dirty="0">
                           <a:solidFill>
@@ -8841,9 +8414,6 @@
                         </a:rPr>
                         <a:t>Approved</a:t>
                       </a:r>
-                      <a:pPr indent="0" marL="0">
-                        <a:buNone/>
-                      </a:pPr>
                       <a:r>
                         <a:rPr lang="en-US" sz="1050" dirty="0">
                           <a:solidFill>
@@ -8904,6 +8474,11 @@
                     </a:solidFill>
                   </a:tcPr>
                 </a:tc>
+                <a:extLst>
+                  <a:ext uri="{0D108BD9-81ED-4DB2-BD59-A6C34878D82A}">
+                    <a16:rowId xmlns:a16="http://schemas.microsoft.com/office/drawing/2014/main" val="10006"/>
+                  </a:ext>
+                </a:extLst>
               </a:tr>
               <a:tr h="0">
                 <a:tc>
@@ -8911,7 +8486,7 @@
                     <a:bodyPr/>
                     <a:lstStyle/>
                     <a:p>
-                      <a:pPr indent="0" marL="0">
+                      <a:pPr marL="0" indent="0">
                         <a:buNone/>
                       </a:pPr>
                       <a:r>
@@ -8979,7 +8554,7 @@
                     <a:bodyPr/>
                     <a:lstStyle/>
                     <a:p>
-                      <a:pPr indent="0" marL="0">
+                      <a:pPr marL="0" indent="0">
                         <a:buNone/>
                       </a:pPr>
                       <a:r>
@@ -8993,9 +8568,6 @@
                         </a:rPr>
                         <a:t>Tell the employee the result; read their email from </a:t>
                       </a:r>
-                      <a:pPr indent="0" marL="0">
-                        <a:buNone/>
-                      </a:pPr>
                       <a:r>
                         <a:rPr lang="en-US" sz="1050" b="1" dirty="0">
                           <a:solidFill>
@@ -9007,9 +8579,6 @@
                         </a:rPr>
                         <a:t>$('Edit Fields')</a:t>
                       </a:r>
-                      <a:pPr indent="0" marL="0">
-                        <a:buNone/>
-                      </a:pPr>
                       <a:r>
                         <a:rPr lang="en-US" sz="1050" dirty="0">
                           <a:solidFill>
@@ -9070,6 +8639,11 @@
                     </a:solidFill>
                   </a:tcPr>
                 </a:tc>
+                <a:extLst>
+                  <a:ext uri="{0D108BD9-81ED-4DB2-BD59-A6C34878D82A}">
+                    <a16:rowId xmlns:a16="http://schemas.microsoft.com/office/drawing/2014/main" val="10007"/>
+                  </a:ext>
+                </a:extLst>
               </a:tr>
             </a:tbl>
           </a:graphicData>
@@ -9091,6 +8665,7 @@
         <a:solidFill>
           <a:srgbClr val="FFFFFF"/>
         </a:solidFill>
+        <a:effectLst/>
       </p:bgPr>
     </p:bg>
     <p:spTree>
@@ -9128,7 +8703,7 @@
           <a:bodyPr wrap="square" lIns="0" tIns="0" rIns="0" bIns="0" rtlCol="0" anchor="t"/>
           <a:lstStyle/>
           <a:p>
-            <a:pPr algn="r" indent="0" marL="0">
+            <a:pPr marL="0" indent="0" algn="r">
               <a:buNone/>
             </a:pPr>
             <a:r>
@@ -9194,7 +8769,7 @@
           <a:bodyPr wrap="square" lIns="0" tIns="0" rIns="0" bIns="0" rtlCol="0" anchor="ctr"/>
           <a:lstStyle/>
           <a:p>
-            <a:pPr algn="ctr" indent="0" marL="0">
+            <a:pPr marL="0" indent="0" algn="ctr">
               <a:buNone/>
             </a:pPr>
             <a:r>
@@ -9233,7 +8808,7 @@
           <a:bodyPr wrap="square" lIns="0" tIns="0" rIns="0" bIns="0" rtlCol="0" anchor="ctr"/>
           <a:lstStyle/>
           <a:p>
-            <a:pPr indent="0" marL="0">
+            <a:pPr marL="0" indent="0">
               <a:buNone/>
             </a:pPr>
             <a:r>
@@ -9247,9 +8822,6 @@
               </a:rPr>
               <a:t>Expense Approval</a:t>
             </a:r>
-            <a:pPr indent="0" marL="0">
-              <a:buNone/>
-            </a:pPr>
             <a:r>
               <a:rPr lang="en-US" sz="2400" dirty="0">
                 <a:solidFill>
@@ -9311,7 +8883,7 @@
           <a:bodyPr wrap="square" lIns="0" tIns="0" rIns="0" bIns="0" rtlCol="0" anchor="ctr"/>
           <a:lstStyle/>
           <a:p>
-            <a:pPr algn="ctr" indent="0" marL="0">
+            <a:pPr marL="0" indent="0" algn="ctr">
               <a:buNone/>
             </a:pPr>
             <a:r>
@@ -9350,7 +8922,7 @@
           <a:bodyPr wrap="square" lIns="0" tIns="0" rIns="0" bIns="0" rtlCol="0" anchor="ctr"/>
           <a:lstStyle/>
           <a:p>
-            <a:pPr indent="0" marL="0">
+            <a:pPr marL="0" indent="0">
               <a:buNone/>
             </a:pPr>
             <a:r>
@@ -9414,7 +8986,7 @@
           <a:bodyPr wrap="square" lIns="0" tIns="0" rIns="0" bIns="0" rtlCol="0" anchor="ctr"/>
           <a:lstStyle/>
           <a:p>
-            <a:pPr algn="ctr" indent="0" marL="0">
+            <a:pPr marL="0" indent="0" algn="ctr">
               <a:buNone/>
             </a:pPr>
             <a:r>
@@ -9453,7 +9025,7 @@
           <a:bodyPr wrap="square" lIns="0" tIns="0" rIns="0" bIns="0" rtlCol="0" anchor="ctr"/>
           <a:lstStyle/>
           <a:p>
-            <a:pPr indent="0" marL="0">
+            <a:pPr marL="0" indent="0">
               <a:buNone/>
             </a:pPr>
             <a:r>
@@ -9517,7 +9089,7 @@
           <a:bodyPr wrap="square" lIns="0" tIns="0" rIns="0" bIns="0" rtlCol="0" anchor="ctr"/>
           <a:lstStyle/>
           <a:p>
-            <a:pPr algn="ctr" indent="0" marL="0">
+            <a:pPr marL="0" indent="0" algn="ctr">
               <a:buNone/>
             </a:pPr>
             <a:r>
@@ -9556,7 +9128,7 @@
           <a:bodyPr wrap="square" lIns="0" tIns="0" rIns="0" bIns="0" rtlCol="0" anchor="ctr"/>
           <a:lstStyle/>
           <a:p>
-            <a:pPr indent="0" marL="0">
+            <a:pPr marL="0" indent="0">
               <a:buNone/>
             </a:pPr>
             <a:r>
@@ -9570,9 +9142,6 @@
               </a:rPr>
               <a:t>Manager clicks </a:t>
             </a:r>
-            <a:pPr indent="0" marL="0">
-              <a:buNone/>
-            </a:pPr>
             <a:r>
               <a:rPr lang="en-US" sz="1200" b="1" dirty="0">
                 <a:solidFill>
@@ -9584,9 +9153,6 @@
               </a:rPr>
               <a:t>Approve</a:t>
             </a:r>
-            <a:pPr indent="0" marL="0">
-              <a:buNone/>
-            </a:pPr>
             <a:r>
               <a:rPr lang="en-US" sz="1200" dirty="0">
                 <a:solidFill>
@@ -9648,7 +9214,7 @@
           <a:bodyPr wrap="square" lIns="0" tIns="0" rIns="0" bIns="0" rtlCol="0" anchor="ctr"/>
           <a:lstStyle/>
           <a:p>
-            <a:pPr algn="ctr" indent="0" marL="0">
+            <a:pPr marL="0" indent="0" algn="ctr">
               <a:buNone/>
             </a:pPr>
             <a:r>
@@ -9687,7 +9253,7 @@
           <a:bodyPr wrap="square" lIns="0" tIns="0" rIns="0" bIns="0" rtlCol="0" anchor="ctr"/>
           <a:lstStyle/>
           <a:p>
-            <a:pPr indent="0" marL="0">
+            <a:pPr marL="0" indent="0">
               <a:buNone/>
             </a:pPr>
             <a:r>
@@ -9751,7 +9317,7 @@
           <a:bodyPr wrap="square" lIns="0" tIns="0" rIns="0" bIns="0" rtlCol="0" anchor="ctr"/>
           <a:lstStyle/>
           <a:p>
-            <a:pPr algn="ctr" indent="0" marL="0">
+            <a:pPr marL="0" indent="0" algn="ctr">
               <a:buNone/>
             </a:pPr>
             <a:r>
@@ -9790,7 +9356,7 @@
           <a:bodyPr wrap="square" lIns="0" tIns="0" rIns="0" bIns="0" rtlCol="0" anchor="ctr"/>
           <a:lstStyle/>
           <a:p>
-            <a:pPr indent="0" marL="0">
+            <a:pPr marL="0" indent="0">
               <a:buNone/>
             </a:pPr>
             <a:r>
@@ -9804,9 +9370,6 @@
               </a:rPr>
               <a:t>Check the </a:t>
             </a:r>
-            <a:pPr indent="0" marL="0">
-              <a:buNone/>
-            </a:pPr>
             <a:r>
               <a:rPr lang="en-US" sz="1200" b="1" dirty="0">
                 <a:solidFill>
@@ -9818,9 +9381,6 @@
               </a:rPr>
               <a:t>expenses</a:t>
             </a:r>
-            <a:pPr indent="0" marL="0">
-              <a:buNone/>
-            </a:pPr>
             <a:r>
               <a:rPr lang="en-US" sz="1200" dirty="0">
                 <a:solidFill>
@@ -9857,7 +9417,7 @@
           <a:bodyPr wrap="square" lIns="0" tIns="0" rIns="0" bIns="0" rtlCol="0" anchor="t"/>
           <a:lstStyle/>
           <a:p>
-            <a:pPr indent="0" marL="0">
+            <a:pPr marL="0" indent="0">
               <a:buNone/>
             </a:pPr>
             <a:r>
@@ -9923,7 +9483,7 @@
           <a:bodyPr wrap="square" lIns="0" tIns="0" rIns="0" bIns="0" rtlCol="0" anchor="t"/>
           <a:lstStyle/>
           <a:p>
-            <a:pPr indent="0" marL="0">
+            <a:pPr marL="0" indent="0">
               <a:buNone/>
             </a:pPr>
             <a:r>
@@ -9940,7 +9500,7 @@
             <a:endParaRPr lang="en-US" sz="1000" dirty="0"/>
           </a:p>
           <a:p>
-            <a:pPr indent="0" marL="0">
+            <a:pPr marL="0" indent="0">
               <a:buNone/>
             </a:pPr>
             <a:r>
@@ -9957,7 +9517,7 @@
             <a:endParaRPr lang="en-US" sz="1000" dirty="0"/>
           </a:p>
           <a:p>
-            <a:pPr indent="0" marL="0">
+            <a:pPr marL="0" indent="0">
               <a:buNone/>
             </a:pPr>
             <a:r>
@@ -9974,7 +9534,7 @@
             <a:endParaRPr lang="en-US" sz="1000" dirty="0"/>
           </a:p>
           <a:p>
-            <a:pPr indent="0" marL="0">
+            <a:pPr marL="0" indent="0">
               <a:buNone/>
             </a:pPr>
             <a:r>
@@ -9991,7 +9551,7 @@
             <a:endParaRPr lang="en-US" sz="1000" dirty="0"/>
           </a:p>
           <a:p>
-            <a:pPr indent="0" marL="0">
+            <a:pPr marL="0" indent="0">
               <a:buNone/>
             </a:pPr>
             <a:r>
@@ -10008,7 +9568,7 @@
             <a:endParaRPr lang="en-US" sz="1000" dirty="0"/>
           </a:p>
           <a:p>
-            <a:pPr indent="0" marL="0">
+            <a:pPr marL="0" indent="0">
               <a:buNone/>
             </a:pPr>
             <a:r>
@@ -10025,7 +9585,7 @@
             <a:endParaRPr lang="en-US" sz="1000" dirty="0"/>
           </a:p>
           <a:p>
-            <a:pPr indent="0" marL="0">
+            <a:pPr marL="0" indent="0">
               <a:buNone/>
             </a:pPr>
             <a:r>
@@ -10042,7 +9602,7 @@
             <a:endParaRPr lang="en-US" sz="1000" dirty="0"/>
           </a:p>
           <a:p>
-            <a:pPr indent="0" marL="0">
+            <a:pPr marL="0" indent="0">
               <a:buNone/>
             </a:pPr>
             <a:r>
@@ -10059,7 +9619,7 @@
             <a:endParaRPr lang="en-US" sz="1000" dirty="0"/>
           </a:p>
           <a:p>
-            <a:pPr indent="0" marL="0">
+            <a:pPr marL="0" indent="0">
               <a:buNone/>
             </a:pPr>
             <a:r>
@@ -10106,14 +9666,14 @@
       </p:sp>
       <p:pic>
         <p:nvPicPr>
-          <p:cNvPr id="25" name="Image 0" descr="preencoded.png">    </p:cNvPr>
+          <p:cNvPr id="25" name="Image 0" descr="preencoded.png"/>
           <p:cNvPicPr>
             <a:picLocks noChangeAspect="1"/>
           </p:cNvPicPr>
           <p:nvPr/>
         </p:nvPicPr>
         <p:blipFill>
-          <a:blip r:embed="rId1"/>
+          <a:blip r:embed="rId3"/>
           <a:stretch>
             <a:fillRect/>
           </a:stretch>
@@ -10149,7 +9709,7 @@
           <a:bodyPr wrap="square" lIns="0" tIns="0" rIns="0" bIns="0" rtlCol="0" anchor="ctr"/>
           <a:lstStyle/>
           <a:p>
-            <a:pPr indent="0" marL="0">
+            <a:pPr marL="0" indent="0">
               <a:buNone/>
             </a:pPr>
             <a:r>
@@ -10163,9 +9723,6 @@
               </a:rPr>
               <a:t>While it waits, the run shows as </a:t>
             </a:r>
-            <a:pPr indent="0" marL="0">
-              <a:buNone/>
-            </a:pPr>
             <a:r>
               <a:rPr lang="en-US" sz="1200" b="1" dirty="0">
                 <a:solidFill>
@@ -10177,9 +9734,6 @@
               </a:rPr>
               <a:t>Waiting</a:t>
             </a:r>
-            <a:pPr indent="0" marL="0">
-              <a:buNone/>
-            </a:pPr>
             <a:r>
               <a:rPr lang="en-US" sz="1200" dirty="0">
                 <a:solidFill>
@@ -10211,6 +9765,7 @@
         <a:solidFill>
           <a:srgbClr val="FFFFFF"/>
         </a:solidFill>
+        <a:effectLst/>
       </p:bgPr>
     </p:bg>
     <p:spTree>
@@ -10248,7 +9803,7 @@
           <a:bodyPr wrap="square" lIns="0" tIns="0" rIns="0" bIns="0" rtlCol="0" anchor="t"/>
           <a:lstStyle/>
           <a:p>
-            <a:pPr algn="r" indent="0" marL="0">
+            <a:pPr marL="0" indent="0" algn="r">
               <a:buNone/>
             </a:pPr>
             <a:r>
@@ -10314,7 +9869,7 @@
           <a:bodyPr wrap="square" lIns="0" tIns="0" rIns="0" bIns="0" rtlCol="0" anchor="ctr"/>
           <a:lstStyle/>
           <a:p>
-            <a:pPr algn="ctr" indent="0" marL="0">
+            <a:pPr marL="0" indent="0" algn="ctr">
               <a:buNone/>
             </a:pPr>
             <a:r>
@@ -10353,7 +9908,7 @@
           <a:bodyPr wrap="square" lIns="0" tIns="0" rIns="0" bIns="0" rtlCol="0" anchor="ctr"/>
           <a:lstStyle/>
           <a:p>
-            <a:pPr indent="0" marL="0">
+            <a:pPr marL="0" indent="0">
               <a:buNone/>
             </a:pPr>
             <a:r>
@@ -10367,9 +9922,6 @@
               </a:rPr>
               <a:t>Daily Sales Report</a:t>
             </a:r>
-            <a:pPr indent="0" marL="0">
-              <a:buNone/>
-            </a:pPr>
             <a:r>
               <a:rPr lang="en-US" sz="2400" dirty="0">
                 <a:solidFill>
@@ -10441,14 +9993,14 @@
       </p:sp>
       <p:pic>
         <p:nvPicPr>
-          <p:cNvPr id="8" name="Image 0" descr="preencoded.png">    </p:cNvPr>
+          <p:cNvPr id="8" name="Image 0" descr="preencoded.png"/>
           <p:cNvPicPr>
             <a:picLocks noChangeAspect="1"/>
           </p:cNvPicPr>
           <p:nvPr/>
         </p:nvPicPr>
         <p:blipFill>
-          <a:blip r:embed="rId1"/>
+          <a:blip r:embed="rId3"/>
           <a:stretch>
             <a:fillRect/>
           </a:stretch>
@@ -10484,7 +10036,7 @@
           <a:bodyPr wrap="square" lIns="0" tIns="0" rIns="0" bIns="0" rtlCol="0" anchor="t"/>
           <a:lstStyle/>
           <a:p>
-            <a:pPr algn="ctr" indent="0" marL="0">
+            <a:pPr marL="0" indent="0" algn="ctr">
               <a:buNone/>
             </a:pPr>
             <a:r>
@@ -10501,7 +10053,7 @@
             <a:endParaRPr lang="en-US" sz="1050" dirty="0"/>
           </a:p>
           <a:p>
-            <a:pPr algn="ctr" indent="0" marL="0">
+            <a:pPr marL="0" indent="0" algn="ctr">
               <a:buNone/>
             </a:pPr>
             <a:r>
@@ -10572,14 +10124,14 @@
       </p:sp>
       <p:pic>
         <p:nvPicPr>
-          <p:cNvPr id="12" name="Image 1" descr="preencoded.png">    </p:cNvPr>
+          <p:cNvPr id="12" name="Image 1" descr="preencoded.png"/>
           <p:cNvPicPr>
             <a:picLocks noChangeAspect="1"/>
           </p:cNvPicPr>
           <p:nvPr/>
         </p:nvPicPr>
         <p:blipFill>
-          <a:blip r:embed="rId2"/>
+          <a:blip r:embed="rId4"/>
           <a:stretch>
             <a:fillRect/>
           </a:stretch>
@@ -10615,7 +10167,7 @@
           <a:bodyPr wrap="square" lIns="0" tIns="0" rIns="0" bIns="0" rtlCol="0" anchor="t"/>
           <a:lstStyle/>
           <a:p>
-            <a:pPr algn="ctr" indent="0" marL="0">
+            <a:pPr marL="0" indent="0" algn="ctr">
               <a:buNone/>
             </a:pPr>
             <a:r>
@@ -10632,7 +10184,7 @@
             <a:endParaRPr lang="en-US" sz="1050" dirty="0"/>
           </a:p>
           <a:p>
-            <a:pPr algn="ctr" indent="0" marL="0">
+            <a:pPr marL="0" indent="0" algn="ctr">
               <a:buNone/>
             </a:pPr>
             <a:r>
@@ -10703,14 +10255,14 @@
       </p:sp>
       <p:pic>
         <p:nvPicPr>
-          <p:cNvPr id="16" name="Image 2" descr="preencoded.png">    </p:cNvPr>
+          <p:cNvPr id="16" name="Image 2" descr="preencoded.png"/>
           <p:cNvPicPr>
             <a:picLocks noChangeAspect="1"/>
           </p:cNvPicPr>
           <p:nvPr/>
         </p:nvPicPr>
         <p:blipFill>
-          <a:blip r:embed="rId3"/>
+          <a:blip r:embed="rId5"/>
           <a:stretch>
             <a:fillRect/>
           </a:stretch>
@@ -10746,7 +10298,7 @@
           <a:bodyPr wrap="square" lIns="0" tIns="0" rIns="0" bIns="0" rtlCol="0" anchor="t"/>
           <a:lstStyle/>
           <a:p>
-            <a:pPr algn="ctr" indent="0" marL="0">
+            <a:pPr marL="0" indent="0" algn="ctr">
               <a:buNone/>
             </a:pPr>
             <a:r>
@@ -10763,7 +10315,7 @@
             <a:endParaRPr lang="en-US" sz="1050" dirty="0"/>
           </a:p>
           <a:p>
-            <a:pPr algn="ctr" indent="0" marL="0">
+            <a:pPr marL="0" indent="0" algn="ctr">
               <a:buNone/>
             </a:pPr>
             <a:r>
@@ -10834,14 +10386,14 @@
       </p:sp>
       <p:pic>
         <p:nvPicPr>
-          <p:cNvPr id="20" name="Image 3" descr="preencoded.png">    </p:cNvPr>
+          <p:cNvPr id="20" name="Image 3" descr="preencoded.png"/>
           <p:cNvPicPr>
             <a:picLocks noChangeAspect="1"/>
           </p:cNvPicPr>
           <p:nvPr/>
         </p:nvPicPr>
         <p:blipFill>
-          <a:blip r:embed="rId4"/>
+          <a:blip r:embed="rId6"/>
           <a:stretch>
             <a:fillRect/>
           </a:stretch>
@@ -10877,7 +10429,7 @@
           <a:bodyPr wrap="square" lIns="0" tIns="0" rIns="0" bIns="0" rtlCol="0" anchor="t"/>
           <a:lstStyle/>
           <a:p>
-            <a:pPr algn="ctr" indent="0" marL="0">
+            <a:pPr marL="0" indent="0" algn="ctr">
               <a:buNone/>
             </a:pPr>
             <a:r>
@@ -10894,7 +10446,7 @@
             <a:endParaRPr lang="en-US" sz="1050" dirty="0"/>
           </a:p>
           <a:p>
-            <a:pPr algn="ctr" indent="0" marL="0">
+            <a:pPr marL="0" indent="0" algn="ctr">
               <a:buNone/>
             </a:pPr>
             <a:r>
@@ -10965,14 +10517,14 @@
       </p:sp>
       <p:pic>
         <p:nvPicPr>
-          <p:cNvPr id="24" name="Image 4" descr="preencoded.png">    </p:cNvPr>
+          <p:cNvPr id="24" name="Image 4" descr="preencoded.png"/>
           <p:cNvPicPr>
             <a:picLocks noChangeAspect="1"/>
           </p:cNvPicPr>
           <p:nvPr/>
         </p:nvPicPr>
         <p:blipFill>
-          <a:blip r:embed="rId5"/>
+          <a:blip r:embed="rId6"/>
           <a:stretch>
             <a:fillRect/>
           </a:stretch>
@@ -11008,7 +10560,7 @@
           <a:bodyPr wrap="square" lIns="0" tIns="0" rIns="0" bIns="0" rtlCol="0" anchor="t"/>
           <a:lstStyle/>
           <a:p>
-            <a:pPr algn="ctr" indent="0" marL="0">
+            <a:pPr marL="0" indent="0" algn="ctr">
               <a:buNone/>
             </a:pPr>
             <a:r>
@@ -11025,7 +10577,7 @@
             <a:endParaRPr lang="en-US" sz="1050" dirty="0"/>
           </a:p>
           <a:p>
-            <a:pPr algn="ctr" indent="0" marL="0">
+            <a:pPr marL="0" indent="0" algn="ctr">
               <a:buNone/>
             </a:pPr>
             <a:r>
@@ -11096,14 +10648,14 @@
       </p:sp>
       <p:pic>
         <p:nvPicPr>
-          <p:cNvPr id="28" name="Image 5" descr="preencoded.png">    </p:cNvPr>
+          <p:cNvPr id="28" name="Image 5" descr="preencoded.png"/>
           <p:cNvPicPr>
             <a:picLocks noChangeAspect="1"/>
           </p:cNvPicPr>
           <p:nvPr/>
         </p:nvPicPr>
         <p:blipFill>
-          <a:blip r:embed="rId6"/>
+          <a:blip r:embed="rId7"/>
           <a:stretch>
             <a:fillRect/>
           </a:stretch>
@@ -11139,7 +10691,7 @@
           <a:bodyPr wrap="square" lIns="0" tIns="0" rIns="0" bIns="0" rtlCol="0" anchor="t"/>
           <a:lstStyle/>
           <a:p>
-            <a:pPr algn="ctr" indent="0" marL="0">
+            <a:pPr marL="0" indent="0" algn="ctr">
               <a:buNone/>
             </a:pPr>
             <a:r>
@@ -11156,7 +10708,7 @@
             <a:endParaRPr lang="en-US" sz="1050" dirty="0"/>
           </a:p>
           <a:p>
-            <a:pPr algn="ctr" indent="0" marL="0">
+            <a:pPr marL="0" indent="0" algn="ctr">
               <a:buNone/>
             </a:pPr>
             <a:r>
@@ -11195,11 +10747,11 @@
           <a:bodyPr wrap="square" lIns="0" tIns="0" rIns="0" bIns="0" rtlCol="0" anchor="t"/>
           <a:lstStyle/>
           <a:p>
-            <a:pPr indent="0" marL="0">
-              <a:buNone/>
-            </a:pPr>
-            <a:r>
-              <a:rPr lang="en-US" sz="1000" b="1" spc="300" kern="0" dirty="0">
+            <a:pPr marL="0" indent="0">
+              <a:buNone/>
+            </a:pPr>
+            <a:r>
+              <a:rPr lang="en-US" sz="1000" b="1" kern="0" spc="300" dirty="0">
                 <a:solidFill>
                   <a:srgbClr val="EA4B71"/>
                 </a:solidFill>
@@ -11234,7 +10786,7 @@
           <a:bodyPr wrap="square" lIns="0" tIns="0" rIns="0" bIns="0" rtlCol="0" anchor="t"/>
           <a:lstStyle/>
           <a:p>
-            <a:pPr indent="0" marL="0">
+            <a:pPr marL="0" indent="0">
               <a:buNone/>
             </a:pPr>
             <a:r>
@@ -11273,11 +10825,11 @@
           <a:bodyPr wrap="square" lIns="0" tIns="0" rIns="0" bIns="0" rtlCol="0" anchor="t"/>
           <a:lstStyle/>
           <a:p>
-            <a:pPr indent="0" marL="0">
-              <a:buNone/>
-            </a:pPr>
-            <a:r>
-              <a:rPr lang="en-US" sz="1000" b="1" spc="300" kern="0" dirty="0">
+            <a:pPr marL="0" indent="0">
+              <a:buNone/>
+            </a:pPr>
+            <a:r>
+              <a:rPr lang="en-US" sz="1000" b="1" kern="0" spc="300" dirty="0">
                 <a:solidFill>
                   <a:srgbClr val="1A7F8E"/>
                 </a:solidFill>
@@ -11351,12 +10903,6 @@
               </a:rPr>
               <a:t>SQL with </a:t>
             </a:r>
-            <a:pPr indent="0" marL="0">
-              <a:spcAft>
-                <a:spcPts val="400"/>
-              </a:spcAft>
-              <a:buNone/>
-            </a:pPr>
             <a:r>
               <a:rPr lang="en-US" sz="1250" b="1" dirty="0">
                 <a:solidFill>
@@ -11430,6 +10976,7 @@
         <a:solidFill>
           <a:srgbClr val="FFFFFF"/>
         </a:solidFill>
+        <a:effectLst/>
       </p:bgPr>
     </p:bg>
     <p:spTree>
@@ -11467,7 +11014,7 @@
           <a:bodyPr wrap="square" lIns="0" tIns="0" rIns="0" bIns="0" rtlCol="0" anchor="t"/>
           <a:lstStyle/>
           <a:p>
-            <a:pPr algn="r" indent="0" marL="0">
+            <a:pPr marL="0" indent="0" algn="r">
               <a:buNone/>
             </a:pPr>
             <a:r>
@@ -11533,7 +11080,7 @@
           <a:bodyPr wrap="square" lIns="0" tIns="0" rIns="0" bIns="0" rtlCol="0" anchor="ctr"/>
           <a:lstStyle/>
           <a:p>
-            <a:pPr algn="ctr" indent="0" marL="0">
+            <a:pPr marL="0" indent="0" algn="ctr">
               <a:buNone/>
             </a:pPr>
             <a:r>
@@ -11572,7 +11119,7 @@
           <a:bodyPr wrap="square" lIns="0" tIns="0" rIns="0" bIns="0" rtlCol="0" anchor="ctr"/>
           <a:lstStyle/>
           <a:p>
-            <a:pPr indent="0" marL="0">
+            <a:pPr marL="0" indent="0">
               <a:buNone/>
             </a:pPr>
             <a:r>
@@ -11586,9 +11133,6 @@
               </a:rPr>
               <a:t>Daily Sales Report</a:t>
             </a:r>
-            <a:pPr indent="0" marL="0">
-              <a:buNone/>
-            </a:pPr>
             <a:r>
               <a:rPr lang="en-US" sz="2400" dirty="0">
                 <a:solidFill>
@@ -11620,15 +11164,27 @@
         </p:nvGraphicFramePr>
         <p:xfrm>
           <a:off x="457200" y="1005840"/>
-          <a:ext cx="8229600" cy="914400"/>
+          <a:ext cx="8229600" cy="2387600"/>
         </p:xfrm>
         <a:graphic>
           <a:graphicData uri="http://schemas.openxmlformats.org/drawingml/2006/table">
             <a:tbl>
               <a:tblPr/>
               <a:tblGrid>
-                <a:gridCol w="1920240"/>
-                <a:gridCol w="6309360"/>
+                <a:gridCol w="1920240">
+                  <a:extLst>
+                    <a:ext uri="{9D8B030D-6E8A-4147-A177-3AD203B41FA5}">
+                      <a16:colId xmlns:a16="http://schemas.microsoft.com/office/drawing/2014/main" val="20000"/>
+                    </a:ext>
+                  </a:extLst>
+                </a:gridCol>
+                <a:gridCol w="6309360">
+                  <a:extLst>
+                    <a:ext uri="{9D8B030D-6E8A-4147-A177-3AD203B41FA5}">
+                      <a16:colId xmlns:a16="http://schemas.microsoft.com/office/drawing/2014/main" val="20001"/>
+                    </a:ext>
+                  </a:extLst>
+                </a:gridCol>
               </a:tblGrid>
               <a:tr h="0">
                 <a:tc>
@@ -11636,7 +11192,7 @@
                     <a:bodyPr/>
                     <a:lstStyle/>
                     <a:p>
-                      <a:pPr indent="0" marL="0">
+                      <a:pPr marL="0" indent="0">
                         <a:buNone/>
                       </a:pPr>
                       <a:r>
@@ -11704,7 +11260,7 @@
                     <a:bodyPr/>
                     <a:lstStyle/>
                     <a:p>
-                      <a:pPr indent="0" marL="0">
+                      <a:pPr marL="0" indent="0">
                         <a:buNone/>
                       </a:pPr>
                       <a:r>
@@ -11767,6 +11323,11 @@
                     </a:solidFill>
                   </a:tcPr>
                 </a:tc>
+                <a:extLst>
+                  <a:ext uri="{0D108BD9-81ED-4DB2-BD59-A6C34878D82A}">
+                    <a16:rowId xmlns:a16="http://schemas.microsoft.com/office/drawing/2014/main" val="10000"/>
+                  </a:ext>
+                </a:extLst>
               </a:tr>
               <a:tr h="0">
                 <a:tc>
@@ -11774,7 +11335,7 @@
                     <a:bodyPr/>
                     <a:lstStyle/>
                     <a:p>
-                      <a:pPr indent="0" marL="0">
+                      <a:pPr marL="0" indent="0">
                         <a:buNone/>
                       </a:pPr>
                       <a:r>
@@ -11842,7 +11403,7 @@
                     <a:bodyPr/>
                     <a:lstStyle/>
                     <a:p>
-                      <a:pPr indent="0" marL="0">
+                      <a:pPr marL="0" indent="0">
                         <a:buNone/>
                       </a:pPr>
                       <a:r>
@@ -11856,9 +11417,6 @@
                         </a:rPr>
                         <a:t>Every day at 9:00 (uses the container's </a:t>
                       </a:r>
-                      <a:pPr indent="0" marL="0">
-                        <a:buNone/>
-                      </a:pPr>
                       <a:r>
                         <a:rPr lang="en-US" sz="1100" b="1" dirty="0">
                           <a:solidFill>
@@ -11870,9 +11428,6 @@
                         </a:rPr>
                         <a:t>GENERIC_TIMEZONE</a:t>
                       </a:r>
-                      <a:pPr indent="0" marL="0">
-                        <a:buNone/>
-                      </a:pPr>
                       <a:r>
                         <a:rPr lang="en-US" sz="1100" dirty="0">
                           <a:solidFill>
@@ -11933,6 +11488,11 @@
                     </a:solidFill>
                   </a:tcPr>
                 </a:tc>
+                <a:extLst>
+                  <a:ext uri="{0D108BD9-81ED-4DB2-BD59-A6C34878D82A}">
+                    <a16:rowId xmlns:a16="http://schemas.microsoft.com/office/drawing/2014/main" val="10001"/>
+                  </a:ext>
+                </a:extLst>
               </a:tr>
               <a:tr h="0">
                 <a:tc>
@@ -11940,7 +11500,7 @@
                     <a:bodyPr/>
                     <a:lstStyle/>
                     <a:p>
-                      <a:pPr indent="0" marL="0">
+                      <a:pPr marL="0" indent="0">
                         <a:buNone/>
                       </a:pPr>
                       <a:r>
@@ -12008,7 +11568,7 @@
                     <a:bodyPr/>
                     <a:lstStyle/>
                     <a:p>
-                      <a:pPr indent="0" marL="0">
+                      <a:pPr marL="0" indent="0">
                         <a:buNone/>
                       </a:pPr>
                       <a:r>
@@ -12022,9 +11582,6 @@
                         </a:rPr>
                         <a:t>Execute a SQL query</a:t>
                       </a:r>
-                      <a:pPr indent="0" marL="0">
-                        <a:buNone/>
-                      </a:pPr>
                       <a:r>
                         <a:rPr lang="en-US" sz="1100" dirty="0">
                           <a:solidFill>
@@ -12036,9 +11593,6 @@
                         </a:rPr>
                         <a:t>: </a:t>
                       </a:r>
-                      <a:pPr indent="0" marL="0">
-                        <a:buNone/>
-                      </a:pPr>
                       <a:r>
                         <a:rPr lang="en-US" sz="1100" b="1" dirty="0">
                           <a:solidFill>
@@ -12099,6 +11653,11 @@
                     </a:solidFill>
                   </a:tcPr>
                 </a:tc>
+                <a:extLst>
+                  <a:ext uri="{0D108BD9-81ED-4DB2-BD59-A6C34878D82A}">
+                    <a16:rowId xmlns:a16="http://schemas.microsoft.com/office/drawing/2014/main" val="10002"/>
+                  </a:ext>
+                </a:extLst>
               </a:tr>
               <a:tr h="0">
                 <a:tc>
@@ -12106,7 +11665,7 @@
                     <a:bodyPr/>
                     <a:lstStyle/>
                     <a:p>
-                      <a:pPr indent="0" marL="0">
+                      <a:pPr marL="0" indent="0">
                         <a:buNone/>
                       </a:pPr>
                       <a:r>
@@ -12174,7 +11733,7 @@
                     <a:bodyPr/>
                     <a:lstStyle/>
                     <a:p>
-                      <a:pPr indent="0" marL="0">
+                      <a:pPr marL="0" indent="0">
                         <a:buNone/>
                       </a:pPr>
                       <a:r>
@@ -12188,9 +11747,6 @@
                         </a:rPr>
                         <a:t>All Item Data (Into a Single List)</a:t>
                       </a:r>
-                      <a:pPr indent="0" marL="0">
-                        <a:buNone/>
-                      </a:pPr>
                       <a:r>
                         <a:rPr lang="en-US" sz="1100" dirty="0">
                           <a:solidFill>
@@ -12202,9 +11758,6 @@
                         </a:rPr>
                         <a:t>, output field </a:t>
                       </a:r>
-                      <a:pPr indent="0" marL="0">
-                        <a:buNone/>
-                      </a:pPr>
                       <a:r>
                         <a:rPr lang="en-US" sz="1100" b="1" dirty="0">
                           <a:solidFill>
@@ -12216,9 +11769,6 @@
                         </a:rPr>
                         <a:t>rows</a:t>
                       </a:r>
-                      <a:pPr indent="0" marL="0">
-                        <a:buNone/>
-                      </a:pPr>
                       <a:r>
                         <a:rPr lang="en-US" sz="1100" dirty="0">
                           <a:solidFill>
@@ -12279,6 +11829,11 @@
                     </a:solidFill>
                   </a:tcPr>
                 </a:tc>
+                <a:extLst>
+                  <a:ext uri="{0D108BD9-81ED-4DB2-BD59-A6C34878D82A}">
+                    <a16:rowId xmlns:a16="http://schemas.microsoft.com/office/drawing/2014/main" val="10003"/>
+                  </a:ext>
+                </a:extLst>
               </a:tr>
               <a:tr h="0">
                 <a:tc>
@@ -12286,7 +11841,7 @@
                     <a:bodyPr/>
                     <a:lstStyle/>
                     <a:p>
-                      <a:pPr indent="0" marL="0">
+                      <a:pPr marL="0" indent="0">
                         <a:buNone/>
                       </a:pPr>
                       <a:r>
@@ -12354,7 +11909,7 @@
                     <a:bodyPr/>
                     <a:lstStyle/>
                     <a:p>
-                      <a:pPr indent="0" marL="0">
+                      <a:pPr marL="0" indent="0">
                         <a:buNone/>
                       </a:pPr>
                       <a:r>
@@ -12368,9 +11923,6 @@
                         </a:rPr>
                         <a:t>Rename the node </a:t>
                       </a:r>
-                      <a:pPr indent="0" marL="0">
-                        <a:buNone/>
-                      </a:pPr>
                       <a:r>
                         <a:rPr lang="en-US" sz="1100" b="1" dirty="0">
                           <a:solidFill>
@@ -12382,9 +11934,6 @@
                         </a:rPr>
                         <a:t>Create</a:t>
                       </a:r>
-                      <a:pPr indent="0" marL="0">
-                        <a:buNone/>
-                      </a:pPr>
                       <a:r>
                         <a:rPr lang="en-US" sz="1100" dirty="0">
                           <a:solidFill>
@@ -12396,9 +11945,6 @@
                         </a:rPr>
                         <a:t>. Title </a:t>
                       </a:r>
-                      <a:pPr indent="0" marL="0">
-                        <a:buNone/>
-                      </a:pPr>
                       <a:r>
                         <a:rPr lang="en-US" sz="1100" b="1" dirty="0">
                           <a:solidFill>
@@ -12410,9 +11956,6 @@
                         </a:rPr>
                         <a:t>Sales report {{ $today.minus({days: 1}).toFormat('dd MMM yyyy') }}</a:t>
                       </a:r>
-                      <a:pPr indent="0" marL="0">
-                        <a:buNone/>
-                      </a:pPr>
                       <a:r>
                         <a:rPr lang="en-US" sz="1100" dirty="0">
                           <a:solidFill>
@@ -12473,6 +12016,11 @@
                     </a:solidFill>
                   </a:tcPr>
                 </a:tc>
+                <a:extLst>
+                  <a:ext uri="{0D108BD9-81ED-4DB2-BD59-A6C34878D82A}">
+                    <a16:rowId xmlns:a16="http://schemas.microsoft.com/office/drawing/2014/main" val="10004"/>
+                  </a:ext>
+                </a:extLst>
               </a:tr>
               <a:tr h="0">
                 <a:tc>
@@ -12480,7 +12028,7 @@
                     <a:bodyPr/>
                     <a:lstStyle/>
                     <a:p>
-                      <a:pPr indent="0" marL="0">
+                      <a:pPr marL="0" indent="0">
                         <a:buNone/>
                       </a:pPr>
                       <a:r>
@@ -12548,7 +12096,7 @@
                     <a:bodyPr/>
                     <a:lstStyle/>
                     <a:p>
-                      <a:pPr indent="0" marL="0">
+                      <a:pPr marL="0" indent="0">
                         <a:buNone/>
                       </a:pPr>
                       <a:r>
@@ -12562,9 +12110,6 @@
                         </a:rPr>
                         <a:t>Document ID </a:t>
                       </a:r>
-                      <a:pPr indent="0" marL="0">
-                        <a:buNone/>
-                      </a:pPr>
                       <a:r>
                         <a:rPr lang="en-US" sz="1100" b="1" dirty="0">
                           <a:solidFill>
@@ -12576,9 +12121,6 @@
                         </a:rPr>
                         <a:t>{{ $json.id }}</a:t>
                       </a:r>
-                      <a:pPr indent="0" marL="0">
-                        <a:buNone/>
-                      </a:pPr>
                       <a:r>
                         <a:rPr lang="en-US" sz="1100" dirty="0">
                           <a:solidFill>
@@ -12590,9 +12132,6 @@
                         </a:rPr>
                         <a:t>, action </a:t>
                       </a:r>
-                      <a:pPr indent="0" marL="0">
-                        <a:buNone/>
-                      </a:pPr>
                       <a:r>
                         <a:rPr lang="en-US" sz="1100" b="1" dirty="0">
                           <a:solidFill>
@@ -12604,9 +12143,6 @@
                         </a:rPr>
                         <a:t>Insert</a:t>
                       </a:r>
-                      <a:pPr indent="0" marL="0">
-                        <a:buNone/>
-                      </a:pPr>
                       <a:r>
                         <a:rPr lang="en-US" sz="1100" dirty="0">
                           <a:solidFill>
@@ -12667,6 +12203,11 @@
                     </a:solidFill>
                   </a:tcPr>
                 </a:tc>
+                <a:extLst>
+                  <a:ext uri="{0D108BD9-81ED-4DB2-BD59-A6C34878D82A}">
+                    <a16:rowId xmlns:a16="http://schemas.microsoft.com/office/drawing/2014/main" val="10005"/>
+                  </a:ext>
+                </a:extLst>
               </a:tr>
               <a:tr h="0">
                 <a:tc>
@@ -12674,7 +12215,7 @@
                     <a:bodyPr/>
                     <a:lstStyle/>
                     <a:p>
-                      <a:pPr indent="0" marL="0">
+                      <a:pPr marL="0" indent="0">
                         <a:buNone/>
                       </a:pPr>
                       <a:r>
@@ -12742,7 +12283,7 @@
                     <a:bodyPr/>
                     <a:lstStyle/>
                     <a:p>
-                      <a:pPr indent="0" marL="0">
+                      <a:pPr marL="0" indent="0">
                         <a:buNone/>
                       </a:pPr>
                       <a:r>
@@ -12756,9 +12297,6 @@
                         </a:rPr>
                         <a:t>To the manager: </a:t>
                       </a:r>
-                      <a:pPr indent="0" marL="0">
-                        <a:buNone/>
-                      </a:pPr>
                       <a:r>
                         <a:rPr lang="en-US" sz="1100" b="1" dirty="0">
                           <a:solidFill>
@@ -12819,6 +12357,11 @@
                     </a:solidFill>
                   </a:tcPr>
                 </a:tc>
+                <a:extLst>
+                  <a:ext uri="{0D108BD9-81ED-4DB2-BD59-A6C34878D82A}">
+                    <a16:rowId xmlns:a16="http://schemas.microsoft.com/office/drawing/2014/main" val="10006"/>
+                  </a:ext>
+                </a:extLst>
               </a:tr>
             </a:tbl>
           </a:graphicData>
@@ -12872,7 +12415,7 @@
           <a:bodyPr wrap="square" lIns="0" tIns="0" rIns="0" bIns="0" rtlCol="0" anchor="ctr"/>
           <a:lstStyle/>
           <a:p>
-            <a:pPr indent="0" marL="0">
+            <a:pPr marL="0" indent="0">
               <a:buNone/>
             </a:pPr>
             <a:r>
@@ -12886,9 +12429,6 @@
               </a:rPr>
               <a:t>Tip  </a:t>
             </a:r>
-            <a:pPr indent="0" marL="0">
-              <a:buNone/>
-            </a:pPr>
             <a:r>
               <a:rPr lang="en-US" sz="1200" dirty="0">
                 <a:solidFill>
@@ -12900,9 +12440,6 @@
               </a:rPr>
               <a:t>Click </a:t>
             </a:r>
-            <a:pPr indent="0" marL="0">
-              <a:buNone/>
-            </a:pPr>
             <a:r>
               <a:rPr lang="en-US" sz="1200" b="1" dirty="0">
                 <a:solidFill>
@@ -12914,9 +12451,6 @@
               </a:rPr>
               <a:t>Execute workflow</a:t>
             </a:r>
-            <a:pPr indent="0" marL="0">
-              <a:buNone/>
-            </a:pPr>
             <a:r>
               <a:rPr lang="en-US" sz="1200" dirty="0">
                 <a:solidFill>
@@ -12948,6 +12482,7 @@
         <a:solidFill>
           <a:srgbClr val="FFFFFF"/>
         </a:solidFill>
+        <a:effectLst/>
       </p:bgPr>
     </p:bg>
     <p:spTree>
@@ -12985,7 +12520,7 @@
           <a:bodyPr wrap="square" lIns="0" tIns="0" rIns="0" bIns="0" rtlCol="0" anchor="t"/>
           <a:lstStyle/>
           <a:p>
-            <a:pPr algn="r" indent="0" marL="0">
+            <a:pPr marL="0" indent="0" algn="r">
               <a:buNone/>
             </a:pPr>
             <a:r>
@@ -13051,7 +12586,7 @@
           <a:bodyPr wrap="square" lIns="0" tIns="0" rIns="0" bIns="0" rtlCol="0" anchor="ctr"/>
           <a:lstStyle/>
           <a:p>
-            <a:pPr algn="ctr" indent="0" marL="0">
+            <a:pPr marL="0" indent="0" algn="ctr">
               <a:buNone/>
             </a:pPr>
             <a:r>
@@ -13090,7 +12625,7 @@
           <a:bodyPr wrap="square" lIns="0" tIns="0" rIns="0" bIns="0" rtlCol="0" anchor="ctr"/>
           <a:lstStyle/>
           <a:p>
-            <a:pPr indent="0" marL="0">
+            <a:pPr marL="0" indent="0">
               <a:buNone/>
             </a:pPr>
             <a:r>
@@ -13104,9 +12639,6 @@
               </a:rPr>
               <a:t>Daily Sales Report</a:t>
             </a:r>
-            <a:pPr indent="0" marL="0">
-              <a:buNone/>
-            </a:pPr>
             <a:r>
               <a:rPr lang="en-US" sz="2400" dirty="0">
                 <a:solidFill>
@@ -13168,7 +12700,7 @@
           <a:bodyPr wrap="square" lIns="0" tIns="0" rIns="0" bIns="0" rtlCol="0" anchor="ctr"/>
           <a:lstStyle/>
           <a:p>
-            <a:pPr algn="ctr" indent="0" marL="0">
+            <a:pPr marL="0" indent="0" algn="ctr">
               <a:buNone/>
             </a:pPr>
             <a:r>
@@ -13207,7 +12739,7 @@
           <a:bodyPr wrap="square" lIns="0" tIns="0" rIns="0" bIns="0" rtlCol="0" anchor="ctr"/>
           <a:lstStyle/>
           <a:p>
-            <a:pPr indent="0" marL="0">
+            <a:pPr marL="0" indent="0">
               <a:buNone/>
             </a:pPr>
             <a:r>
@@ -13271,7 +12803,7 @@
           <a:bodyPr wrap="square" lIns="0" tIns="0" rIns="0" bIns="0" rtlCol="0" anchor="ctr"/>
           <a:lstStyle/>
           <a:p>
-            <a:pPr algn="ctr" indent="0" marL="0">
+            <a:pPr marL="0" indent="0" algn="ctr">
               <a:buNone/>
             </a:pPr>
             <a:r>
@@ -13310,7 +12842,7 @@
           <a:bodyPr wrap="square" lIns="0" tIns="0" rIns="0" bIns="0" rtlCol="0" anchor="ctr"/>
           <a:lstStyle/>
           <a:p>
-            <a:pPr indent="0" marL="0">
+            <a:pPr marL="0" indent="0">
               <a:buNone/>
             </a:pPr>
             <a:r>
@@ -13374,7 +12906,7 @@
           <a:bodyPr wrap="square" lIns="0" tIns="0" rIns="0" bIns="0" rtlCol="0" anchor="ctr"/>
           <a:lstStyle/>
           <a:p>
-            <a:pPr algn="ctr" indent="0" marL="0">
+            <a:pPr marL="0" indent="0" algn="ctr">
               <a:buNone/>
             </a:pPr>
             <a:r>
@@ -13413,7 +12945,7 @@
           <a:bodyPr wrap="square" lIns="0" tIns="0" rIns="0" bIns="0" rtlCol="0" anchor="ctr"/>
           <a:lstStyle/>
           <a:p>
-            <a:pPr indent="0" marL="0">
+            <a:pPr marL="0" indent="0">
               <a:buNone/>
             </a:pPr>
             <a:r>
@@ -13477,7 +13009,7 @@
           <a:bodyPr wrap="square" lIns="0" tIns="0" rIns="0" bIns="0" rtlCol="0" anchor="ctr"/>
           <a:lstStyle/>
           <a:p>
-            <a:pPr algn="ctr" indent="0" marL="0">
+            <a:pPr marL="0" indent="0" algn="ctr">
               <a:buNone/>
             </a:pPr>
             <a:r>
@@ -13516,7 +13048,7 @@
           <a:bodyPr wrap="square" lIns="0" tIns="0" rIns="0" bIns="0" rtlCol="0" anchor="ctr"/>
           <a:lstStyle/>
           <a:p>
-            <a:pPr indent="0" marL="0">
+            <a:pPr marL="0" indent="0">
               <a:buNone/>
             </a:pPr>
             <a:r>
@@ -13555,7 +13087,7 @@
           <a:bodyPr wrap="square" lIns="0" tIns="0" rIns="0" bIns="0" rtlCol="0" anchor="t"/>
           <a:lstStyle/>
           <a:p>
-            <a:pPr indent="0" marL="0">
+            <a:pPr marL="0" indent="0">
               <a:buNone/>
             </a:pPr>
             <a:r>
@@ -13621,7 +13153,7 @@
           <a:bodyPr wrap="square" lIns="0" tIns="0" rIns="0" bIns="0" rtlCol="0" anchor="t"/>
           <a:lstStyle/>
           <a:p>
-            <a:pPr indent="0" marL="0">
+            <a:pPr marL="0" indent="0">
               <a:buNone/>
             </a:pPr>
             <a:r>
@@ -13638,7 +13170,7 @@
             <a:endParaRPr lang="en-US" sz="950" dirty="0"/>
           </a:p>
           <a:p>
-            <a:pPr indent="0" marL="0">
+            <a:pPr marL="0" indent="0">
               <a:buNone/>
             </a:pPr>
             <a:r>
@@ -13655,7 +13187,7 @@
             <a:endParaRPr lang="en-US" sz="950" dirty="0"/>
           </a:p>
           <a:p>
-            <a:pPr indent="0" marL="0">
+            <a:pPr marL="0" indent="0">
               <a:buNone/>
             </a:pPr>
             <a:r>
@@ -13672,7 +13204,7 @@
             <a:endParaRPr lang="en-US" sz="950" dirty="0"/>
           </a:p>
           <a:p>
-            <a:pPr indent="0" marL="0">
+            <a:pPr marL="0" indent="0">
               <a:buNone/>
             </a:pPr>
             <a:r>
@@ -13689,7 +13221,7 @@
             <a:endParaRPr lang="en-US" sz="950" dirty="0"/>
           </a:p>
           <a:p>
-            <a:pPr indent="0" marL="0">
+            <a:pPr marL="0" indent="0">
               <a:buNone/>
             </a:pPr>
             <a:r>
@@ -13706,7 +13238,7 @@
             <a:endParaRPr lang="en-US" sz="950" dirty="0"/>
           </a:p>
           <a:p>
-            <a:pPr indent="0" marL="0">
+            <a:pPr marL="0" indent="0">
               <a:buNone/>
             </a:pPr>
             <a:r>
@@ -13723,7 +13255,7 @@
             <a:endParaRPr lang="en-US" sz="950" dirty="0"/>
           </a:p>
           <a:p>
-            <a:pPr indent="0" marL="0">
+            <a:pPr marL="0" indent="0">
               <a:buNone/>
             </a:pPr>
             <a:r>
@@ -13740,7 +13272,7 @@
             <a:endParaRPr lang="en-US" sz="950" dirty="0"/>
           </a:p>
           <a:p>
-            <a:pPr indent="0" marL="0">
+            <a:pPr marL="0" indent="0">
               <a:buNone/>
             </a:pPr>
             <a:r>
@@ -13757,7 +13289,7 @@
             <a:endParaRPr lang="en-US" sz="950" dirty="0"/>
           </a:p>
           <a:p>
-            <a:pPr indent="0" marL="0">
+            <a:pPr marL="0" indent="0">
               <a:buNone/>
             </a:pPr>
             <a:r>
@@ -13774,7 +13306,7 @@
             <a:endParaRPr lang="en-US" sz="950" dirty="0"/>
           </a:p>
           <a:p>
-            <a:pPr indent="0" marL="0">
+            <a:pPr marL="0" indent="0">
               <a:buNone/>
             </a:pPr>
             <a:r>
@@ -13791,7 +13323,7 @@
             <a:endParaRPr lang="en-US" sz="950" dirty="0"/>
           </a:p>
           <a:p>
-            <a:pPr indent="0" marL="0">
+            <a:pPr marL="0" indent="0">
               <a:buNone/>
             </a:pPr>
             <a:r>
@@ -13808,7 +13340,7 @@
             <a:endParaRPr lang="en-US" sz="950" dirty="0"/>
           </a:p>
           <a:p>
-            <a:pPr indent="0" marL="0">
+            <a:pPr marL="0" indent="0">
               <a:buNone/>
             </a:pPr>
             <a:r>
@@ -13855,14 +13387,14 @@
       </p:sp>
       <p:pic>
         <p:nvPicPr>
-          <p:cNvPr id="22" name="Image 0" descr="preencoded.png">    </p:cNvPr>
+          <p:cNvPr id="22" name="Image 0" descr="preencoded.png"/>
           <p:cNvPicPr>
             <a:picLocks noChangeAspect="1"/>
           </p:cNvPicPr>
           <p:nvPr/>
         </p:nvPicPr>
         <p:blipFill>
-          <a:blip r:embed="rId1"/>
+          <a:blip r:embed="rId3"/>
           <a:stretch>
             <a:fillRect/>
           </a:stretch>
@@ -13898,7 +13430,7 @@
           <a:bodyPr wrap="square" lIns="0" tIns="0" rIns="0" bIns="0" rtlCol="0" anchor="ctr"/>
           <a:lstStyle/>
           <a:p>
-            <a:pPr indent="0" marL="0">
+            <a:pPr marL="0" indent="0">
               <a:buNone/>
             </a:pPr>
             <a:r>
@@ -13932,6 +13464,7 @@
         <a:solidFill>
           <a:srgbClr val="FFFFFF"/>
         </a:solidFill>
+        <a:effectLst/>
       </p:bgPr>
     </p:bg>
     <p:spTree>
@@ -13969,7 +13502,7 @@
           <a:bodyPr wrap="square" lIns="0" tIns="0" rIns="0" bIns="0" rtlCol="0" anchor="t"/>
           <a:lstStyle/>
           <a:p>
-            <a:pPr algn="r" indent="0" marL="0">
+            <a:pPr marL="0" indent="0" algn="r">
               <a:buNone/>
             </a:pPr>
             <a:r>
@@ -14008,7 +13541,7 @@
           <a:bodyPr wrap="square" lIns="0" tIns="0" rIns="0" bIns="0" rtlCol="0" anchor="ctr"/>
           <a:lstStyle/>
           <a:p>
-            <a:pPr indent="0" marL="0">
+            <a:pPr marL="0" indent="0">
               <a:buNone/>
             </a:pPr>
             <a:r>
@@ -14047,7 +13580,7 @@
           <a:bodyPr wrap="square" lIns="0" tIns="0" rIns="0" bIns="0" rtlCol="0" anchor="t"/>
           <a:lstStyle/>
           <a:p>
-            <a:pPr indent="0" marL="0">
+            <a:pPr marL="0" indent="0">
               <a:buNone/>
             </a:pPr>
             <a:r>
@@ -14094,14 +13627,14 @@
       </p:sp>
       <p:pic>
         <p:nvPicPr>
-          <p:cNvPr id="6" name="Image 0" descr="preencoded.png">    </p:cNvPr>
+          <p:cNvPr id="6" name="Image 0" descr="preencoded.png"/>
           <p:cNvPicPr>
             <a:picLocks noChangeAspect="1"/>
           </p:cNvPicPr>
           <p:nvPr/>
         </p:nvPicPr>
         <p:blipFill>
-          <a:blip r:embed="rId1"/>
+          <a:blip r:embed="rId3"/>
           <a:stretch>
             <a:fillRect/>
           </a:stretch>
@@ -14137,7 +13670,7 @@
           <a:bodyPr wrap="square" lIns="0" tIns="0" rIns="0" bIns="0" rtlCol="0" anchor="ctr"/>
           <a:lstStyle/>
           <a:p>
-            <a:pPr indent="0" marL="0">
+            <a:pPr marL="0" indent="0">
               <a:buNone/>
             </a:pPr>
             <a:r>
@@ -14176,7 +13709,7 @@
           <a:bodyPr wrap="square" lIns="0" tIns="0" rIns="0" bIns="0" rtlCol="0" anchor="t"/>
           <a:lstStyle/>
           <a:p>
-            <a:pPr indent="0" marL="0">
+            <a:pPr marL="0" indent="0">
               <a:buNone/>
             </a:pPr>
             <a:r>
@@ -14190,9 +13723,6 @@
               </a:rPr>
               <a:t>Use host </a:t>
             </a:r>
-            <a:pPr indent="0" marL="0">
-              <a:buNone/>
-            </a:pPr>
             <a:r>
               <a:rPr lang="en-US" sz="1100" b="1" dirty="0">
                 <a:solidFill>
@@ -14204,9 +13734,6 @@
               </a:rPr>
               <a:t>host.docker.internal</a:t>
             </a:r>
-            <a:pPr indent="0" marL="0">
-              <a:buNone/>
-            </a:pPr>
             <a:r>
               <a:rPr lang="en-US" sz="1100" dirty="0">
                 <a:solidFill>
@@ -14218,9 +13745,6 @@
               </a:rPr>
               <a:t>, not </a:t>
             </a:r>
-            <a:pPr indent="0" marL="0">
-              <a:buNone/>
-            </a:pPr>
             <a:r>
               <a:rPr lang="en-US" sz="1100" b="1" dirty="0">
                 <a:solidFill>
@@ -14232,9 +13756,6 @@
               </a:rPr>
               <a:t>localhost</a:t>
             </a:r>
-            <a:pPr indent="0" marL="0">
-              <a:buNone/>
-            </a:pPr>
             <a:r>
               <a:rPr lang="en-US" sz="1100" dirty="0">
                 <a:solidFill>
@@ -14279,14 +13800,14 @@
       </p:sp>
       <p:pic>
         <p:nvPicPr>
-          <p:cNvPr id="10" name="Image 1" descr="preencoded.png">    </p:cNvPr>
+          <p:cNvPr id="10" name="Image 1" descr="preencoded.png"/>
           <p:cNvPicPr>
             <a:picLocks noChangeAspect="1"/>
           </p:cNvPicPr>
           <p:nvPr/>
         </p:nvPicPr>
         <p:blipFill>
-          <a:blip r:embed="rId2"/>
+          <a:blip r:embed="rId3"/>
           <a:stretch>
             <a:fillRect/>
           </a:stretch>
@@ -14322,7 +13843,7 @@
           <a:bodyPr wrap="square" lIns="0" tIns="0" rIns="0" bIns="0" rtlCol="0" anchor="ctr"/>
           <a:lstStyle/>
           <a:p>
-            <a:pPr indent="0" marL="0">
+            <a:pPr marL="0" indent="0">
               <a:buNone/>
             </a:pPr>
             <a:r>
@@ -14361,7 +13882,7 @@
           <a:bodyPr wrap="square" lIns="0" tIns="0" rIns="0" bIns="0" rtlCol="0" anchor="t"/>
           <a:lstStyle/>
           <a:p>
-            <a:pPr indent="0" marL="0">
+            <a:pPr marL="0" indent="0">
               <a:buNone/>
             </a:pPr>
             <a:r>
@@ -14375,9 +13896,6 @@
               </a:rPr>
               <a:t>User and password must match the </a:t>
             </a:r>
-            <a:pPr indent="0" marL="0">
-              <a:buNone/>
-            </a:pPr>
             <a:r>
               <a:rPr lang="en-US" sz="1100" b="1" dirty="0">
                 <a:solidFill>
@@ -14389,9 +13907,6 @@
               </a:rPr>
               <a:t>docker run</a:t>
             </a:r>
-            <a:pPr indent="0" marL="0">
-              <a:buNone/>
-            </a:pPr>
             <a:r>
               <a:rPr lang="en-US" sz="1100" dirty="0">
                 <a:solidFill>
@@ -14436,7 +13951,7 @@
       </p:sp>
       <p:pic>
         <p:nvPicPr>
-          <p:cNvPr id="14" name="Image 2" descr="preencoded.png">    </p:cNvPr>
+          <p:cNvPr id="14" name="Image 2" descr="preencoded.png"/>
           <p:cNvPicPr>
             <a:picLocks noChangeAspect="1"/>
           </p:cNvPicPr>
@@ -14479,7 +13994,7 @@
           <a:bodyPr wrap="square" lIns="0" tIns="0" rIns="0" bIns="0" rtlCol="0" anchor="ctr"/>
           <a:lstStyle/>
           <a:p>
-            <a:pPr indent="0" marL="0">
+            <a:pPr marL="0" indent="0">
               <a:buNone/>
             </a:pPr>
             <a:r>
@@ -14518,7 +14033,7 @@
           <a:bodyPr wrap="square" lIns="0" tIns="0" rIns="0" bIns="0" rtlCol="0" anchor="t"/>
           <a:lstStyle/>
           <a:p>
-            <a:pPr indent="0" marL="0">
+            <a:pPr marL="0" indent="0">
               <a:buNone/>
             </a:pPr>
             <a:r>
@@ -14532,9 +14047,6 @@
               </a:rPr>
               <a:t>Another MySQL is using 3306. Publish </a:t>
             </a:r>
-            <a:pPr indent="0" marL="0">
-              <a:buNone/>
-            </a:pPr>
             <a:r>
               <a:rPr lang="en-US" sz="1100" b="1" dirty="0">
                 <a:solidFill>
@@ -14546,9 +14058,6 @@
               </a:rPr>
               <a:t>-p 3307:3306</a:t>
             </a:r>
-            <a:pPr indent="0" marL="0">
-              <a:buNone/>
-            </a:pPr>
             <a:r>
               <a:rPr lang="en-US" sz="1100" dirty="0">
                 <a:solidFill>
@@ -14593,14 +14102,14 @@
       </p:sp>
       <p:pic>
         <p:nvPicPr>
-          <p:cNvPr id="18" name="Image 3" descr="preencoded.png">    </p:cNvPr>
+          <p:cNvPr id="18" name="Image 3" descr="preencoded.png"/>
           <p:cNvPicPr>
             <a:picLocks noChangeAspect="1"/>
           </p:cNvPicPr>
           <p:nvPr/>
         </p:nvPicPr>
         <p:blipFill>
-          <a:blip r:embed="rId4"/>
+          <a:blip r:embed="rId3"/>
           <a:stretch>
             <a:fillRect/>
           </a:stretch>
@@ -14636,7 +14145,7 @@
           <a:bodyPr wrap="square" lIns="0" tIns="0" rIns="0" bIns="0" rtlCol="0" anchor="ctr"/>
           <a:lstStyle/>
           <a:p>
-            <a:pPr indent="0" marL="0">
+            <a:pPr marL="0" indent="0">
               <a:buNone/>
             </a:pPr>
             <a:r>
@@ -14675,7 +14184,7 @@
           <a:bodyPr wrap="square" lIns="0" tIns="0" rIns="0" bIns="0" rtlCol="0" anchor="t"/>
           <a:lstStyle/>
           <a:p>
-            <a:pPr indent="0" marL="0">
+            <a:pPr marL="0" indent="0">
               <a:buNone/>
             </a:pPr>
             <a:r>
@@ -14722,14 +14231,14 @@
       </p:sp>
       <p:pic>
         <p:nvPicPr>
-          <p:cNvPr id="22" name="Image 4" descr="preencoded.png">    </p:cNvPr>
+          <p:cNvPr id="22" name="Image 4" descr="preencoded.png"/>
           <p:cNvPicPr>
             <a:picLocks noChangeAspect="1"/>
           </p:cNvPicPr>
           <p:nvPr/>
         </p:nvPicPr>
         <p:blipFill>
-          <a:blip r:embed="rId5"/>
+          <a:blip r:embed="rId3"/>
           <a:stretch>
             <a:fillRect/>
           </a:stretch>
@@ -14765,7 +14274,7 @@
           <a:bodyPr wrap="square" lIns="0" tIns="0" rIns="0" bIns="0" rtlCol="0" anchor="ctr"/>
           <a:lstStyle/>
           <a:p>
-            <a:pPr indent="0" marL="0">
+            <a:pPr marL="0" indent="0">
               <a:buNone/>
             </a:pPr>
             <a:r>
@@ -14804,7 +14313,7 @@
           <a:bodyPr wrap="square" lIns="0" tIns="0" rIns="0" bIns="0" rtlCol="0" anchor="t"/>
           <a:lstStyle/>
           <a:p>
-            <a:pPr indent="0" marL="0">
+            <a:pPr marL="0" indent="0">
               <a:buNone/>
             </a:pPr>
             <a:r>
@@ -14818,9 +14327,6 @@
               </a:rPr>
               <a:t>The links point to </a:t>
             </a:r>
-            <a:pPr indent="0" marL="0">
-              <a:buNone/>
-            </a:pPr>
             <a:r>
               <a:rPr lang="en-US" sz="1100" b="1" dirty="0">
                 <a:solidFill>
@@ -14832,9 +14338,6 @@
               </a:rPr>
               <a:t>localhost:5678</a:t>
             </a:r>
-            <a:pPr indent="0" marL="0">
-              <a:buNone/>
-            </a:pPr>
             <a:r>
               <a:rPr lang="en-US" sz="1100" dirty="0">
                 <a:solidFill>
@@ -14879,14 +14382,14 @@
       </p:sp>
       <p:pic>
         <p:nvPicPr>
-          <p:cNvPr id="26" name="Image 5" descr="preencoded.png">    </p:cNvPr>
+          <p:cNvPr id="26" name="Image 5" descr="preencoded.png"/>
           <p:cNvPicPr>
             <a:picLocks noChangeAspect="1"/>
           </p:cNvPicPr>
           <p:nvPr/>
         </p:nvPicPr>
         <p:blipFill>
-          <a:blip r:embed="rId6"/>
+          <a:blip r:embed="rId3"/>
           <a:stretch>
             <a:fillRect/>
           </a:stretch>
@@ -14922,7 +14425,7 @@
           <a:bodyPr wrap="square" lIns="0" tIns="0" rIns="0" bIns="0" rtlCol="0" anchor="ctr"/>
           <a:lstStyle/>
           <a:p>
-            <a:pPr indent="0" marL="0">
+            <a:pPr marL="0" indent="0">
               <a:buNone/>
             </a:pPr>
             <a:r>
@@ -14936,9 +14439,6 @@
               </a:rPr>
               <a:t>Expression shows </a:t>
             </a:r>
-            <a:pPr indent="0" marL="0">
-              <a:buNone/>
-            </a:pPr>
             <a:r>
               <a:rPr lang="en-US" sz="1200" b="1" dirty="0">
                 <a:solidFill>
@@ -14975,7 +14475,7 @@
           <a:bodyPr wrap="square" lIns="0" tIns="0" rIns="0" bIns="0" rtlCol="0" anchor="t"/>
           <a:lstStyle/>
           <a:p>
-            <a:pPr indent="0" marL="0">
+            <a:pPr marL="0" indent="0">
               <a:buNone/>
             </a:pPr>
             <a:r>
@@ -14989,9 +14489,6 @@
               </a:rPr>
               <a:t>Names are case-sensitive (</a:t>
             </a:r>
-            <a:pPr indent="0" marL="0">
-              <a:buNone/>
-            </a:pPr>
             <a:r>
               <a:rPr lang="en-US" sz="1100" b="1" dirty="0">
                 <a:solidFill>
@@ -15003,9 +14500,6 @@
               </a:rPr>
               <a:t>Email</a:t>
             </a:r>
-            <a:pPr indent="0" marL="0">
-              <a:buNone/>
-            </a:pPr>
             <a:r>
               <a:rPr lang="en-US" sz="1100" dirty="0">
                 <a:solidFill>
@@ -15017,9 +14511,6 @@
               </a:rPr>
               <a:t> ≠ </a:t>
             </a:r>
-            <a:pPr indent="0" marL="0">
-              <a:buNone/>
-            </a:pPr>
             <a:r>
               <a:rPr lang="en-US" sz="1100" b="1" dirty="0">
                 <a:solidFill>
@@ -15031,9 +14522,6 @@
               </a:rPr>
               <a:t>email</a:t>
             </a:r>
-            <a:pPr indent="0" marL="0">
-              <a:buNone/>
-            </a:pPr>
             <a:r>
               <a:rPr lang="en-US" sz="1100" dirty="0">
                 <a:solidFill>
@@ -15065,6 +14553,7 @@
         <a:solidFill>
           <a:srgbClr val="FFFFFF"/>
         </a:solidFill>
+        <a:effectLst/>
       </p:bgPr>
     </p:bg>
     <p:spTree>
@@ -15102,7 +14591,7 @@
           <a:bodyPr wrap="square" lIns="0" tIns="0" rIns="0" bIns="0" rtlCol="0" anchor="t"/>
           <a:lstStyle/>
           <a:p>
-            <a:pPr algn="r" indent="0" marL="0">
+            <a:pPr marL="0" indent="0" algn="r">
               <a:buNone/>
             </a:pPr>
             <a:r>
@@ -15141,7 +14630,7 @@
           <a:bodyPr wrap="square" lIns="0" tIns="0" rIns="0" bIns="0" rtlCol="0" anchor="ctr"/>
           <a:lstStyle/>
           <a:p>
-            <a:pPr indent="0" marL="0">
+            <a:pPr marL="0" indent="0">
               <a:buNone/>
             </a:pPr>
             <a:r>
@@ -15180,7 +14669,7 @@
           <a:bodyPr wrap="square" lIns="0" tIns="0" rIns="0" bIns="0" rtlCol="0" anchor="t"/>
           <a:lstStyle/>
           <a:p>
-            <a:pPr indent="0" marL="0">
+            <a:pPr marL="0" indent="0">
               <a:buNone/>
             </a:pPr>
             <a:r>
@@ -15273,7 +14762,7 @@
           <a:bodyPr wrap="square" lIns="0" tIns="0" rIns="0" bIns="0" rtlCol="0" anchor="ctr"/>
           <a:lstStyle/>
           <a:p>
-            <a:pPr algn="ctr" indent="0" marL="0">
+            <a:pPr marL="0" indent="0" algn="ctr">
               <a:buNone/>
             </a:pPr>
             <a:r>
@@ -15312,7 +14801,7 @@
           <a:bodyPr wrap="square" lIns="0" tIns="0" rIns="0" bIns="0" rtlCol="0" anchor="t"/>
           <a:lstStyle/>
           <a:p>
-            <a:pPr indent="0" marL="0">
+            <a:pPr marL="0" indent="0">
               <a:buNone/>
             </a:pPr>
             <a:r>
@@ -15351,7 +14840,7 @@
           <a:bodyPr wrap="square" lIns="0" tIns="0" rIns="0" bIns="0" rtlCol="0" anchor="t"/>
           <a:lstStyle/>
           <a:p>
-            <a:pPr indent="0" marL="0">
+            <a:pPr marL="0" indent="0">
               <a:buNone/>
             </a:pPr>
             <a:r>
@@ -15365,9 +14854,6 @@
               </a:rPr>
               <a:t>Every Monday, email a count of last week's leads by </a:t>
             </a:r>
-            <a:pPr indent="0" marL="0">
-              <a:buNone/>
-            </a:pPr>
             <a:r>
               <a:rPr lang="en-US" sz="1200" b="1" dirty="0">
                 <a:solidFill>
@@ -15379,9 +14865,6 @@
               </a:rPr>
               <a:t>source</a:t>
             </a:r>
-            <a:pPr indent="0" marL="0">
-              <a:buNone/>
-            </a:pPr>
             <a:r>
               <a:rPr lang="en-US" sz="1200" dirty="0">
                 <a:solidFill>
@@ -15418,7 +14901,7 @@
           <a:bodyPr wrap="square" lIns="0" tIns="0" rIns="0" bIns="0" rtlCol="0" anchor="t"/>
           <a:lstStyle/>
           <a:p>
-            <a:pPr indent="0" marL="0">
+            <a:pPr marL="0" indent="0">
               <a:buNone/>
             </a:pPr>
             <a:r>
@@ -15432,9 +14915,6 @@
               </a:rPr>
               <a:t>Hint: </a:t>
             </a:r>
-            <a:pPr indent="0" marL="0">
-              <a:buNone/>
-            </a:pPr>
             <a:r>
               <a:rPr lang="en-US" sz="1100" dirty="0">
                 <a:solidFill>
@@ -15446,9 +14926,6 @@
               </a:rPr>
               <a:t>Execute SQL with </a:t>
             </a:r>
-            <a:pPr indent="0" marL="0">
-              <a:buNone/>
-            </a:pPr>
             <a:r>
               <a:rPr lang="en-US" sz="1100" b="1" dirty="0">
                 <a:solidFill>
@@ -15460,9 +14937,6 @@
               </a:rPr>
               <a:t>GROUP BY source</a:t>
             </a:r>
-            <a:pPr indent="0" marL="0">
-              <a:buNone/>
-            </a:pPr>
             <a:r>
               <a:rPr lang="en-US" sz="1100" dirty="0">
                 <a:solidFill>
@@ -15553,7 +15027,7 @@
           <a:bodyPr wrap="square" lIns="0" tIns="0" rIns="0" bIns="0" rtlCol="0" anchor="ctr"/>
           <a:lstStyle/>
           <a:p>
-            <a:pPr algn="ctr" indent="0" marL="0">
+            <a:pPr marL="0" indent="0" algn="ctr">
               <a:buNone/>
             </a:pPr>
             <a:r>
@@ -15592,7 +15066,7 @@
           <a:bodyPr wrap="square" lIns="0" tIns="0" rIns="0" bIns="0" rtlCol="0" anchor="t"/>
           <a:lstStyle/>
           <a:p>
-            <a:pPr indent="0" marL="0">
+            <a:pPr marL="0" indent="0">
               <a:buNone/>
             </a:pPr>
             <a:r>
@@ -15631,7 +15105,7 @@
           <a:bodyPr wrap="square" lIns="0" tIns="0" rIns="0" bIns="0" rtlCol="0" anchor="t"/>
           <a:lstStyle/>
           <a:p>
-            <a:pPr indent="0" marL="0">
+            <a:pPr marL="0" indent="0">
               <a:buNone/>
             </a:pPr>
             <a:r>
@@ -15645,9 +15119,6 @@
               </a:rPr>
               <a:t>Every evening, email managers the claims still </a:t>
             </a:r>
-            <a:pPr indent="0" marL="0">
-              <a:buNone/>
-            </a:pPr>
             <a:r>
               <a:rPr lang="en-US" sz="1200" b="1" dirty="0">
                 <a:solidFill>
@@ -15659,9 +15130,6 @@
               </a:rPr>
               <a:t>Pending</a:t>
             </a:r>
-            <a:pPr indent="0" marL="0">
-              <a:buNone/>
-            </a:pPr>
             <a:r>
               <a:rPr lang="en-US" sz="1200" dirty="0">
                 <a:solidFill>
@@ -15698,7 +15166,7 @@
           <a:bodyPr wrap="square" lIns="0" tIns="0" rIns="0" bIns="0" rtlCol="0" anchor="t"/>
           <a:lstStyle/>
           <a:p>
-            <a:pPr indent="0" marL="0">
+            <a:pPr marL="0" indent="0">
               <a:buNone/>
             </a:pPr>
             <a:r>
@@ -15712,9 +15180,6 @@
               </a:rPr>
               <a:t>Hint: </a:t>
             </a:r>
-            <a:pPr indent="0" marL="0">
-              <a:buNone/>
-            </a:pPr>
             <a:r>
               <a:rPr lang="en-US" sz="1100" b="1" dirty="0">
                 <a:solidFill>
@@ -15805,7 +15270,7 @@
           <a:bodyPr wrap="square" lIns="0" tIns="0" rIns="0" bIns="0" rtlCol="0" anchor="ctr"/>
           <a:lstStyle/>
           <a:p>
-            <a:pPr algn="ctr" indent="0" marL="0">
+            <a:pPr marL="0" indent="0" algn="ctr">
               <a:buNone/>
             </a:pPr>
             <a:r>
@@ -15844,7 +15309,7 @@
           <a:bodyPr wrap="square" lIns="0" tIns="0" rIns="0" bIns="0" rtlCol="0" anchor="t"/>
           <a:lstStyle/>
           <a:p>
-            <a:pPr indent="0" marL="0">
+            <a:pPr marL="0" indent="0">
               <a:buNone/>
             </a:pPr>
             <a:r>
@@ -15883,7 +15348,7 @@
           <a:bodyPr wrap="square" lIns="0" tIns="0" rIns="0" bIns="0" rtlCol="0" anchor="t"/>
           <a:lstStyle/>
           <a:p>
-            <a:pPr indent="0" marL="0">
+            <a:pPr marL="0" indent="0">
               <a:buNone/>
             </a:pPr>
             <a:r>
@@ -15922,7 +15387,7 @@
           <a:bodyPr wrap="square" lIns="0" tIns="0" rIns="0" bIns="0" rtlCol="0" anchor="t"/>
           <a:lstStyle/>
           <a:p>
-            <a:pPr indent="0" marL="0">
+            <a:pPr marL="0" indent="0">
               <a:buNone/>
             </a:pPr>
             <a:r>
@@ -15936,9 +15401,6 @@
               </a:rPr>
               <a:t>Hint: </a:t>
             </a:r>
-            <a:pPr indent="0" marL="0">
-              <a:buNone/>
-            </a:pPr>
             <a:r>
               <a:rPr lang="en-US" sz="1100" dirty="0">
                 <a:solidFill>
@@ -15970,6 +15432,7 @@
         <a:solidFill>
           <a:srgbClr val="FFFFFF"/>
         </a:solidFill>
+        <a:effectLst/>
       </p:bgPr>
     </p:bg>
     <p:spTree>
@@ -16007,7 +15470,7 @@
           <a:bodyPr wrap="square" lIns="0" tIns="0" rIns="0" bIns="0" rtlCol="0" anchor="t"/>
           <a:lstStyle/>
           <a:p>
-            <a:pPr algn="r" indent="0" marL="0">
+            <a:pPr marL="0" indent="0" algn="r">
               <a:buNone/>
             </a:pPr>
             <a:r>
@@ -16046,7 +15509,7 @@
           <a:bodyPr wrap="square" lIns="0" tIns="0" rIns="0" bIns="0" rtlCol="0" anchor="ctr"/>
           <a:lstStyle/>
           <a:p>
-            <a:pPr indent="0" marL="0">
+            <a:pPr marL="0" indent="0">
               <a:buNone/>
             </a:pPr>
             <a:r>
@@ -16085,7 +15548,7 @@
           <a:bodyPr wrap="square" lIns="0" tIns="0" rIns="0" bIns="0" rtlCol="0" anchor="t"/>
           <a:lstStyle/>
           <a:p>
-            <a:pPr indent="0" marL="0">
+            <a:pPr marL="0" indent="0">
               <a:buNone/>
             </a:pPr>
             <a:r>
@@ -16130,14 +15593,14 @@
       </p:sp>
       <p:pic>
         <p:nvPicPr>
-          <p:cNvPr id="6" name="Image 0" descr="preencoded.png">    </p:cNvPr>
+          <p:cNvPr id="6" name="Image 0" descr="preencoded.png"/>
           <p:cNvPicPr>
             <a:picLocks noChangeAspect="1"/>
           </p:cNvPicPr>
           <p:nvPr/>
         </p:nvPicPr>
         <p:blipFill>
-          <a:blip r:embed="rId1"/>
+          <a:blip r:embed="rId3"/>
           <a:stretch>
             <a:fillRect/>
           </a:stretch>
@@ -16173,7 +15636,7 @@
           <a:bodyPr wrap="square" lIns="0" tIns="0" rIns="0" bIns="0" rtlCol="0" anchor="ctr"/>
           <a:lstStyle/>
           <a:p>
-            <a:pPr indent="0" marL="0">
+            <a:pPr marL="0" indent="0">
               <a:buNone/>
             </a:pPr>
             <a:r>
@@ -16218,14 +15681,14 @@
       </p:sp>
       <p:pic>
         <p:nvPicPr>
-          <p:cNvPr id="9" name="Image 1" descr="preencoded.png">    </p:cNvPr>
+          <p:cNvPr id="9" name="Image 1" descr="preencoded.png"/>
           <p:cNvPicPr>
             <a:picLocks noChangeAspect="1"/>
           </p:cNvPicPr>
           <p:nvPr/>
         </p:nvPicPr>
         <p:blipFill>
-          <a:blip r:embed="rId2"/>
+          <a:blip r:embed="rId4"/>
           <a:stretch>
             <a:fillRect/>
           </a:stretch>
@@ -16261,7 +15724,7 @@
           <a:bodyPr wrap="square" lIns="0" tIns="0" rIns="0" bIns="0" rtlCol="0" anchor="ctr"/>
           <a:lstStyle/>
           <a:p>
-            <a:pPr indent="0" marL="0">
+            <a:pPr marL="0" indent="0">
               <a:buNone/>
             </a:pPr>
             <a:r>
@@ -16306,14 +15769,14 @@
       </p:sp>
       <p:pic>
         <p:nvPicPr>
-          <p:cNvPr id="12" name="Image 2" descr="preencoded.png">    </p:cNvPr>
+          <p:cNvPr id="12" name="Image 2" descr="preencoded.png"/>
           <p:cNvPicPr>
             <a:picLocks noChangeAspect="1"/>
           </p:cNvPicPr>
           <p:nvPr/>
         </p:nvPicPr>
         <p:blipFill>
-          <a:blip r:embed="rId3"/>
+          <a:blip r:embed="rId5"/>
           <a:stretch>
             <a:fillRect/>
           </a:stretch>
@@ -16349,7 +15812,7 @@
           <a:bodyPr wrap="square" lIns="0" tIns="0" rIns="0" bIns="0" rtlCol="0" anchor="ctr"/>
           <a:lstStyle/>
           <a:p>
-            <a:pPr indent="0" marL="0">
+            <a:pPr marL="0" indent="0">
               <a:buNone/>
             </a:pPr>
             <a:r>
@@ -16394,14 +15857,14 @@
       </p:sp>
       <p:pic>
         <p:nvPicPr>
-          <p:cNvPr id="15" name="Image 3" descr="preencoded.png">    </p:cNvPr>
+          <p:cNvPr id="15" name="Image 3" descr="preencoded.png"/>
           <p:cNvPicPr>
             <a:picLocks noChangeAspect="1"/>
           </p:cNvPicPr>
           <p:nvPr/>
         </p:nvPicPr>
         <p:blipFill>
-          <a:blip r:embed="rId4"/>
+          <a:blip r:embed="rId6"/>
           <a:stretch>
             <a:fillRect/>
           </a:stretch>
@@ -16437,7 +15900,7 @@
           <a:bodyPr wrap="square" lIns="0" tIns="0" rIns="0" bIns="0" rtlCol="0" anchor="ctr"/>
           <a:lstStyle/>
           <a:p>
-            <a:pPr indent="0" marL="0">
+            <a:pPr marL="0" indent="0">
               <a:buNone/>
             </a:pPr>
             <a:r>
@@ -16503,11 +15966,11 @@
           <a:bodyPr wrap="square" lIns="0" tIns="0" rIns="0" bIns="0" rtlCol="0" anchor="t"/>
           <a:lstStyle/>
           <a:p>
-            <a:pPr indent="0" marL="0">
-              <a:buNone/>
-            </a:pPr>
-            <a:r>
-              <a:rPr lang="en-US" sz="1000" b="1" spc="300" kern="0" dirty="0">
+            <a:pPr marL="0" indent="0">
+              <a:buNone/>
+            </a:pPr>
+            <a:r>
+              <a:rPr lang="en-US" sz="1000" b="1" kern="0" spc="300" dirty="0">
                 <a:solidFill>
                   <a:srgbClr val="5B6475"/>
                 </a:solidFill>
@@ -16567,7 +16030,7 @@
           <a:bodyPr wrap="square" lIns="0" tIns="0" rIns="0" bIns="0" rtlCol="0" anchor="ctr"/>
           <a:lstStyle/>
           <a:p>
-            <a:pPr indent="0" marL="0">
+            <a:pPr marL="0" indent="0">
               <a:buNone/>
             </a:pPr>
             <a:r>
@@ -16631,7 +16094,7 @@
           <a:bodyPr wrap="square" lIns="0" tIns="0" rIns="0" bIns="0" rtlCol="0" anchor="ctr"/>
           <a:lstStyle/>
           <a:p>
-            <a:pPr indent="0" marL="0">
+            <a:pPr marL="0" indent="0">
               <a:buNone/>
             </a:pPr>
             <a:r>
@@ -16695,7 +16158,7 @@
           <a:bodyPr wrap="square" lIns="0" tIns="0" rIns="0" bIns="0" rtlCol="0" anchor="ctr"/>
           <a:lstStyle/>
           <a:p>
-            <a:pPr indent="0" marL="0">
+            <a:pPr marL="0" indent="0">
               <a:buNone/>
             </a:pPr>
             <a:r>
@@ -16761,7 +16224,7 @@
           <a:bodyPr wrap="square" lIns="0" tIns="0" rIns="0" bIns="0" rtlCol="0" anchor="ctr"/>
           <a:lstStyle/>
           <a:p>
-            <a:pPr algn="ctr" indent="0" marL="0">
+            <a:pPr marL="0" indent="0" algn="ctr">
               <a:buNone/>
             </a:pPr>
             <a:r>
@@ -16800,7 +16263,7 @@
           <a:bodyPr wrap="square" lIns="0" tIns="0" rIns="0" bIns="0" rtlCol="0" anchor="ctr"/>
           <a:lstStyle/>
           <a:p>
-            <a:pPr indent="0" marL="0">
+            <a:pPr marL="0" indent="0">
               <a:buNone/>
             </a:pPr>
             <a:r>
@@ -16866,7 +16329,7 @@
           <a:bodyPr wrap="square" lIns="0" tIns="0" rIns="0" bIns="0" rtlCol="0" anchor="ctr"/>
           <a:lstStyle/>
           <a:p>
-            <a:pPr algn="ctr" indent="0" marL="0">
+            <a:pPr marL="0" indent="0" algn="ctr">
               <a:buNone/>
             </a:pPr>
             <a:r>
@@ -16905,7 +16368,7 @@
           <a:bodyPr wrap="square" lIns="0" tIns="0" rIns="0" bIns="0" rtlCol="0" anchor="ctr"/>
           <a:lstStyle/>
           <a:p>
-            <a:pPr indent="0" marL="0">
+            <a:pPr marL="0" indent="0">
               <a:buNone/>
             </a:pPr>
             <a:r>
@@ -16971,7 +16434,7 @@
           <a:bodyPr wrap="square" lIns="0" tIns="0" rIns="0" bIns="0" rtlCol="0" anchor="ctr"/>
           <a:lstStyle/>
           <a:p>
-            <a:pPr algn="ctr" indent="0" marL="0">
+            <a:pPr marL="0" indent="0" algn="ctr">
               <a:buNone/>
             </a:pPr>
             <a:r>
@@ -17010,7 +16473,7 @@
           <a:bodyPr wrap="square" lIns="0" tIns="0" rIns="0" bIns="0" rtlCol="0" anchor="ctr"/>
           <a:lstStyle/>
           <a:p>
-            <a:pPr indent="0" marL="0">
+            <a:pPr marL="0" indent="0">
               <a:buNone/>
             </a:pPr>
             <a:r>
@@ -17074,7 +16537,7 @@
           <a:bodyPr wrap="square" lIns="0" tIns="0" rIns="0" bIns="0" rtlCol="0" anchor="ctr"/>
           <a:lstStyle/>
           <a:p>
-            <a:pPr indent="0" marL="0">
+            <a:pPr marL="0" indent="0">
               <a:buNone/>
             </a:pPr>
             <a:r>
@@ -17108,6 +16571,7 @@
         <a:solidFill>
           <a:srgbClr val="FFFFFF"/>
         </a:solidFill>
+        <a:effectLst/>
       </p:bgPr>
     </p:bg>
     <p:spTree>
@@ -17145,7 +16609,7 @@
           <a:bodyPr wrap="square" lIns="0" tIns="0" rIns="0" bIns="0" rtlCol="0" anchor="t"/>
           <a:lstStyle/>
           <a:p>
-            <a:pPr algn="r" indent="0" marL="0">
+            <a:pPr marL="0" indent="0" algn="r">
               <a:buNone/>
             </a:pPr>
             <a:r>
@@ -17184,7 +16648,7 @@
           <a:bodyPr wrap="square" lIns="0" tIns="0" rIns="0" bIns="0" rtlCol="0" anchor="ctr"/>
           <a:lstStyle/>
           <a:p>
-            <a:pPr indent="0" marL="0">
+            <a:pPr marL="0" indent="0">
               <a:buNone/>
             </a:pPr>
             <a:r>
@@ -17223,7 +16687,7 @@
           <a:bodyPr wrap="square" lIns="0" tIns="0" rIns="0" bIns="0" rtlCol="0" anchor="t"/>
           <a:lstStyle/>
           <a:p>
-            <a:pPr indent="0" marL="0">
+            <a:pPr marL="0" indent="0">
               <a:buNone/>
             </a:pPr>
             <a:r>
@@ -17289,7 +16753,7 @@
           <a:bodyPr wrap="square" lIns="0" tIns="0" rIns="0" bIns="0" rtlCol="0" anchor="ctr"/>
           <a:lstStyle/>
           <a:p>
-            <a:pPr algn="ctr" indent="0" marL="0">
+            <a:pPr marL="0" indent="0" algn="ctr">
               <a:buNone/>
             </a:pPr>
             <a:r>
@@ -17328,7 +16792,7 @@
           <a:bodyPr wrap="square" lIns="0" tIns="0" rIns="0" bIns="0" rtlCol="0" anchor="t"/>
           <a:lstStyle/>
           <a:p>
-            <a:pPr indent="0" marL="0">
+            <a:pPr marL="0" indent="0">
               <a:buNone/>
             </a:pPr>
             <a:r>
@@ -17345,7 +16809,7 @@
             <a:endParaRPr lang="en-US" sz="1400" dirty="0"/>
           </a:p>
           <a:p>
-            <a:pPr indent="0" marL="0">
+            <a:pPr marL="0" indent="0">
               <a:buNone/>
             </a:pPr>
             <a:r>
@@ -17411,7 +16875,7 @@
           <a:bodyPr wrap="square" lIns="0" tIns="0" rIns="0" bIns="0" rtlCol="0" anchor="ctr"/>
           <a:lstStyle/>
           <a:p>
-            <a:pPr algn="ctr" indent="0" marL="0">
+            <a:pPr marL="0" indent="0" algn="ctr">
               <a:buNone/>
             </a:pPr>
             <a:r>
@@ -17450,7 +16914,7 @@
           <a:bodyPr wrap="square" lIns="0" tIns="0" rIns="0" bIns="0" rtlCol="0" anchor="t"/>
           <a:lstStyle/>
           <a:p>
-            <a:pPr indent="0" marL="0">
+            <a:pPr marL="0" indent="0">
               <a:buNone/>
             </a:pPr>
             <a:r>
@@ -17467,7 +16931,7 @@
             <a:endParaRPr lang="en-US" sz="1400" dirty="0"/>
           </a:p>
           <a:p>
-            <a:pPr indent="0" marL="0">
+            <a:pPr marL="0" indent="0">
               <a:buNone/>
             </a:pPr>
             <a:r>
@@ -17533,7 +16997,7 @@
           <a:bodyPr wrap="square" lIns="0" tIns="0" rIns="0" bIns="0" rtlCol="0" anchor="ctr"/>
           <a:lstStyle/>
           <a:p>
-            <a:pPr algn="ctr" indent="0" marL="0">
+            <a:pPr marL="0" indent="0" algn="ctr">
               <a:buNone/>
             </a:pPr>
             <a:r>
@@ -17572,7 +17036,7 @@
           <a:bodyPr wrap="square" lIns="0" tIns="0" rIns="0" bIns="0" rtlCol="0" anchor="t"/>
           <a:lstStyle/>
           <a:p>
-            <a:pPr indent="0" marL="0">
+            <a:pPr marL="0" indent="0">
               <a:buNone/>
             </a:pPr>
             <a:r>
@@ -17589,7 +17053,7 @@
             <a:endParaRPr lang="en-US" sz="1400" dirty="0"/>
           </a:p>
           <a:p>
-            <a:pPr indent="0" marL="0">
+            <a:pPr marL="0" indent="0">
               <a:buNone/>
             </a:pPr>
             <a:r>
@@ -17655,11 +17119,11 @@
           <a:bodyPr wrap="square" lIns="0" tIns="0" rIns="0" bIns="0" rtlCol="0" anchor="t"/>
           <a:lstStyle/>
           <a:p>
-            <a:pPr indent="0" marL="0">
-              <a:buNone/>
-            </a:pPr>
-            <a:r>
-              <a:rPr lang="en-US" sz="1000" b="1" spc="300" kern="0" dirty="0">
+            <a:pPr marL="0" indent="0">
+              <a:buNone/>
+            </a:pPr>
+            <a:r>
+              <a:rPr lang="en-US" sz="1000" b="1" kern="0" spc="300" dirty="0">
                 <a:solidFill>
                   <a:srgbClr val="1A7F8E"/>
                 </a:solidFill>
@@ -17733,12 +17197,6 @@
               </a:rPr>
               <a:t>Read any earlier step with </a:t>
             </a:r>
-            <a:pPr indent="0" marL="0">
-              <a:spcAft>
-                <a:spcPts val="500"/>
-              </a:spcAft>
-              <a:buNone/>
-            </a:pPr>
             <a:r>
               <a:rPr lang="en-US" sz="1250" b="1" dirty="0">
                 <a:solidFill>
@@ -17792,12 +17250,6 @@
               </a:rPr>
               <a:t>Separate containers talk via </a:t>
             </a:r>
-            <a:pPr indent="0" marL="0">
-              <a:spcAft>
-                <a:spcPts val="500"/>
-              </a:spcAft>
-              <a:buNone/>
-            </a:pPr>
             <a:r>
               <a:rPr lang="en-US" sz="1250" b="1" dirty="0">
                 <a:solidFill>
@@ -17861,11 +17313,11 @@
           <a:bodyPr wrap="square" lIns="0" tIns="0" rIns="0" bIns="0" rtlCol="0" anchor="t"/>
           <a:lstStyle/>
           <a:p>
-            <a:pPr indent="0" marL="0">
-              <a:buNone/>
-            </a:pPr>
-            <a:r>
-              <a:rPr lang="en-US" sz="1000" b="1" spc="300" kern="0" dirty="0">
+            <a:pPr marL="0" indent="0">
+              <a:buNone/>
+            </a:pPr>
+            <a:r>
+              <a:rPr lang="en-US" sz="1000" b="1" kern="0" spc="300" dirty="0">
                 <a:solidFill>
                   <a:srgbClr val="EA4B71"/>
                 </a:solidFill>
@@ -17878,7 +17330,7 @@
             <a:endParaRPr lang="en-US" sz="1000" dirty="0"/>
           </a:p>
           <a:p>
-            <a:pPr indent="0" marL="0">
+            <a:pPr marL="0" indent="0">
               <a:buNone/>
             </a:pPr>
             <a:r>
@@ -17912,6 +17364,7 @@
         <a:solidFill>
           <a:srgbClr val="FFFFFF"/>
         </a:solidFill>
+        <a:effectLst/>
       </p:bgPr>
     </p:bg>
     <p:spTree>
@@ -17949,7 +17402,7 @@
           <a:bodyPr wrap="square" lIns="0" tIns="0" rIns="0" bIns="0" rtlCol="0" anchor="t"/>
           <a:lstStyle/>
           <a:p>
-            <a:pPr algn="r" indent="0" marL="0">
+            <a:pPr marL="0" indent="0" algn="r">
               <a:buNone/>
             </a:pPr>
             <a:r>
@@ -17988,7 +17441,7 @@
           <a:bodyPr wrap="square" lIns="0" tIns="0" rIns="0" bIns="0" rtlCol="0" anchor="ctr"/>
           <a:lstStyle/>
           <a:p>
-            <a:pPr indent="0" marL="0">
+            <a:pPr marL="0" indent="0">
               <a:buNone/>
             </a:pPr>
             <a:r>
@@ -18027,7 +17480,7 @@
           <a:bodyPr wrap="square" lIns="0" tIns="0" rIns="0" bIns="0" rtlCol="0" anchor="t"/>
           <a:lstStyle/>
           <a:p>
-            <a:pPr indent="0" marL="0">
+            <a:pPr marL="0" indent="0">
               <a:buNone/>
             </a:pPr>
             <a:r>
@@ -18099,14 +17552,14 @@
       </p:sp>
       <p:pic>
         <p:nvPicPr>
-          <p:cNvPr id="8" name="Image 0" descr="preencoded.png">    </p:cNvPr>
+          <p:cNvPr id="8" name="Image 0" descr="preencoded.png"/>
           <p:cNvPicPr>
             <a:picLocks noChangeAspect="1"/>
           </p:cNvPicPr>
           <p:nvPr/>
         </p:nvPicPr>
         <p:blipFill>
-          <a:blip r:embed="rId1"/>
+          <a:blip r:embed="rId3"/>
           <a:stretch>
             <a:fillRect/>
           </a:stretch>
@@ -18142,7 +17595,7 @@
           <a:bodyPr wrap="square" lIns="0" tIns="0" rIns="0" bIns="0" rtlCol="0" anchor="ctr"/>
           <a:lstStyle/>
           <a:p>
-            <a:pPr indent="0" marL="0">
+            <a:pPr marL="0" indent="0">
               <a:buNone/>
             </a:pPr>
             <a:r>
@@ -18181,7 +17634,7 @@
           <a:bodyPr wrap="square" lIns="0" tIns="0" rIns="0" bIns="0" rtlCol="0" anchor="t"/>
           <a:lstStyle/>
           <a:p>
-            <a:pPr indent="0" marL="0">
+            <a:pPr marL="0" indent="0">
               <a:spcAft>
                 <a:spcPts val="600"/>
               </a:spcAft>
@@ -18201,7 +17654,7 @@
             <a:endParaRPr lang="en-US" sz="1200" dirty="0"/>
           </a:p>
           <a:p>
-            <a:pPr indent="0" marL="0">
+            <a:pPr marL="0" indent="0">
               <a:spcAft>
                 <a:spcPts val="600"/>
               </a:spcAft>
@@ -18221,7 +17674,7 @@
             <a:endParaRPr lang="en-US" sz="1200" dirty="0"/>
           </a:p>
           <a:p>
-            <a:pPr indent="0" marL="0">
+            <a:pPr marL="0" indent="0">
               <a:spcAft>
                 <a:spcPts val="600"/>
               </a:spcAft>
@@ -18296,14 +17749,14 @@
       </p:sp>
       <p:pic>
         <p:nvPicPr>
-          <p:cNvPr id="13" name="Image 1" descr="preencoded.png">    </p:cNvPr>
+          <p:cNvPr id="13" name="Image 1" descr="preencoded.png"/>
           <p:cNvPicPr>
             <a:picLocks noChangeAspect="1"/>
           </p:cNvPicPr>
           <p:nvPr/>
         </p:nvPicPr>
         <p:blipFill>
-          <a:blip r:embed="rId2"/>
+          <a:blip r:embed="rId4"/>
           <a:stretch>
             <a:fillRect/>
           </a:stretch>
@@ -18339,7 +17792,7 @@
           <a:bodyPr wrap="square" lIns="0" tIns="0" rIns="0" bIns="0" rtlCol="0" anchor="ctr"/>
           <a:lstStyle/>
           <a:p>
-            <a:pPr indent="0" marL="0">
+            <a:pPr marL="0" indent="0">
               <a:buNone/>
             </a:pPr>
             <a:r>
@@ -18378,7 +17831,7 @@
           <a:bodyPr wrap="square" lIns="0" tIns="0" rIns="0" bIns="0" rtlCol="0" anchor="t"/>
           <a:lstStyle/>
           <a:p>
-            <a:pPr indent="0" marL="0">
+            <a:pPr marL="0" indent="0">
               <a:spcAft>
                 <a:spcPts val="600"/>
               </a:spcAft>
@@ -18398,7 +17851,7 @@
             <a:endParaRPr lang="en-US" sz="1200" dirty="0"/>
           </a:p>
           <a:p>
-            <a:pPr indent="0" marL="0">
+            <a:pPr marL="0" indent="0">
               <a:spcAft>
                 <a:spcPts val="600"/>
               </a:spcAft>
@@ -18418,7 +17871,7 @@
             <a:endParaRPr lang="en-US" sz="1200" dirty="0"/>
           </a:p>
           <a:p>
-            <a:pPr indent="0" marL="0">
+            <a:pPr marL="0" indent="0">
               <a:spcAft>
                 <a:spcPts val="600"/>
               </a:spcAft>
@@ -18493,14 +17946,14 @@
       </p:sp>
       <p:pic>
         <p:nvPicPr>
-          <p:cNvPr id="18" name="Image 2" descr="preencoded.png">    </p:cNvPr>
+          <p:cNvPr id="18" name="Image 2" descr="preencoded.png"/>
           <p:cNvPicPr>
             <a:picLocks noChangeAspect="1"/>
           </p:cNvPicPr>
           <p:nvPr/>
         </p:nvPicPr>
         <p:blipFill>
-          <a:blip r:embed="rId3"/>
+          <a:blip r:embed="rId5"/>
           <a:stretch>
             <a:fillRect/>
           </a:stretch>
@@ -18536,7 +17989,7 @@
           <a:bodyPr wrap="square" lIns="0" tIns="0" rIns="0" bIns="0" rtlCol="0" anchor="ctr"/>
           <a:lstStyle/>
           <a:p>
-            <a:pPr indent="0" marL="0">
+            <a:pPr marL="0" indent="0">
               <a:buNone/>
             </a:pPr>
             <a:r>
@@ -18575,7 +18028,7 @@
           <a:bodyPr wrap="square" lIns="0" tIns="0" rIns="0" bIns="0" rtlCol="0" anchor="t"/>
           <a:lstStyle/>
           <a:p>
-            <a:pPr indent="0" marL="0">
+            <a:pPr marL="0" indent="0">
               <a:spcAft>
                 <a:spcPts val="600"/>
               </a:spcAft>
@@ -18595,7 +18048,7 @@
             <a:endParaRPr lang="en-US" sz="1200" dirty="0"/>
           </a:p>
           <a:p>
-            <a:pPr indent="0" marL="0">
+            <a:pPr marL="0" indent="0">
               <a:spcAft>
                 <a:spcPts val="600"/>
               </a:spcAft>
@@ -18615,7 +18068,7 @@
             <a:endParaRPr lang="en-US" sz="1200" dirty="0"/>
           </a:p>
           <a:p>
-            <a:pPr indent="0" marL="0">
+            <a:pPr marL="0" indent="0">
               <a:spcAft>
                 <a:spcPts val="600"/>
               </a:spcAft>
@@ -18657,7 +18110,7 @@
           <a:bodyPr wrap="square" lIns="0" tIns="0" rIns="0" bIns="0" rtlCol="0" anchor="t"/>
           <a:lstStyle/>
           <a:p>
-            <a:pPr indent="0" marL="0">
+            <a:pPr marL="0" indent="0">
               <a:spcAft>
                 <a:spcPts val="500"/>
               </a:spcAft>
@@ -18674,14 +18127,28 @@
               </a:rPr>
               <a:t>Automate when:</a:t>
             </a:r>
-            <a:pPr indent="0" marL="0">
+            <a:r>
+              <a:rPr lang="en-US" sz="1200" dirty="0">
+                <a:solidFill>
+                  <a:srgbClr val="1F2A44"/>
+                </a:solidFill>
+                <a:latin typeface="Calibri" pitchFamily="34" charset="0"/>
+                <a:ea typeface="Calibri" pitchFamily="34" charset="-122"/>
+                <a:cs typeface="Calibri" pitchFamily="34" charset="-120"/>
+              </a:rPr>
+              <a:t> it happens often · the rules are clear · the data is already digital.</a:t>
+            </a:r>
+            <a:endParaRPr lang="en-US" sz="1200" dirty="0"/>
+          </a:p>
+          <a:p>
+            <a:pPr marL="0" indent="0">
               <a:spcAft>
                 <a:spcPts val="500"/>
               </a:spcAft>
               <a:buNone/>
             </a:pPr>
             <a:r>
-              <a:rPr lang="en-US" sz="1200" dirty="0">
+              <a:rPr lang="en-US" sz="1200" b="1" dirty="0">
                 <a:solidFill>
                   <a:srgbClr val="1F2A44"/>
                 </a:solidFill>
@@ -18689,34 +18156,8 @@
                 <a:ea typeface="Calibri" pitchFamily="34" charset="-122"/>
                 <a:cs typeface="Calibri" pitchFamily="34" charset="-120"/>
               </a:rPr>
-              <a:t> it happens often · the rules are clear · the data is already digital.</a:t>
-            </a:r>
-            <a:endParaRPr lang="en-US" sz="1200" dirty="0"/>
-          </a:p>
-          <a:p>
-            <a:pPr indent="0" marL="0">
-              <a:spcAft>
-                <a:spcPts val="500"/>
-              </a:spcAft>
-              <a:buNone/>
-            </a:pPr>
-            <a:r>
-              <a:rPr lang="en-US" sz="1200" b="1" dirty="0">
-                <a:solidFill>
-                  <a:srgbClr val="1F2A44"/>
-                </a:solidFill>
-                <a:latin typeface="Calibri" pitchFamily="34" charset="0"/>
-                <a:ea typeface="Calibri" pitchFamily="34" charset="-122"/>
-                <a:cs typeface="Calibri" pitchFamily="34" charset="-120"/>
-              </a:rPr>
               <a:t>Keep a human in the loop when:</a:t>
             </a:r>
-            <a:pPr indent="0" marL="0">
-              <a:spcAft>
-                <a:spcPts val="500"/>
-              </a:spcAft>
-              <a:buNone/>
-            </a:pPr>
             <a:r>
               <a:rPr lang="en-US" sz="1200" dirty="0">
                 <a:solidFill>
@@ -18748,6 +18189,7 @@
         <a:solidFill>
           <a:srgbClr val="FFFFFF"/>
         </a:solidFill>
+        <a:effectLst/>
       </p:bgPr>
     </p:bg>
     <p:spTree>
@@ -18785,7 +18227,7 @@
           <a:bodyPr wrap="square" lIns="0" tIns="0" rIns="0" bIns="0" rtlCol="0" anchor="t"/>
           <a:lstStyle/>
           <a:p>
-            <a:pPr algn="r" indent="0" marL="0">
+            <a:pPr marL="0" indent="0" algn="r">
               <a:buNone/>
             </a:pPr>
             <a:r>
@@ -18824,7 +18266,7 @@
           <a:bodyPr wrap="square" lIns="0" tIns="0" rIns="0" bIns="0" rtlCol="0" anchor="ctr"/>
           <a:lstStyle/>
           <a:p>
-            <a:pPr indent="0" marL="0">
+            <a:pPr marL="0" indent="0">
               <a:buNone/>
             </a:pPr>
             <a:r>
@@ -18863,7 +18305,7 @@
           <a:bodyPr wrap="square" lIns="0" tIns="0" rIns="0" bIns="0" rtlCol="0" anchor="t"/>
           <a:lstStyle/>
           <a:p>
-            <a:pPr indent="0" marL="0">
+            <a:pPr marL="0" indent="0">
               <a:buNone/>
             </a:pPr>
             <a:r>
@@ -18908,14 +18350,14 @@
       </p:sp>
       <p:pic>
         <p:nvPicPr>
-          <p:cNvPr id="7" name="Image 0" descr="preencoded.png">    </p:cNvPr>
+          <p:cNvPr id="7" name="Image 0" descr="preencoded.png"/>
           <p:cNvPicPr>
             <a:picLocks noChangeAspect="1"/>
           </p:cNvPicPr>
           <p:nvPr/>
         </p:nvPicPr>
         <p:blipFill>
-          <a:blip r:embed="rId1"/>
+          <a:blip r:embed="rId3"/>
           <a:stretch>
             <a:fillRect/>
           </a:stretch>
@@ -18951,7 +18393,7 @@
           <a:bodyPr wrap="square" lIns="0" tIns="0" rIns="0" bIns="0" rtlCol="0" anchor="t"/>
           <a:lstStyle/>
           <a:p>
-            <a:pPr indent="0" marL="0">
+            <a:pPr marL="0" indent="0">
               <a:buNone/>
             </a:pPr>
             <a:r>
@@ -18968,7 +18410,7 @@
             <a:endParaRPr lang="en-US" sz="1400" dirty="0"/>
           </a:p>
           <a:p>
-            <a:pPr indent="0" marL="0">
+            <a:pPr marL="0" indent="0">
               <a:buNone/>
             </a:pPr>
             <a:r>
@@ -18982,9 +18424,6 @@
               </a:rPr>
               <a:t>{{ $json.email }}</a:t>
             </a:r>
-            <a:pPr indent="0" marL="0">
-              <a:buNone/>
-            </a:pPr>
             <a:r>
               <a:rPr lang="en-US" sz="1200" dirty="0">
                 <a:solidFill>
@@ -19027,14 +18466,14 @@
       </p:sp>
       <p:pic>
         <p:nvPicPr>
-          <p:cNvPr id="10" name="Image 1" descr="preencoded.png">    </p:cNvPr>
+          <p:cNvPr id="10" name="Image 1" descr="preencoded.png"/>
           <p:cNvPicPr>
             <a:picLocks noChangeAspect="1"/>
           </p:cNvPicPr>
           <p:nvPr/>
         </p:nvPicPr>
         <p:blipFill>
-          <a:blip r:embed="rId2"/>
+          <a:blip r:embed="rId4"/>
           <a:stretch>
             <a:fillRect/>
           </a:stretch>
@@ -19070,7 +18509,7 @@
           <a:bodyPr wrap="square" lIns="0" tIns="0" rIns="0" bIns="0" rtlCol="0" anchor="t"/>
           <a:lstStyle/>
           <a:p>
-            <a:pPr indent="0" marL="0">
+            <a:pPr marL="0" indent="0">
               <a:buNone/>
             </a:pPr>
             <a:r>
@@ -19087,7 +18526,7 @@
             <a:endParaRPr lang="en-US" sz="1400" dirty="0"/>
           </a:p>
           <a:p>
-            <a:pPr indent="0" marL="0">
+            <a:pPr marL="0" indent="0">
               <a:buNone/>
             </a:pPr>
             <a:r>
@@ -19132,14 +18571,14 @@
       </p:sp>
       <p:pic>
         <p:nvPicPr>
-          <p:cNvPr id="13" name="Image 2" descr="preencoded.png">    </p:cNvPr>
+          <p:cNvPr id="13" name="Image 2" descr="preencoded.png"/>
           <p:cNvPicPr>
             <a:picLocks noChangeAspect="1"/>
           </p:cNvPicPr>
           <p:nvPr/>
         </p:nvPicPr>
         <p:blipFill>
-          <a:blip r:embed="rId3"/>
+          <a:blip r:embed="rId5"/>
           <a:stretch>
             <a:fillRect/>
           </a:stretch>
@@ -19175,7 +18614,7 @@
           <a:bodyPr wrap="square" lIns="0" tIns="0" rIns="0" bIns="0" rtlCol="0" anchor="t"/>
           <a:lstStyle/>
           <a:p>
-            <a:pPr indent="0" marL="0">
+            <a:pPr marL="0" indent="0">
               <a:buNone/>
             </a:pPr>
             <a:r>
@@ -19192,7 +18631,7 @@
             <a:endParaRPr lang="en-US" sz="1400" dirty="0"/>
           </a:p>
           <a:p>
-            <a:pPr indent="0" marL="0">
+            <a:pPr marL="0" indent="0">
               <a:buNone/>
             </a:pPr>
             <a:r>
@@ -19206,9 +18645,6 @@
               </a:rPr>
               <a:t>{{ $now }}</a:t>
             </a:r>
-            <a:pPr indent="0" marL="0">
-              <a:buNone/>
-            </a:pPr>
             <a:r>
               <a:rPr lang="en-US" sz="1200" dirty="0">
                 <a:solidFill>
@@ -19220,9 +18656,6 @@
               </a:rPr>
               <a:t>, </a:t>
             </a:r>
-            <a:pPr indent="0" marL="0">
-              <a:buNone/>
-            </a:pPr>
             <a:r>
               <a:rPr lang="en-US" sz="1200" b="1" dirty="0">
                 <a:solidFill>
@@ -19234,9 +18667,6 @@
               </a:rPr>
               <a:t>{{ $today.minus({days: 1}) }}</a:t>
             </a:r>
-            <a:pPr indent="0" marL="0">
-              <a:buNone/>
-            </a:pPr>
             <a:r>
               <a:rPr lang="en-US" sz="1200" dirty="0">
                 <a:solidFill>
@@ -19279,14 +18709,14 @@
       </p:sp>
       <p:pic>
         <p:nvPicPr>
-          <p:cNvPr id="16" name="Image 3" descr="preencoded.png">    </p:cNvPr>
+          <p:cNvPr id="16" name="Image 3" descr="preencoded.png"/>
           <p:cNvPicPr>
             <a:picLocks noChangeAspect="1"/>
           </p:cNvPicPr>
           <p:nvPr/>
         </p:nvPicPr>
         <p:blipFill>
-          <a:blip r:embed="rId4"/>
+          <a:blip r:embed="rId6"/>
           <a:stretch>
             <a:fillRect/>
           </a:stretch>
@@ -19322,7 +18752,7 @@
           <a:bodyPr wrap="square" lIns="0" tIns="0" rIns="0" bIns="0" rtlCol="0" anchor="t"/>
           <a:lstStyle/>
           <a:p>
-            <a:pPr indent="0" marL="0">
+            <a:pPr marL="0" indent="0">
               <a:buNone/>
             </a:pPr>
             <a:r>
@@ -19339,7 +18769,7 @@
             <a:endParaRPr lang="en-US" sz="1400" dirty="0"/>
           </a:p>
           <a:p>
-            <a:pPr indent="0" marL="0">
+            <a:pPr marL="0" indent="0">
               <a:buNone/>
             </a:pPr>
             <a:r>
@@ -19378,7 +18808,7 @@
           <a:bodyPr wrap="square" lIns="0" tIns="0" rIns="0" bIns="0" rtlCol="0" anchor="t"/>
           <a:lstStyle/>
           <a:p>
-            <a:pPr indent="0" marL="0">
+            <a:pPr marL="0" indent="0">
               <a:buNone/>
             </a:pPr>
             <a:r>
@@ -19444,7 +18874,7 @@
           <a:bodyPr wrap="square" lIns="0" tIns="0" rIns="0" bIns="0" rtlCol="0" anchor="t"/>
           <a:lstStyle/>
           <a:p>
-            <a:pPr indent="0" marL="0">
+            <a:pPr marL="0" indent="0">
               <a:buNone/>
             </a:pPr>
             <a:r>
@@ -19461,7 +18891,7 @@
             <a:endParaRPr lang="en-US" sz="1000" dirty="0"/>
           </a:p>
           <a:p>
-            <a:pPr indent="0" marL="0">
+            <a:pPr marL="0" indent="0">
               <a:buNone/>
             </a:pPr>
             <a:r>
@@ -19478,7 +18908,7 @@
             <a:endParaRPr lang="en-US" sz="1000" dirty="0"/>
           </a:p>
           <a:p>
-            <a:pPr indent="0" marL="0">
+            <a:pPr marL="0" indent="0">
               <a:buNone/>
             </a:pPr>
             <a:r>
@@ -19495,7 +18925,7 @@
             <a:endParaRPr lang="en-US" sz="1000" dirty="0"/>
           </a:p>
           <a:p>
-            <a:pPr indent="0" marL="0">
+            <a:pPr marL="0" indent="0">
               <a:buNone/>
             </a:pPr>
             <a:r>
@@ -19512,7 +18942,7 @@
             <a:endParaRPr lang="en-US" sz="1000" dirty="0"/>
           </a:p>
           <a:p>
-            <a:pPr indent="0" marL="0">
+            <a:pPr marL="0" indent="0">
               <a:buNone/>
             </a:pPr>
             <a:r>
@@ -19529,7 +18959,7 @@
             <a:endParaRPr lang="en-US" sz="1000" dirty="0"/>
           </a:p>
           <a:p>
-            <a:pPr indent="0" marL="0">
+            <a:pPr marL="0" indent="0">
               <a:buNone/>
             </a:pPr>
             <a:r>
@@ -19546,7 +18976,7 @@
             <a:endParaRPr lang="en-US" sz="1000" dirty="0"/>
           </a:p>
           <a:p>
-            <a:pPr indent="0" marL="0">
+            <a:pPr marL="0" indent="0">
               <a:buNone/>
             </a:pPr>
             <a:r>
@@ -19563,7 +18993,7 @@
             <a:endParaRPr lang="en-US" sz="1000" dirty="0"/>
           </a:p>
           <a:p>
-            <a:pPr indent="0" marL="0">
+            <a:pPr marL="0" indent="0">
               <a:buNone/>
             </a:pPr>
             <a:r>
@@ -19580,7 +19010,7 @@
             <a:endParaRPr lang="en-US" sz="1000" dirty="0"/>
           </a:p>
           <a:p>
-            <a:pPr indent="0" marL="0">
+            <a:pPr marL="0" indent="0">
               <a:buNone/>
             </a:pPr>
             <a:r>
@@ -19614,6 +19044,7 @@
         <a:solidFill>
           <a:srgbClr val="FFFFFF"/>
         </a:solidFill>
+        <a:effectLst/>
       </p:bgPr>
     </p:bg>
     <p:spTree>
@@ -19651,7 +19082,7 @@
           <a:bodyPr wrap="square" lIns="0" tIns="0" rIns="0" bIns="0" rtlCol="0" anchor="t"/>
           <a:lstStyle/>
           <a:p>
-            <a:pPr algn="r" indent="0" marL="0">
+            <a:pPr marL="0" indent="0" algn="r">
               <a:buNone/>
             </a:pPr>
             <a:r>
@@ -19690,7 +19121,7 @@
           <a:bodyPr wrap="square" lIns="0" tIns="0" rIns="0" bIns="0" rtlCol="0" anchor="ctr"/>
           <a:lstStyle/>
           <a:p>
-            <a:pPr indent="0" marL="0">
+            <a:pPr marL="0" indent="0">
               <a:buNone/>
             </a:pPr>
             <a:r>
@@ -19729,7 +19160,7 @@
           <a:bodyPr wrap="square" lIns="0" tIns="0" rIns="0" bIns="0" rtlCol="0" anchor="t"/>
           <a:lstStyle/>
           <a:p>
-            <a:pPr indent="0" marL="0">
+            <a:pPr marL="0" indent="0">
               <a:buNone/>
             </a:pPr>
             <a:r>
@@ -19801,14 +19232,14 @@
       </p:sp>
       <p:pic>
         <p:nvPicPr>
-          <p:cNvPr id="7" name="Image 0" descr="preencoded.png">    </p:cNvPr>
+          <p:cNvPr id="7" name="Image 0" descr="preencoded.png"/>
           <p:cNvPicPr>
             <a:picLocks noChangeAspect="1"/>
           </p:cNvPicPr>
           <p:nvPr/>
         </p:nvPicPr>
         <p:blipFill>
-          <a:blip r:embed="rId1"/>
+          <a:blip r:embed="rId3"/>
           <a:stretch>
             <a:fillRect/>
           </a:stretch>
@@ -19844,7 +19275,7 @@
           <a:bodyPr wrap="square" lIns="0" tIns="0" rIns="0" bIns="0" rtlCol="0" anchor="ctr"/>
           <a:lstStyle/>
           <a:p>
-            <a:pPr indent="0" marL="0">
+            <a:pPr marL="0" indent="0">
               <a:buNone/>
             </a:pPr>
             <a:r>
@@ -19883,7 +19314,7 @@
           <a:bodyPr wrap="square" lIns="0" tIns="0" rIns="0" bIns="0" rtlCol="0" anchor="t"/>
           <a:lstStyle/>
           <a:p>
-            <a:pPr indent="0" marL="0">
+            <a:pPr marL="0" indent="0">
               <a:spcAft>
                 <a:spcPts val="300"/>
               </a:spcAft>
@@ -19900,12 +19331,6 @@
               </a:rPr>
               <a:t>Two paths: true and false. Example: </a:t>
             </a:r>
-            <a:pPr indent="0" marL="0">
-              <a:spcAft>
-                <a:spcPts val="300"/>
-              </a:spcAft>
-              <a:buNone/>
-            </a:pPr>
             <a:r>
               <a:rPr lang="en-US" sz="1200" b="1" dirty="0">
                 <a:solidFill>
@@ -19917,12 +19342,6 @@
               </a:rPr>
               <a:t>amount &gt; 5000</a:t>
             </a:r>
-            <a:pPr indent="0" marL="0">
-              <a:spcAft>
-                <a:spcPts val="300"/>
-              </a:spcAft>
-              <a:buNone/>
-            </a:pPr>
             <a:r>
               <a:rPr lang="en-US" sz="1200" dirty="0">
                 <a:solidFill>
@@ -19992,14 +19411,14 @@
       </p:sp>
       <p:pic>
         <p:nvPicPr>
-          <p:cNvPr id="12" name="Image 1" descr="preencoded.png">    </p:cNvPr>
+          <p:cNvPr id="12" name="Image 1" descr="preencoded.png"/>
           <p:cNvPicPr>
             <a:picLocks noChangeAspect="1"/>
           </p:cNvPicPr>
           <p:nvPr/>
         </p:nvPicPr>
         <p:blipFill>
-          <a:blip r:embed="rId2"/>
+          <a:blip r:embed="rId4"/>
           <a:stretch>
             <a:fillRect/>
           </a:stretch>
@@ -20035,7 +19454,7 @@
           <a:bodyPr wrap="square" lIns="0" tIns="0" rIns="0" bIns="0" rtlCol="0" anchor="ctr"/>
           <a:lstStyle/>
           <a:p>
-            <a:pPr indent="0" marL="0">
+            <a:pPr marL="0" indent="0">
               <a:buNone/>
             </a:pPr>
             <a:r>
@@ -20074,7 +19493,7 @@
           <a:bodyPr wrap="square" lIns="0" tIns="0" rIns="0" bIns="0" rtlCol="0" anchor="t"/>
           <a:lstStyle/>
           <a:p>
-            <a:pPr indent="0" marL="0">
+            <a:pPr marL="0" indent="0">
               <a:spcAft>
                 <a:spcPts val="300"/>
               </a:spcAft>
@@ -20149,14 +19568,14 @@
       </p:sp>
       <p:pic>
         <p:nvPicPr>
-          <p:cNvPr id="17" name="Image 2" descr="preencoded.png">    </p:cNvPr>
+          <p:cNvPr id="17" name="Image 2" descr="preencoded.png"/>
           <p:cNvPicPr>
             <a:picLocks noChangeAspect="1"/>
           </p:cNvPicPr>
           <p:nvPr/>
         </p:nvPicPr>
         <p:blipFill>
-          <a:blip r:embed="rId3"/>
+          <a:blip r:embed="rId5"/>
           <a:stretch>
             <a:fillRect/>
           </a:stretch>
@@ -20192,7 +19611,7 @@
           <a:bodyPr wrap="square" lIns="0" tIns="0" rIns="0" bIns="0" rtlCol="0" anchor="ctr"/>
           <a:lstStyle/>
           <a:p>
-            <a:pPr indent="0" marL="0">
+            <a:pPr marL="0" indent="0">
               <a:buNone/>
             </a:pPr>
             <a:r>
@@ -20231,7 +19650,7 @@
           <a:bodyPr wrap="square" lIns="0" tIns="0" rIns="0" bIns="0" rtlCol="0" anchor="t"/>
           <a:lstStyle/>
           <a:p>
-            <a:pPr indent="0" marL="0">
+            <a:pPr marL="0" indent="0">
               <a:spcAft>
                 <a:spcPts val="300"/>
               </a:spcAft>
@@ -20248,12 +19667,6 @@
               </a:rPr>
               <a:t>Drops items that fail a condition. Example: keep only </a:t>
             </a:r>
-            <a:pPr indent="0" marL="0">
-              <a:spcAft>
-                <a:spcPts val="300"/>
-              </a:spcAft>
-              <a:buNone/>
-            </a:pPr>
             <a:r>
               <a:rPr lang="en-US" sz="1200" b="1" dirty="0">
                 <a:solidFill>
@@ -20265,12 +19678,6 @@
               </a:rPr>
               <a:t>status = Open</a:t>
             </a:r>
-            <a:pPr indent="0" marL="0">
-              <a:spcAft>
-                <a:spcPts val="300"/>
-              </a:spcAft>
-              <a:buNone/>
-            </a:pPr>
             <a:r>
               <a:rPr lang="en-US" sz="1200" dirty="0">
                 <a:solidFill>
@@ -20340,14 +19747,14 @@
       </p:sp>
       <p:pic>
         <p:nvPicPr>
-          <p:cNvPr id="22" name="Image 3" descr="preencoded.png">    </p:cNvPr>
+          <p:cNvPr id="22" name="Image 3" descr="preencoded.png"/>
           <p:cNvPicPr>
             <a:picLocks noChangeAspect="1"/>
           </p:cNvPicPr>
           <p:nvPr/>
         </p:nvPicPr>
         <p:blipFill>
-          <a:blip r:embed="rId4"/>
+          <a:blip r:embed="rId6"/>
           <a:stretch>
             <a:fillRect/>
           </a:stretch>
@@ -20383,7 +19790,7 @@
           <a:bodyPr wrap="square" lIns="0" tIns="0" rIns="0" bIns="0" rtlCol="0" anchor="ctr"/>
           <a:lstStyle/>
           <a:p>
-            <a:pPr indent="0" marL="0">
+            <a:pPr marL="0" indent="0">
               <a:buNone/>
             </a:pPr>
             <a:r>
@@ -20422,7 +19829,7 @@
           <a:bodyPr wrap="square" lIns="0" tIns="0" rIns="0" bIns="0" rtlCol="0" anchor="t"/>
           <a:lstStyle/>
           <a:p>
-            <a:pPr indent="0" marL="0">
+            <a:pPr marL="0" indent="0">
               <a:spcAft>
                 <a:spcPts val="300"/>
               </a:spcAft>
@@ -20439,12 +19846,6 @@
               </a:rPr>
               <a:t>Joins two branches into one — by position, or by matching a field like </a:t>
             </a:r>
-            <a:pPr indent="0" marL="0">
-              <a:spcAft>
-                <a:spcPts val="300"/>
-              </a:spcAft>
-              <a:buNone/>
-            </a:pPr>
             <a:r>
               <a:rPr lang="en-US" sz="1200" b="1" dirty="0">
                 <a:solidFill>
@@ -20456,12 +19857,6 @@
               </a:rPr>
               <a:t>email</a:t>
             </a:r>
-            <a:pPr indent="0" marL="0">
-              <a:spcAft>
-                <a:spcPts val="300"/>
-              </a:spcAft>
-              <a:buNone/>
-            </a:pPr>
             <a:r>
               <a:rPr lang="en-US" sz="1200" dirty="0">
                 <a:solidFill>
@@ -20493,6 +19888,7 @@
         <a:solidFill>
           <a:srgbClr val="FFFFFF"/>
         </a:solidFill>
+        <a:effectLst/>
       </p:bgPr>
     </p:bg>
     <p:spTree>
@@ -20530,7 +19926,7 @@
           <a:bodyPr wrap="square" lIns="0" tIns="0" rIns="0" bIns="0" rtlCol="0" anchor="t"/>
           <a:lstStyle/>
           <a:p>
-            <a:pPr algn="r" indent="0" marL="0">
+            <a:pPr marL="0" indent="0" algn="r">
               <a:buNone/>
             </a:pPr>
             <a:r>
@@ -20569,7 +19965,7 @@
           <a:bodyPr wrap="square" lIns="0" tIns="0" rIns="0" bIns="0" rtlCol="0" anchor="ctr"/>
           <a:lstStyle/>
           <a:p>
-            <a:pPr indent="0" marL="0">
+            <a:pPr marL="0" indent="0">
               <a:buNone/>
             </a:pPr>
             <a:r>
@@ -20608,7 +20004,7 @@
           <a:bodyPr wrap="square" lIns="0" tIns="0" rIns="0" bIns="0" rtlCol="0" anchor="t"/>
           <a:lstStyle/>
           <a:p>
-            <a:pPr indent="0" marL="0">
+            <a:pPr marL="0" indent="0">
               <a:buNone/>
             </a:pPr>
             <a:r>
@@ -20680,14 +20076,14 @@
       </p:sp>
       <p:pic>
         <p:nvPicPr>
-          <p:cNvPr id="7" name="Image 0" descr="preencoded.png">    </p:cNvPr>
+          <p:cNvPr id="7" name="Image 0" descr="preencoded.png"/>
           <p:cNvPicPr>
             <a:picLocks noChangeAspect="1"/>
           </p:cNvPicPr>
           <p:nvPr/>
         </p:nvPicPr>
         <p:blipFill>
-          <a:blip r:embed="rId1"/>
+          <a:blip r:embed="rId3"/>
           <a:stretch>
             <a:fillRect/>
           </a:stretch>
@@ -20723,7 +20119,7 @@
           <a:bodyPr wrap="square" lIns="0" tIns="0" rIns="0" bIns="0" rtlCol="0" anchor="ctr"/>
           <a:lstStyle/>
           <a:p>
-            <a:pPr indent="0" marL="0">
+            <a:pPr marL="0" indent="0">
               <a:buNone/>
             </a:pPr>
             <a:r>
@@ -20762,7 +20158,7 @@
           <a:bodyPr wrap="square" lIns="0" tIns="0" rIns="0" bIns="0" rtlCol="0" anchor="t"/>
           <a:lstStyle/>
           <a:p>
-            <a:pPr indent="0" marL="0">
+            <a:pPr marL="0" indent="0">
               <a:spcAft>
                 <a:spcPts val="300"/>
               </a:spcAft>
@@ -20837,14 +20233,14 @@
       </p:sp>
       <p:pic>
         <p:nvPicPr>
-          <p:cNvPr id="12" name="Image 1" descr="preencoded.png">    </p:cNvPr>
+          <p:cNvPr id="12" name="Image 1" descr="preencoded.png"/>
           <p:cNvPicPr>
             <a:picLocks noChangeAspect="1"/>
           </p:cNvPicPr>
           <p:nvPr/>
         </p:nvPicPr>
         <p:blipFill>
-          <a:blip r:embed="rId2"/>
+          <a:blip r:embed="rId4"/>
           <a:stretch>
             <a:fillRect/>
           </a:stretch>
@@ -20880,7 +20276,7 @@
           <a:bodyPr wrap="square" lIns="0" tIns="0" rIns="0" bIns="0" rtlCol="0" anchor="ctr"/>
           <a:lstStyle/>
           <a:p>
-            <a:pPr indent="0" marL="0">
+            <a:pPr marL="0" indent="0">
               <a:buNone/>
             </a:pPr>
             <a:r>
@@ -20919,7 +20315,7 @@
           <a:bodyPr wrap="square" lIns="0" tIns="0" rIns="0" bIns="0" rtlCol="0" anchor="t"/>
           <a:lstStyle/>
           <a:p>
-            <a:pPr indent="0" marL="0">
+            <a:pPr marL="0" indent="0">
               <a:spcAft>
                 <a:spcPts val="300"/>
               </a:spcAft>
@@ -20994,14 +20390,14 @@
       </p:sp>
       <p:pic>
         <p:nvPicPr>
-          <p:cNvPr id="17" name="Image 2" descr="preencoded.png">    </p:cNvPr>
+          <p:cNvPr id="17" name="Image 2" descr="preencoded.png"/>
           <p:cNvPicPr>
             <a:picLocks noChangeAspect="1"/>
           </p:cNvPicPr>
           <p:nvPr/>
         </p:nvPicPr>
         <p:blipFill>
-          <a:blip r:embed="rId3"/>
+          <a:blip r:embed="rId5"/>
           <a:stretch>
             <a:fillRect/>
           </a:stretch>
@@ -21037,7 +20433,7 @@
           <a:bodyPr wrap="square" lIns="0" tIns="0" rIns="0" bIns="0" rtlCol="0" anchor="ctr"/>
           <a:lstStyle/>
           <a:p>
-            <a:pPr indent="0" marL="0">
+            <a:pPr marL="0" indent="0">
               <a:buNone/>
             </a:pPr>
             <a:r>
@@ -21076,7 +20472,7 @@
           <a:bodyPr wrap="square" lIns="0" tIns="0" rIns="0" bIns="0" rtlCol="0" anchor="t"/>
           <a:lstStyle/>
           <a:p>
-            <a:pPr indent="0" marL="0">
+            <a:pPr marL="0" indent="0">
               <a:spcAft>
                 <a:spcPts val="300"/>
               </a:spcAft>
@@ -21151,14 +20547,14 @@
       </p:sp>
       <p:pic>
         <p:nvPicPr>
-          <p:cNvPr id="22" name="Image 3" descr="preencoded.png">    </p:cNvPr>
+          <p:cNvPr id="22" name="Image 3" descr="preencoded.png"/>
           <p:cNvPicPr>
             <a:picLocks noChangeAspect="1"/>
           </p:cNvPicPr>
           <p:nvPr/>
         </p:nvPicPr>
         <p:blipFill>
-          <a:blip r:embed="rId4"/>
+          <a:blip r:embed="rId6"/>
           <a:stretch>
             <a:fillRect/>
           </a:stretch>
@@ -21194,7 +20590,7 @@
           <a:bodyPr wrap="square" lIns="0" tIns="0" rIns="0" bIns="0" rtlCol="0" anchor="ctr"/>
           <a:lstStyle/>
           <a:p>
-            <a:pPr indent="0" marL="0">
+            <a:pPr marL="0" indent="0">
               <a:buNone/>
             </a:pPr>
             <a:r>
@@ -21233,7 +20629,7 @@
           <a:bodyPr wrap="square" lIns="0" tIns="0" rIns="0" bIns="0" rtlCol="0" anchor="t"/>
           <a:lstStyle/>
           <a:p>
-            <a:pPr indent="0" marL="0">
+            <a:pPr marL="0" indent="0">
               <a:spcAft>
                 <a:spcPts val="300"/>
               </a:spcAft>
@@ -21270,6 +20666,7 @@
         <a:solidFill>
           <a:srgbClr val="FFFFFF"/>
         </a:solidFill>
+        <a:effectLst/>
       </p:bgPr>
     </p:bg>
     <p:spTree>
@@ -21307,7 +20704,7 @@
           <a:bodyPr wrap="square" lIns="0" tIns="0" rIns="0" bIns="0" rtlCol="0" anchor="t"/>
           <a:lstStyle/>
           <a:p>
-            <a:pPr algn="r" indent="0" marL="0">
+            <a:pPr marL="0" indent="0" algn="r">
               <a:buNone/>
             </a:pPr>
             <a:r>
@@ -21346,7 +20743,7 @@
           <a:bodyPr wrap="square" lIns="0" tIns="0" rIns="0" bIns="0" rtlCol="0" anchor="ctr"/>
           <a:lstStyle/>
           <a:p>
-            <a:pPr indent="0" marL="0">
+            <a:pPr marL="0" indent="0">
               <a:buNone/>
             </a:pPr>
             <a:r>
@@ -21385,7 +20782,7 @@
           <a:bodyPr wrap="square" lIns="0" tIns="0" rIns="0" bIns="0" rtlCol="0" anchor="t"/>
           <a:lstStyle/>
           <a:p>
-            <a:pPr indent="0" marL="0">
+            <a:pPr marL="0" indent="0">
               <a:buNone/>
             </a:pPr>
             <a:r>
@@ -21430,14 +20827,14 @@
       </p:sp>
       <p:pic>
         <p:nvPicPr>
-          <p:cNvPr id="6" name="Image 0" descr="preencoded.png">    </p:cNvPr>
+          <p:cNvPr id="6" name="Image 0" descr="preencoded.png"/>
           <p:cNvPicPr>
             <a:picLocks noChangeAspect="1"/>
           </p:cNvPicPr>
           <p:nvPr/>
         </p:nvPicPr>
         <p:blipFill>
-          <a:blip r:embed="rId1"/>
+          <a:blip r:embed="rId3"/>
           <a:stretch>
             <a:fillRect/>
           </a:stretch>
@@ -21473,7 +20870,7 @@
           <a:bodyPr wrap="square" lIns="0" tIns="0" rIns="0" bIns="0" rtlCol="0" anchor="t"/>
           <a:lstStyle/>
           <a:p>
-            <a:pPr indent="0" marL="0">
+            <a:pPr marL="0" indent="0">
               <a:buNone/>
             </a:pPr>
             <a:r>
@@ -21490,7 +20887,7 @@
             <a:endParaRPr lang="en-US" sz="1400" dirty="0"/>
           </a:p>
           <a:p>
-            <a:pPr indent="0" marL="0">
+            <a:pPr marL="0" indent="0">
               <a:buNone/>
             </a:pPr>
             <a:r>
@@ -21504,9 +20901,6 @@
               </a:rPr>
               <a:t>Node </a:t>
             </a:r>
-            <a:pPr indent="0" marL="0">
-              <a:buNone/>
-            </a:pPr>
             <a:r>
               <a:rPr lang="en-US" sz="1200" b="1" dirty="0">
                 <a:solidFill>
@@ -21518,9 +20912,6 @@
               </a:rPr>
               <a:t>Settings</a:t>
             </a:r>
-            <a:pPr indent="0" marL="0">
-              <a:buNone/>
-            </a:pPr>
             <a:r>
               <a:rPr lang="en-US" sz="1200" dirty="0">
                 <a:solidFill>
@@ -21563,14 +20954,14 @@
       </p:sp>
       <p:pic>
         <p:nvPicPr>
-          <p:cNvPr id="9" name="Image 1" descr="preencoded.png">    </p:cNvPr>
+          <p:cNvPr id="9" name="Image 1" descr="preencoded.png"/>
           <p:cNvPicPr>
             <a:picLocks noChangeAspect="1"/>
           </p:cNvPicPr>
           <p:nvPr/>
         </p:nvPicPr>
         <p:blipFill>
-          <a:blip r:embed="rId2"/>
+          <a:blip r:embed="rId4"/>
           <a:stretch>
             <a:fillRect/>
           </a:stretch>
@@ -21606,7 +20997,7 @@
           <a:bodyPr wrap="square" lIns="0" tIns="0" rIns="0" bIns="0" rtlCol="0" anchor="t"/>
           <a:lstStyle/>
           <a:p>
-            <a:pPr indent="0" marL="0">
+            <a:pPr marL="0" indent="0">
               <a:buNone/>
             </a:pPr>
             <a:r>
@@ -21623,7 +21014,7 @@
             <a:endParaRPr lang="en-US" sz="1400" dirty="0"/>
           </a:p>
           <a:p>
-            <a:pPr indent="0" marL="0">
+            <a:pPr marL="0" indent="0">
               <a:buNone/>
             </a:pPr>
             <a:r>
@@ -21668,14 +21059,14 @@
       </p:sp>
       <p:pic>
         <p:nvPicPr>
-          <p:cNvPr id="12" name="Image 2" descr="preencoded.png">    </p:cNvPr>
+          <p:cNvPr id="12" name="Image 2" descr="preencoded.png"/>
           <p:cNvPicPr>
             <a:picLocks noChangeAspect="1"/>
           </p:cNvPicPr>
           <p:nvPr/>
         </p:nvPicPr>
         <p:blipFill>
-          <a:blip r:embed="rId3"/>
+          <a:blip r:embed="rId5"/>
           <a:stretch>
             <a:fillRect/>
           </a:stretch>
@@ -21711,7 +21102,7 @@
           <a:bodyPr wrap="square" lIns="0" tIns="0" rIns="0" bIns="0" rtlCol="0" anchor="t"/>
           <a:lstStyle/>
           <a:p>
-            <a:pPr indent="0" marL="0">
+            <a:pPr marL="0" indent="0">
               <a:buNone/>
             </a:pPr>
             <a:r>
@@ -21728,7 +21119,7 @@
             <a:endParaRPr lang="en-US" sz="1400" dirty="0"/>
           </a:p>
           <a:p>
-            <a:pPr indent="0" marL="0">
+            <a:pPr marL="0" indent="0">
               <a:buNone/>
             </a:pPr>
             <a:r>
@@ -21742,9 +21133,6 @@
               </a:rPr>
               <a:t>Workflow </a:t>
             </a:r>
-            <a:pPr indent="0" marL="0">
-              <a:buNone/>
-            </a:pPr>
             <a:r>
               <a:rPr lang="en-US" sz="1200" b="1" dirty="0">
                 <a:solidFill>
@@ -21756,9 +21144,6 @@
               </a:rPr>
               <a:t>Settings → Error workflow</a:t>
             </a:r>
-            <a:pPr indent="0" marL="0">
-              <a:buNone/>
-            </a:pPr>
             <a:r>
               <a:rPr lang="en-US" sz="1200" dirty="0">
                 <a:solidFill>
@@ -21801,14 +21186,14 @@
       </p:sp>
       <p:pic>
         <p:nvPicPr>
-          <p:cNvPr id="15" name="Image 3" descr="preencoded.png">    </p:cNvPr>
+          <p:cNvPr id="15" name="Image 3" descr="preencoded.png"/>
           <p:cNvPicPr>
             <a:picLocks noChangeAspect="1"/>
           </p:cNvPicPr>
           <p:nvPr/>
         </p:nvPicPr>
         <p:blipFill>
-          <a:blip r:embed="rId4"/>
+          <a:blip r:embed="rId6"/>
           <a:stretch>
             <a:fillRect/>
           </a:stretch>
@@ -21844,7 +21229,7 @@
           <a:bodyPr wrap="square" lIns="0" tIns="0" rIns="0" bIns="0" rtlCol="0" anchor="t"/>
           <a:lstStyle/>
           <a:p>
-            <a:pPr indent="0" marL="0">
+            <a:pPr marL="0" indent="0">
               <a:buNone/>
             </a:pPr>
             <a:r>
@@ -21861,7 +21246,7 @@
             <a:endParaRPr lang="en-US" sz="1400" dirty="0"/>
           </a:p>
           <a:p>
-            <a:pPr indent="0" marL="0">
+            <a:pPr marL="0" indent="0">
               <a:buNone/>
             </a:pPr>
             <a:r>
@@ -21895,6 +21280,7 @@
         <a:solidFill>
           <a:srgbClr val="FFFFFF"/>
         </a:solidFill>
+        <a:effectLst/>
       </p:bgPr>
     </p:bg>
     <p:spTree>
@@ -21932,7 +21318,7 @@
           <a:bodyPr wrap="square" lIns="0" tIns="0" rIns="0" bIns="0" rtlCol="0" anchor="t"/>
           <a:lstStyle/>
           <a:p>
-            <a:pPr algn="r" indent="0" marL="0">
+            <a:pPr marL="0" indent="0" algn="r">
               <a:buNone/>
             </a:pPr>
             <a:r>
@@ -21971,7 +21357,7 @@
           <a:bodyPr wrap="square" lIns="0" tIns="0" rIns="0" bIns="0" rtlCol="0" anchor="ctr"/>
           <a:lstStyle/>
           <a:p>
-            <a:pPr indent="0" marL="0">
+            <a:pPr marL="0" indent="0">
               <a:buNone/>
             </a:pPr>
             <a:r>
@@ -22010,7 +21396,7 @@
           <a:bodyPr wrap="square" lIns="0" tIns="0" rIns="0" bIns="0" rtlCol="0" anchor="t"/>
           <a:lstStyle/>
           <a:p>
-            <a:pPr indent="0" marL="0">
+            <a:pPr marL="0" indent="0">
               <a:buNone/>
             </a:pPr>
             <a:r>
@@ -22074,7 +21460,7 @@
           <a:bodyPr wrap="square" lIns="0" tIns="0" rIns="0" bIns="0" rtlCol="0" anchor="ctr"/>
           <a:lstStyle/>
           <a:p>
-            <a:pPr algn="ctr" indent="0" marL="0">
+            <a:pPr marL="0" indent="0" algn="ctr">
               <a:buNone/>
             </a:pPr>
             <a:r>
@@ -22113,7 +21499,7 @@
           <a:bodyPr wrap="square" lIns="0" tIns="0" rIns="0" bIns="0" rtlCol="0" anchor="ctr"/>
           <a:lstStyle/>
           <a:p>
-            <a:pPr indent="0" marL="0">
+            <a:pPr marL="0" indent="0">
               <a:buNone/>
             </a:pPr>
             <a:r>
@@ -22177,7 +21563,7 @@
           <a:bodyPr wrap="square" lIns="0" tIns="0" rIns="0" bIns="0" rtlCol="0" anchor="ctr"/>
           <a:lstStyle/>
           <a:p>
-            <a:pPr algn="ctr" indent="0" marL="0">
+            <a:pPr marL="0" indent="0" algn="ctr">
               <a:buNone/>
             </a:pPr>
             <a:r>
@@ -22216,7 +21602,7 @@
           <a:bodyPr wrap="square" lIns="0" tIns="0" rIns="0" bIns="0" rtlCol="0" anchor="ctr"/>
           <a:lstStyle/>
           <a:p>
-            <a:pPr indent="0" marL="0">
+            <a:pPr marL="0" indent="0">
               <a:buNone/>
             </a:pPr>
             <a:r>
@@ -22230,9 +21616,6 @@
               </a:rPr>
               <a:t>Load </a:t>
             </a:r>
-            <a:pPr indent="0" marL="0">
-              <a:buNone/>
-            </a:pPr>
             <a:r>
               <a:rPr lang="en-US" sz="1250" b="1" dirty="0">
                 <a:solidFill>
@@ -22244,9 +21627,6 @@
               </a:rPr>
               <a:t>m2_schema.sql</a:t>
             </a:r>
-            <a:pPr indent="0" marL="0">
-              <a:buNone/>
-            </a:pPr>
             <a:r>
               <a:rPr lang="en-US" sz="1250" dirty="0">
                 <a:solidFill>
@@ -22258,9 +21638,6 @@
               </a:rPr>
               <a:t>: tables </a:t>
             </a:r>
-            <a:pPr indent="0" marL="0">
-              <a:buNone/>
-            </a:pPr>
             <a:r>
               <a:rPr lang="en-US" sz="1250" b="1" dirty="0">
                 <a:solidFill>
@@ -22272,9 +21649,6 @@
               </a:rPr>
               <a:t>leads</a:t>
             </a:r>
-            <a:pPr indent="0" marL="0">
-              <a:buNone/>
-            </a:pPr>
             <a:r>
               <a:rPr lang="en-US" sz="1250" dirty="0">
                 <a:solidFill>
@@ -22286,9 +21660,6 @@
               </a:rPr>
               <a:t>, </a:t>
             </a:r>
-            <a:pPr indent="0" marL="0">
-              <a:buNone/>
-            </a:pPr>
             <a:r>
               <a:rPr lang="en-US" sz="1250" b="1" dirty="0">
                 <a:solidFill>
@@ -22300,9 +21671,6 @@
               </a:rPr>
               <a:t>expenses</a:t>
             </a:r>
-            <a:pPr indent="0" marL="0">
-              <a:buNone/>
-            </a:pPr>
             <a:r>
               <a:rPr lang="en-US" sz="1250" dirty="0">
                 <a:solidFill>
@@ -22314,9 +21682,6 @@
               </a:rPr>
               <a:t>, </a:t>
             </a:r>
-            <a:pPr indent="0" marL="0">
-              <a:buNone/>
-            </a:pPr>
             <a:r>
               <a:rPr lang="en-US" sz="1250" b="1" dirty="0">
                 <a:solidFill>
@@ -22328,9 +21693,6 @@
               </a:rPr>
               <a:t>sales</a:t>
             </a:r>
-            <a:pPr indent="0" marL="0">
-              <a:buNone/>
-            </a:pPr>
             <a:r>
               <a:rPr lang="en-US" sz="1250" dirty="0">
                 <a:solidFill>
@@ -22392,7 +21754,7 @@
           <a:bodyPr wrap="square" lIns="0" tIns="0" rIns="0" bIns="0" rtlCol="0" anchor="ctr"/>
           <a:lstStyle/>
           <a:p>
-            <a:pPr algn="ctr" indent="0" marL="0">
+            <a:pPr marL="0" indent="0" algn="ctr">
               <a:buNone/>
             </a:pPr>
             <a:r>
@@ -22431,7 +21793,7 @@
           <a:bodyPr wrap="square" lIns="0" tIns="0" rIns="0" bIns="0" rtlCol="0" anchor="ctr"/>
           <a:lstStyle/>
           <a:p>
-            <a:pPr indent="0" marL="0">
+            <a:pPr marL="0" indent="0">
               <a:buNone/>
             </a:pPr>
             <a:r>
@@ -22445,9 +21807,6 @@
               </a:rPr>
               <a:t>In n8n: </a:t>
             </a:r>
-            <a:pPr indent="0" marL="0">
-              <a:buNone/>
-            </a:pPr>
             <a:r>
               <a:rPr lang="en-US" sz="1250" b="1" dirty="0">
                 <a:solidFill>
@@ -22459,9 +21818,6 @@
               </a:rPr>
               <a:t>Credentials → MySQL</a:t>
             </a:r>
-            <a:pPr indent="0" marL="0">
-              <a:buNone/>
-            </a:pPr>
             <a:r>
               <a:rPr lang="en-US" sz="1250" dirty="0">
                 <a:solidFill>
@@ -22473,9 +21829,6 @@
               </a:rPr>
               <a:t>. Host </a:t>
             </a:r>
-            <a:pPr indent="0" marL="0">
-              <a:buNone/>
-            </a:pPr>
             <a:r>
               <a:rPr lang="en-US" sz="1250" b="1" dirty="0">
                 <a:solidFill>
@@ -22487,9 +21840,6 @@
               </a:rPr>
               <a:t>host.docker.internal</a:t>
             </a:r>
-            <a:pPr indent="0" marL="0">
-              <a:buNone/>
-            </a:pPr>
             <a:r>
               <a:rPr lang="en-US" sz="1250" dirty="0">
                 <a:solidFill>
@@ -22501,9 +21851,6 @@
               </a:rPr>
               <a:t>, port </a:t>
             </a:r>
-            <a:pPr indent="0" marL="0">
-              <a:buNone/>
-            </a:pPr>
             <a:r>
               <a:rPr lang="en-US" sz="1250" b="1" dirty="0">
                 <a:solidFill>
@@ -22565,7 +21912,7 @@
           <a:bodyPr wrap="square" lIns="0" tIns="0" rIns="0" bIns="0" rtlCol="0" anchor="ctr"/>
           <a:lstStyle/>
           <a:p>
-            <a:pPr algn="ctr" indent="0" marL="0">
+            <a:pPr marL="0" indent="0" algn="ctr">
               <a:buNone/>
             </a:pPr>
             <a:r>
@@ -22604,7 +21951,7 @@
           <a:bodyPr wrap="square" lIns="0" tIns="0" rIns="0" bIns="0" rtlCol="0" anchor="ctr"/>
           <a:lstStyle/>
           <a:p>
-            <a:pPr indent="0" marL="0">
+            <a:pPr marL="0" indent="0">
               <a:buNone/>
             </a:pPr>
             <a:r>
@@ -22618,9 +21965,6 @@
               </a:rPr>
               <a:t>Database </a:t>
             </a:r>
-            <a:pPr indent="0" marL="0">
-              <a:buNone/>
-            </a:pPr>
             <a:r>
               <a:rPr lang="en-US" sz="1250" b="1" dirty="0">
                 <a:solidFill>
@@ -22632,9 +21976,6 @@
               </a:rPr>
               <a:t>bizdb</a:t>
             </a:r>
-            <a:pPr indent="0" marL="0">
-              <a:buNone/>
-            </a:pPr>
             <a:r>
               <a:rPr lang="en-US" sz="1250" dirty="0">
                 <a:solidFill>
@@ -22646,9 +21987,6 @@
               </a:rPr>
               <a:t>, user </a:t>
             </a:r>
-            <a:pPr indent="0" marL="0">
-              <a:buNone/>
-            </a:pPr>
             <a:r>
               <a:rPr lang="en-US" sz="1250" b="1" dirty="0">
                 <a:solidFill>
@@ -22660,9 +21998,6 @@
               </a:rPr>
               <a:t>n8n</a:t>
             </a:r>
-            <a:pPr indent="0" marL="0">
-              <a:buNone/>
-            </a:pPr>
             <a:r>
               <a:rPr lang="en-US" sz="1250" dirty="0">
                 <a:solidFill>
@@ -22674,9 +22009,6 @@
               </a:rPr>
               <a:t>, password </a:t>
             </a:r>
-            <a:pPr indent="0" marL="0">
-              <a:buNone/>
-            </a:pPr>
             <a:r>
               <a:rPr lang="en-US" sz="1250" b="1" dirty="0">
                 <a:solidFill>
@@ -22688,9 +22020,6 @@
               </a:rPr>
               <a:t>n8npass</a:t>
             </a:r>
-            <a:pPr indent="0" marL="0">
-              <a:buNone/>
-            </a:pPr>
             <a:r>
               <a:rPr lang="en-US" sz="1250" dirty="0">
                 <a:solidFill>
@@ -22702,9 +22031,6 @@
               </a:rPr>
               <a:t> → </a:t>
             </a:r>
-            <a:pPr indent="0" marL="0">
-              <a:buNone/>
-            </a:pPr>
             <a:r>
               <a:rPr lang="en-US" sz="1250" b="1" dirty="0">
                 <a:solidFill>
@@ -22766,7 +22092,7 @@
           <a:bodyPr wrap="square" lIns="0" tIns="0" rIns="0" bIns="0" rtlCol="0" anchor="ctr"/>
           <a:lstStyle/>
           <a:p>
-            <a:pPr algn="ctr" indent="0" marL="0">
+            <a:pPr marL="0" indent="0" algn="ctr">
               <a:buNone/>
             </a:pPr>
             <a:r>
@@ -22805,7 +22131,7 @@
           <a:bodyPr wrap="square" lIns="0" tIns="0" rIns="0" bIns="0" rtlCol="0" anchor="ctr"/>
           <a:lstStyle/>
           <a:p>
-            <a:pPr indent="0" marL="0">
+            <a:pPr marL="0" indent="0">
               <a:buNone/>
             </a:pPr>
             <a:r>
@@ -22819,9 +22145,6 @@
               </a:rPr>
               <a:t>Why not </a:t>
             </a:r>
-            <a:pPr indent="0" marL="0">
-              <a:buNone/>
-            </a:pPr>
             <a:r>
               <a:rPr lang="en-US" sz="1250" b="1" dirty="0">
                 <a:solidFill>
@@ -22833,9 +22156,6 @@
               </a:rPr>
               <a:t>localhost</a:t>
             </a:r>
-            <a:pPr indent="0" marL="0">
-              <a:buNone/>
-            </a:pPr>
             <a:r>
               <a:rPr lang="en-US" sz="1250" dirty="0">
                 <a:solidFill>
@@ -22872,7 +22192,7 @@
           <a:bodyPr wrap="square" lIns="0" tIns="0" rIns="0" bIns="0" rtlCol="0" anchor="t"/>
           <a:lstStyle/>
           <a:p>
-            <a:pPr indent="0" marL="0">
+            <a:pPr marL="0" indent="0">
               <a:buNone/>
             </a:pPr>
             <a:r>
@@ -22938,7 +22258,7 @@
           <a:bodyPr wrap="square" lIns="0" tIns="0" rIns="0" bIns="0" rtlCol="0" anchor="t"/>
           <a:lstStyle/>
           <a:p>
-            <a:pPr indent="0" marL="0">
+            <a:pPr marL="0" indent="0">
               <a:buNone/>
             </a:pPr>
             <a:r>
@@ -22955,7 +22275,7 @@
             <a:endParaRPr lang="en-US" sz="900" dirty="0"/>
           </a:p>
           <a:p>
-            <a:pPr indent="0" marL="0">
+            <a:pPr marL="0" indent="0">
               <a:buNone/>
             </a:pPr>
             <a:r>
@@ -22972,7 +22292,7 @@
             <a:endParaRPr lang="en-US" sz="900" dirty="0"/>
           </a:p>
           <a:p>
-            <a:pPr indent="0" marL="0">
+            <a:pPr marL="0" indent="0">
               <a:buNone/>
             </a:pPr>
             <a:r>
@@ -22989,7 +22309,7 @@
             <a:endParaRPr lang="en-US" sz="900" dirty="0"/>
           </a:p>
           <a:p>
-            <a:pPr indent="0" marL="0">
+            <a:pPr marL="0" indent="0">
               <a:buNone/>
             </a:pPr>
             <a:r>
@@ -23006,7 +22326,7 @@
             <a:endParaRPr lang="en-US" sz="900" dirty="0"/>
           </a:p>
           <a:p>
-            <a:pPr indent="0" marL="0">
+            <a:pPr marL="0" indent="0">
               <a:buNone/>
             </a:pPr>
             <a:r>
@@ -23023,7 +22343,7 @@
             <a:endParaRPr lang="en-US" sz="900" dirty="0"/>
           </a:p>
           <a:p>
-            <a:pPr indent="0" marL="0">
+            <a:pPr marL="0" indent="0">
               <a:buNone/>
             </a:pPr>
             <a:r>
@@ -23040,7 +22360,7 @@
             <a:endParaRPr lang="en-US" sz="900" dirty="0"/>
           </a:p>
           <a:p>
-            <a:pPr indent="0" marL="0">
+            <a:pPr marL="0" indent="0">
               <a:buNone/>
             </a:pPr>
             <a:r>
@@ -23057,7 +22377,7 @@
             <a:endParaRPr lang="en-US" sz="900" dirty="0"/>
           </a:p>
           <a:p>
-            <a:pPr indent="0" marL="0">
+            <a:pPr marL="0" indent="0">
               <a:buNone/>
             </a:pPr>
             <a:r>
@@ -23074,7 +22394,7 @@
             <a:endParaRPr lang="en-US" sz="900" dirty="0"/>
           </a:p>
           <a:p>
-            <a:pPr indent="0" marL="0">
+            <a:pPr marL="0" indent="0">
               <a:buNone/>
             </a:pPr>
             <a:r>
@@ -23091,7 +22411,7 @@
             <a:endParaRPr lang="en-US" sz="900" dirty="0"/>
           </a:p>
           <a:p>
-            <a:pPr indent="0" marL="0">
+            <a:pPr marL="0" indent="0">
               <a:buNone/>
             </a:pPr>
             <a:r>
@@ -23108,7 +22428,7 @@
             <a:endParaRPr lang="en-US" sz="900" dirty="0"/>
           </a:p>
           <a:p>
-            <a:pPr indent="0" marL="0">
+            <a:pPr marL="0" indent="0">
               <a:buNone/>
             </a:pPr>
             <a:r>
@@ -23125,7 +22445,7 @@
             <a:endParaRPr lang="en-US" sz="900" dirty="0"/>
           </a:p>
           <a:p>
-            <a:pPr indent="0" marL="0">
+            <a:pPr marL="0" indent="0">
               <a:buNone/>
             </a:pPr>
             <a:r>
@@ -23142,7 +22462,7 @@
             <a:endParaRPr lang="en-US" sz="900" dirty="0"/>
           </a:p>
           <a:p>
-            <a:pPr indent="0" marL="0">
+            <a:pPr marL="0" indent="0">
               <a:buNone/>
             </a:pPr>
             <a:r>
@@ -23159,7 +22479,7 @@
             <a:endParaRPr lang="en-US" sz="900" dirty="0"/>
           </a:p>
           <a:p>
-            <a:pPr indent="0" marL="0">
+            <a:pPr marL="0" indent="0">
               <a:buNone/>
             </a:pPr>
             <a:r>
@@ -23193,6 +22513,7 @@
         <a:solidFill>
           <a:srgbClr val="FFFFFF"/>
         </a:solidFill>
+        <a:effectLst/>
       </p:bgPr>
     </p:bg>
     <p:spTree>
@@ -23230,7 +22551,7 @@
           <a:bodyPr wrap="square" lIns="0" tIns="0" rIns="0" bIns="0" rtlCol="0" anchor="t"/>
           <a:lstStyle/>
           <a:p>
-            <a:pPr algn="r" indent="0" marL="0">
+            <a:pPr marL="0" indent="0" algn="r">
               <a:buNone/>
             </a:pPr>
             <a:r>
@@ -23296,7 +22617,7 @@
           <a:bodyPr wrap="square" lIns="0" tIns="0" rIns="0" bIns="0" rtlCol="0" anchor="ctr"/>
           <a:lstStyle/>
           <a:p>
-            <a:pPr algn="ctr" indent="0" marL="0">
+            <a:pPr marL="0" indent="0" algn="ctr">
               <a:buNone/>
             </a:pPr>
             <a:r>
@@ -23335,7 +22656,7 @@
           <a:bodyPr wrap="square" lIns="0" tIns="0" rIns="0" bIns="0" rtlCol="0" anchor="ctr"/>
           <a:lstStyle/>
           <a:p>
-            <a:pPr indent="0" marL="0">
+            <a:pPr marL="0" indent="0">
               <a:buNone/>
             </a:pPr>
             <a:r>
@@ -23349,9 +22670,6 @@
               </a:rPr>
               <a:t>Lead Capture &amp; Qualification</a:t>
             </a:r>
-            <a:pPr indent="0" marL="0">
-              <a:buNone/>
-            </a:pPr>
             <a:r>
               <a:rPr lang="en-US" sz="2400" dirty="0">
                 <a:solidFill>
@@ -23423,14 +22741,14 @@
       </p:sp>
       <p:pic>
         <p:nvPicPr>
-          <p:cNvPr id="8" name="Image 0" descr="preencoded.png">    </p:cNvPr>
+          <p:cNvPr id="8" name="Image 0" descr="preencoded.png"/>
           <p:cNvPicPr>
             <a:picLocks noChangeAspect="1"/>
           </p:cNvPicPr>
           <p:nvPr/>
         </p:nvPicPr>
         <p:blipFill>
-          <a:blip r:embed="rId1"/>
+          <a:blip r:embed="rId3"/>
           <a:stretch>
             <a:fillRect/>
           </a:stretch>
@@ -23466,7 +22784,7 @@
           <a:bodyPr wrap="square" lIns="0" tIns="0" rIns="0" bIns="0" rtlCol="0" anchor="t"/>
           <a:lstStyle/>
           <a:p>
-            <a:pPr algn="ctr" indent="0" marL="0">
+            <a:pPr marL="0" indent="0" algn="ctr">
               <a:buNone/>
             </a:pPr>
             <a:r>
@@ -23483,7 +22801,7 @@
             <a:endParaRPr lang="en-US" sz="1050" dirty="0"/>
           </a:p>
           <a:p>
-            <a:pPr algn="ctr" indent="0" marL="0">
+            <a:pPr marL="0" indent="0" algn="ctr">
               <a:buNone/>
             </a:pPr>
             <a:r>
@@ -23554,14 +22872,14 @@
       </p:sp>
       <p:pic>
         <p:nvPicPr>
-          <p:cNvPr id="12" name="Image 1" descr="preencoded.png">    </p:cNvPr>
+          <p:cNvPr id="12" name="Image 1" descr="preencoded.png"/>
           <p:cNvPicPr>
             <a:picLocks noChangeAspect="1"/>
           </p:cNvPicPr>
           <p:nvPr/>
         </p:nvPicPr>
         <p:blipFill>
-          <a:blip r:embed="rId2"/>
+          <a:blip r:embed="rId4"/>
           <a:stretch>
             <a:fillRect/>
           </a:stretch>
@@ -23597,7 +22915,7 @@
           <a:bodyPr wrap="square" lIns="0" tIns="0" rIns="0" bIns="0" rtlCol="0" anchor="t"/>
           <a:lstStyle/>
           <a:p>
-            <a:pPr algn="ctr" indent="0" marL="0">
+            <a:pPr marL="0" indent="0" algn="ctr">
               <a:buNone/>
             </a:pPr>
             <a:r>
@@ -23614,7 +22932,7 @@
             <a:endParaRPr lang="en-US" sz="1050" dirty="0"/>
           </a:p>
           <a:p>
-            <a:pPr algn="ctr" indent="0" marL="0">
+            <a:pPr marL="0" indent="0" algn="ctr">
               <a:buNone/>
             </a:pPr>
             <a:r>
@@ -23685,14 +23003,14 @@
       </p:sp>
       <p:pic>
         <p:nvPicPr>
-          <p:cNvPr id="16" name="Image 2" descr="preencoded.png">    </p:cNvPr>
+          <p:cNvPr id="16" name="Image 2" descr="preencoded.png"/>
           <p:cNvPicPr>
             <a:picLocks noChangeAspect="1"/>
           </p:cNvPicPr>
           <p:nvPr/>
         </p:nvPicPr>
         <p:blipFill>
-          <a:blip r:embed="rId3"/>
+          <a:blip r:embed="rId5"/>
           <a:stretch>
             <a:fillRect/>
           </a:stretch>
@@ -23728,7 +23046,7 @@
           <a:bodyPr wrap="square" lIns="0" tIns="0" rIns="0" bIns="0" rtlCol="0" anchor="t"/>
           <a:lstStyle/>
           <a:p>
-            <a:pPr algn="ctr" indent="0" marL="0">
+            <a:pPr marL="0" indent="0" algn="ctr">
               <a:buNone/>
             </a:pPr>
             <a:r>
@@ -23745,7 +23063,7 @@
             <a:endParaRPr lang="en-US" sz="1050" dirty="0"/>
           </a:p>
           <a:p>
-            <a:pPr algn="ctr" indent="0" marL="0">
+            <a:pPr marL="0" indent="0" algn="ctr">
               <a:buNone/>
             </a:pPr>
             <a:r>
@@ -23816,14 +23134,14 @@
       </p:sp>
       <p:pic>
         <p:nvPicPr>
-          <p:cNvPr id="20" name="Image 3" descr="preencoded.png">    </p:cNvPr>
+          <p:cNvPr id="20" name="Image 3" descr="preencoded.png"/>
           <p:cNvPicPr>
             <a:picLocks noChangeAspect="1"/>
           </p:cNvPicPr>
           <p:nvPr/>
         </p:nvPicPr>
         <p:blipFill>
-          <a:blip r:embed="rId4"/>
+          <a:blip r:embed="rId6"/>
           <a:stretch>
             <a:fillRect/>
           </a:stretch>
@@ -23859,7 +23177,7 @@
           <a:bodyPr wrap="square" lIns="0" tIns="0" rIns="0" bIns="0" rtlCol="0" anchor="t"/>
           <a:lstStyle/>
           <a:p>
-            <a:pPr algn="ctr" indent="0" marL="0">
+            <a:pPr marL="0" indent="0" algn="ctr">
               <a:buNone/>
             </a:pPr>
             <a:r>
@@ -23876,7 +23194,7 @@
             <a:endParaRPr lang="en-US" sz="1050" dirty="0"/>
           </a:p>
           <a:p>
-            <a:pPr algn="ctr" indent="0" marL="0">
+            <a:pPr marL="0" indent="0" algn="ctr">
               <a:buNone/>
             </a:pPr>
             <a:r>
@@ -23947,14 +23265,14 @@
       </p:sp>
       <p:pic>
         <p:nvPicPr>
-          <p:cNvPr id="24" name="Image 4" descr="preencoded.png">    </p:cNvPr>
+          <p:cNvPr id="24" name="Image 4" descr="preencoded.png"/>
           <p:cNvPicPr>
             <a:picLocks noChangeAspect="1"/>
           </p:cNvPicPr>
           <p:nvPr/>
         </p:nvPicPr>
         <p:blipFill>
-          <a:blip r:embed="rId5"/>
+          <a:blip r:embed="rId7"/>
           <a:stretch>
             <a:fillRect/>
           </a:stretch>
@@ -23990,7 +23308,7 @@
           <a:bodyPr wrap="square" lIns="0" tIns="0" rIns="0" bIns="0" rtlCol="0" anchor="t"/>
           <a:lstStyle/>
           <a:p>
-            <a:pPr algn="ctr" indent="0" marL="0">
+            <a:pPr marL="0" indent="0" algn="ctr">
               <a:buNone/>
             </a:pPr>
             <a:r>
@@ -24007,7 +23325,7 @@
             <a:endParaRPr lang="en-US" sz="1050" dirty="0"/>
           </a:p>
           <a:p>
-            <a:pPr algn="ctr" indent="0" marL="0">
+            <a:pPr marL="0" indent="0" algn="ctr">
               <a:buNone/>
             </a:pPr>
             <a:r>
@@ -24046,11 +23364,11 @@
           <a:bodyPr wrap="square" lIns="0" tIns="0" rIns="0" bIns="0" rtlCol="0" anchor="t"/>
           <a:lstStyle/>
           <a:p>
-            <a:pPr indent="0" marL="0">
-              <a:buNone/>
-            </a:pPr>
-            <a:r>
-              <a:rPr lang="en-US" sz="1000" b="1" spc="300" kern="0" dirty="0">
+            <a:pPr marL="0" indent="0">
+              <a:buNone/>
+            </a:pPr>
+            <a:r>
+              <a:rPr lang="en-US" sz="1000" b="1" kern="0" spc="300" dirty="0">
                 <a:solidFill>
                   <a:srgbClr val="EA4B71"/>
                 </a:solidFill>
@@ -24085,7 +23403,7 @@
           <a:bodyPr wrap="square" lIns="0" tIns="0" rIns="0" bIns="0" rtlCol="0" anchor="t"/>
           <a:lstStyle/>
           <a:p>
-            <a:pPr indent="0" marL="0">
+            <a:pPr marL="0" indent="0">
               <a:buNone/>
             </a:pPr>
             <a:r>
@@ -24099,9 +23417,6 @@
               </a:rPr>
               <a:t>Leads arrive through a web form. The workflow cleans the data, labels each lead </a:t>
             </a:r>
-            <a:pPr indent="0" marL="0">
-              <a:buNone/>
-            </a:pPr>
             <a:r>
               <a:rPr lang="en-US" sz="1300" b="1" dirty="0">
                 <a:solidFill>
@@ -24113,9 +23428,6 @@
               </a:rPr>
               <a:t>hot, warm or cold</a:t>
             </a:r>
-            <a:pPr indent="0" marL="0">
-              <a:buNone/>
-            </a:pPr>
             <a:r>
               <a:rPr lang="en-US" sz="1300" dirty="0">
                 <a:solidFill>
@@ -24152,11 +23464,11 @@
           <a:bodyPr wrap="square" lIns="0" tIns="0" rIns="0" bIns="0" rtlCol="0" anchor="t"/>
           <a:lstStyle/>
           <a:p>
-            <a:pPr indent="0" marL="0">
-              <a:buNone/>
-            </a:pPr>
-            <a:r>
-              <a:rPr lang="en-US" sz="1000" b="1" spc="300" kern="0" dirty="0">
+            <a:pPr marL="0" indent="0">
+              <a:buNone/>
+            </a:pPr>
+            <a:r>
+              <a:rPr lang="en-US" sz="1000" b="1" kern="0" spc="300" dirty="0">
                 <a:solidFill>
                   <a:srgbClr val="1A7F8E"/>
                 </a:solidFill>
@@ -24230,12 +23542,6 @@
               </a:rPr>
               <a:t>MySQL </a:t>
             </a:r>
-            <a:pPr indent="0" marL="0">
-              <a:spcAft>
-                <a:spcPts val="400"/>
-              </a:spcAft>
-              <a:buNone/>
-            </a:pPr>
             <a:r>
               <a:rPr lang="en-US" sz="1250" b="1" dirty="0">
                 <a:solidFill>
@@ -24247,12 +23553,6 @@
               </a:rPr>
               <a:t>Insert</a:t>
             </a:r>
-            <a:pPr indent="0" marL="0">
-              <a:spcAft>
-                <a:spcPts val="400"/>
-              </a:spcAft>
-              <a:buNone/>
-            </a:pPr>
             <a:r>
               <a:rPr lang="en-US" sz="1250" dirty="0">
                 <a:solidFill>
@@ -24306,12 +23606,6 @@
               </a:rPr>
               <a:t>Reading an earlier node with </a:t>
             </a:r>
-            <a:pPr indent="0" marL="0">
-              <a:spcAft>
-                <a:spcPts val="400"/>
-              </a:spcAft>
-              <a:buNone/>
-            </a:pPr>
             <a:r>
               <a:rPr lang="en-US" sz="1250" b="1" dirty="0">
                 <a:solidFill>
@@ -24628,4 +23922,299 @@
     </a:ext>
   </a:extLst>
 </a:theme>
+</file>
+
+<file path=ppt/theme/theme2.xml><?xml version="1.0" encoding="utf-8"?>
+<a:theme xmlns:a="http://schemas.openxmlformats.org/drawingml/2006/main" name="Office Theme">
+  <a:themeElements>
+    <a:clrScheme name="Office">
+      <a:dk1>
+        <a:sysClr val="windowText" lastClr="000000"/>
+      </a:dk1>
+      <a:lt1>
+        <a:sysClr val="window" lastClr="FFFFFF"/>
+      </a:lt1>
+      <a:dk2>
+        <a:srgbClr val="44546A"/>
+      </a:dk2>
+      <a:lt2>
+        <a:srgbClr val="E7E6E6"/>
+      </a:lt2>
+      <a:accent1>
+        <a:srgbClr val="4472C4"/>
+      </a:accent1>
+      <a:accent2>
+        <a:srgbClr val="ED7D31"/>
+      </a:accent2>
+      <a:accent3>
+        <a:srgbClr val="A5A5A5"/>
+      </a:accent3>
+      <a:accent4>
+        <a:srgbClr val="FFC000"/>
+      </a:accent4>
+      <a:accent5>
+        <a:srgbClr val="5B9BD5"/>
+      </a:accent5>
+      <a:accent6>
+        <a:srgbClr val="70AD47"/>
+      </a:accent6>
+      <a:hlink>
+        <a:srgbClr val="0563C1"/>
+      </a:hlink>
+      <a:folHlink>
+        <a:srgbClr val="954F72"/>
+      </a:folHlink>
+    </a:clrScheme>
+    <a:fontScheme name="Office">
+      <a:majorFont>
+        <a:latin typeface="Calibri Light" panose="020F0302020204030204"/>
+        <a:ea typeface=""/>
+        <a:cs typeface=""/>
+        <a:font script="Jpan" typeface="游ゴシック Light"/>
+        <a:font script="Hang" typeface="맑은 고딕"/>
+        <a:font script="Hans" typeface="等线 Light"/>
+        <a:font script="Hant" typeface="新細明體"/>
+        <a:font script="Arab" typeface="Times New Roman"/>
+        <a:font script="Hebr" typeface="Times New Roman"/>
+        <a:font script="Thai" typeface="Angsana New"/>
+        <a:font script="Ethi" typeface="Nyala"/>
+        <a:font script="Beng" typeface="Vrinda"/>
+        <a:font script="Gujr" typeface="Shruti"/>
+        <a:font script="Khmr" typeface="MoolBoran"/>
+        <a:font script="Knda" typeface="Tunga"/>
+        <a:font script="Guru" typeface="Raavi"/>
+        <a:font script="Cans" typeface="Euphemia"/>
+        <a:font script="Cher" typeface="Plantagenet Cherokee"/>
+        <a:font script="Yiii" typeface="Microsoft Yi Baiti"/>
+        <a:font script="Tibt" typeface="Microsoft Himalaya"/>
+        <a:font script="Thaa" typeface="MV Boli"/>
+        <a:font script="Deva" typeface="Mangal"/>
+        <a:font script="Telu" typeface="Gautami"/>
+        <a:font script="Taml" typeface="Latha"/>
+        <a:font script="Syrc" typeface="Estrangelo Edessa"/>
+        <a:font script="Orya" typeface="Kalinga"/>
+        <a:font script="Mlym" typeface="Kartika"/>
+        <a:font script="Laoo" typeface="DokChampa"/>
+        <a:font script="Sinh" typeface="Iskoola Pota"/>
+        <a:font script="Mong" typeface="Mongolian Baiti"/>
+        <a:font script="Viet" typeface="Times New Roman"/>
+        <a:font script="Uigh" typeface="Microsoft Uighur"/>
+        <a:font script="Geor" typeface="Sylfaen"/>
+        <a:font script="Armn" typeface="Arial"/>
+        <a:font script="Bugi" typeface="Leelawadee UI"/>
+        <a:font script="Bopo" typeface="Microsoft JhengHei"/>
+        <a:font script="Java" typeface="Javanese Text"/>
+        <a:font script="Lisu" typeface="Segoe UI"/>
+        <a:font script="Mymr" typeface="Myanmar Text"/>
+        <a:font script="Nkoo" typeface="Ebrima"/>
+        <a:font script="Olck" typeface="Nirmala UI"/>
+        <a:font script="Osma" typeface="Ebrima"/>
+        <a:font script="Phag" typeface="Phagspa"/>
+        <a:font script="Syrn" typeface="Estrangelo Edessa"/>
+        <a:font script="Syrj" typeface="Estrangelo Edessa"/>
+        <a:font script="Syre" typeface="Estrangelo Edessa"/>
+        <a:font script="Sora" typeface="Nirmala UI"/>
+        <a:font script="Tale" typeface="Microsoft Tai Le"/>
+        <a:font script="Talu" typeface="Microsoft New Tai Lue"/>
+        <a:font script="Tfng" typeface="Ebrima"/>
+      </a:majorFont>
+      <a:minorFont>
+        <a:latin typeface="Calibri" panose="020F0502020204030204"/>
+        <a:ea typeface=""/>
+        <a:cs typeface=""/>
+        <a:font script="Jpan" typeface="游ゴシック"/>
+        <a:font script="Hang" typeface="맑은 고딕"/>
+        <a:font script="Hans" typeface="等线"/>
+        <a:font script="Hant" typeface="新細明體"/>
+        <a:font script="Arab" typeface="Arial"/>
+        <a:font script="Hebr" typeface="Arial"/>
+        <a:font script="Thai" typeface="Cordia New"/>
+        <a:font script="Ethi" typeface="Nyala"/>
+        <a:font script="Beng" typeface="Vrinda"/>
+        <a:font script="Gujr" typeface="Shruti"/>
+        <a:font script="Khmr" typeface="DaunPenh"/>
+        <a:font script="Knda" typeface="Tunga"/>
+        <a:font script="Guru" typeface="Raavi"/>
+        <a:font script="Cans" typeface="Euphemia"/>
+        <a:font script="Cher" typeface="Plantagenet Cherokee"/>
+        <a:font script="Yiii" typeface="Microsoft Yi Baiti"/>
+        <a:font script="Tibt" typeface="Microsoft Himalaya"/>
+        <a:font script="Thaa" typeface="MV Boli"/>
+        <a:font script="Deva" typeface="Mangal"/>
+        <a:font script="Telu" typeface="Gautami"/>
+        <a:font script="Taml" typeface="Latha"/>
+        <a:font script="Syrc" typeface="Estrangelo Edessa"/>
+        <a:font script="Orya" typeface="Kalinga"/>
+        <a:font script="Mlym" typeface="Kartika"/>
+        <a:font script="Laoo" typeface="DokChampa"/>
+        <a:font script="Sinh" typeface="Iskoola Pota"/>
+        <a:font script="Mong" typeface="Mongolian Baiti"/>
+        <a:font script="Viet" typeface="Arial"/>
+        <a:font script="Uigh" typeface="Microsoft Uighur"/>
+        <a:font script="Geor" typeface="Sylfaen"/>
+        <a:font script="Armn" typeface="Arial"/>
+        <a:font script="Bugi" typeface="Leelawadee UI"/>
+        <a:font script="Bopo" typeface="Microsoft JhengHei"/>
+        <a:font script="Java" typeface="Javanese Text"/>
+        <a:font script="Lisu" typeface="Segoe UI"/>
+        <a:font script="Mymr" typeface="Myanmar Text"/>
+        <a:font script="Nkoo" typeface="Ebrima"/>
+        <a:font script="Olck" typeface="Nirmala UI"/>
+        <a:font script="Osma" typeface="Ebrima"/>
+        <a:font script="Phag" typeface="Phagspa"/>
+        <a:font script="Syrn" typeface="Estrangelo Edessa"/>
+        <a:font script="Syrj" typeface="Estrangelo Edessa"/>
+        <a:font script="Syre" typeface="Estrangelo Edessa"/>
+        <a:font script="Sora" typeface="Nirmala UI"/>
+        <a:font script="Tale" typeface="Microsoft Tai Le"/>
+        <a:font script="Talu" typeface="Microsoft New Tai Lue"/>
+        <a:font script="Tfng" typeface="Ebrima"/>
+      </a:minorFont>
+    </a:fontScheme>
+    <a:fmtScheme name="Office">
+      <a:fillStyleLst>
+        <a:solidFill>
+          <a:schemeClr val="phClr"/>
+        </a:solidFill>
+        <a:gradFill rotWithShape="1">
+          <a:gsLst>
+            <a:gs pos="0">
+              <a:schemeClr val="phClr">
+                <a:lumMod val="110000"/>
+                <a:satMod val="105000"/>
+                <a:tint val="67000"/>
+              </a:schemeClr>
+            </a:gs>
+            <a:gs pos="50000">
+              <a:schemeClr val="phClr">
+                <a:lumMod val="105000"/>
+                <a:satMod val="103000"/>
+                <a:tint val="73000"/>
+              </a:schemeClr>
+            </a:gs>
+            <a:gs pos="100000">
+              <a:schemeClr val="phClr">
+                <a:lumMod val="105000"/>
+                <a:satMod val="109000"/>
+                <a:tint val="81000"/>
+              </a:schemeClr>
+            </a:gs>
+          </a:gsLst>
+          <a:lin ang="5400000" scaled="0"/>
+        </a:gradFill>
+        <a:gradFill rotWithShape="1">
+          <a:gsLst>
+            <a:gs pos="0">
+              <a:schemeClr val="phClr">
+                <a:satMod val="103000"/>
+                <a:lumMod val="102000"/>
+                <a:tint val="94000"/>
+              </a:schemeClr>
+            </a:gs>
+            <a:gs pos="50000">
+              <a:schemeClr val="phClr">
+                <a:satMod val="110000"/>
+                <a:lumMod val="100000"/>
+                <a:shade val="100000"/>
+              </a:schemeClr>
+            </a:gs>
+            <a:gs pos="100000">
+              <a:schemeClr val="phClr">
+                <a:lumMod val="99000"/>
+                <a:satMod val="120000"/>
+                <a:shade val="78000"/>
+              </a:schemeClr>
+            </a:gs>
+          </a:gsLst>
+          <a:lin ang="5400000" scaled="0"/>
+        </a:gradFill>
+      </a:fillStyleLst>
+      <a:lnStyleLst>
+        <a:ln w="6350" cap="flat" cmpd="sng" algn="ctr">
+          <a:solidFill>
+            <a:schemeClr val="phClr"/>
+          </a:solidFill>
+          <a:prstDash val="solid"/>
+          <a:miter lim="800000"/>
+        </a:ln>
+        <a:ln w="12700" cap="flat" cmpd="sng" algn="ctr">
+          <a:solidFill>
+            <a:schemeClr val="phClr"/>
+          </a:solidFill>
+          <a:prstDash val="solid"/>
+          <a:miter lim="800000"/>
+        </a:ln>
+        <a:ln w="19050" cap="flat" cmpd="sng" algn="ctr">
+          <a:solidFill>
+            <a:schemeClr val="phClr"/>
+          </a:solidFill>
+          <a:prstDash val="solid"/>
+          <a:miter lim="800000"/>
+        </a:ln>
+      </a:lnStyleLst>
+      <a:effectStyleLst>
+        <a:effectStyle>
+          <a:effectLst/>
+        </a:effectStyle>
+        <a:effectStyle>
+          <a:effectLst/>
+        </a:effectStyle>
+        <a:effectStyle>
+          <a:effectLst>
+            <a:outerShdw blurRad="57150" dist="19050" dir="5400000" algn="ctr" rotWithShape="0">
+              <a:srgbClr val="000000">
+                <a:alpha val="63000"/>
+              </a:srgbClr>
+            </a:outerShdw>
+          </a:effectLst>
+        </a:effectStyle>
+      </a:effectStyleLst>
+      <a:bgFillStyleLst>
+        <a:solidFill>
+          <a:schemeClr val="phClr"/>
+        </a:solidFill>
+        <a:solidFill>
+          <a:schemeClr val="phClr">
+            <a:tint val="95000"/>
+            <a:satMod val="170000"/>
+          </a:schemeClr>
+        </a:solidFill>
+        <a:gradFill rotWithShape="1">
+          <a:gsLst>
+            <a:gs pos="0">
+              <a:schemeClr val="phClr">
+                <a:tint val="93000"/>
+                <a:satMod val="150000"/>
+                <a:shade val="98000"/>
+                <a:lumMod val="102000"/>
+              </a:schemeClr>
+            </a:gs>
+            <a:gs pos="50000">
+              <a:schemeClr val="phClr">
+                <a:tint val="98000"/>
+                <a:satMod val="130000"/>
+                <a:shade val="90000"/>
+                <a:lumMod val="103000"/>
+              </a:schemeClr>
+            </a:gs>
+            <a:gs pos="100000">
+              <a:schemeClr val="phClr">
+                <a:shade val="63000"/>
+                <a:satMod val="120000"/>
+              </a:schemeClr>
+            </a:gs>
+          </a:gsLst>
+          <a:lin ang="5400000" scaled="0"/>
+        </a:gradFill>
+      </a:bgFillStyleLst>
+    </a:fmtScheme>
+  </a:themeElements>
+  <a:objectDefaults/>
+  <a:extraClrSchemeLst/>
+  <a:extLst>
+    <a:ext uri="{05A4C25C-085E-4340-85A3-A5531E510DB2}">
+      <thm15:themeFamily xmlns:thm15="http://schemas.microsoft.com/office/thememl/2012/main" name="Office Theme" id="{62F939B6-93AF-4DB8-9C6B-D6C7DFDC589F}" vid="{4A3C46E8-61CC-4603-A589-7422A47A8E4A}"/>
+    </a:ext>
+  </a:extLst>
+</a:theme>
 </file>
--- a/Low-Code-No-Code/no-code-low-code-2.pptx
+++ b/Low-Code-No-Code/no-code-low-code-2.pptx
@@ -22287,7 +22287,7 @@
                 <a:ea typeface="Courier New" pitchFamily="34" charset="-122"/>
                 <a:cs typeface="Courier New" pitchFamily="34" charset="-120"/>
               </a:rPr>
-              <a:t>docker volume create mysql_data</a:t>
+              <a:t>docker volume create scdl_my_sql_data</a:t>
             </a:r>
             <a:endParaRPr lang="en-US" sz="900" dirty="0"/>
           </a:p>
@@ -22372,7 +22372,7 @@
                 <a:ea typeface="Courier New" pitchFamily="34" charset="-122"/>
                 <a:cs typeface="Courier New" pitchFamily="34" charset="-120"/>
               </a:rPr>
-              <a:t>  -v mysql_data:/var/lib/mysql mysql:8.4</a:t>
+              <a:t>  -v scdl_my_sql_data:/var/lib/mysql mysql:8.4</a:t>
             </a:r>
             <a:endParaRPr lang="en-US" sz="900" dirty="0"/>
           </a:p>
